--- a/docs/01_Executive_Deck.pptx
+++ b/docs/01_Executive_Deck.pptx
@@ -2268,1903 +2268,30 @@
           </a:p>
         </p:txBody>
       </p:sp>
-      <p:sp>
-        <p:nvSpPr>
-          <p:cNvPr id="4" name="Shape 2"/>
-          <p:cNvSpPr/>
-          <p:nvPr/>
-        </p:nvSpPr>
+      <p:pic>
+        <p:nvPicPr>
+          <p:cNvPr id="4" name="Image 0" descr="/sessions/brave-peaceful-lovelace/mockups/kpi_dashboard.png">    </p:cNvPr>
+          <p:cNvPicPr>
+            <a:picLocks noChangeAspect="1"/>
+          </p:cNvPicPr>
+          <p:nvPr/>
+        </p:nvPicPr>
+        <p:blipFill>
+          <a:blip r:embed="rId1"/>
+          <a:stretch>
+            <a:fillRect/>
+          </a:stretch>
+        </p:blipFill>
         <p:spPr>
           <a:xfrm>
             <a:off x="274320" y="640080"/>
-            <a:ext cx="8595360" cy="4206240"/>
-          </a:xfrm>
-          <a:prstGeom prst="rect">
-            <a:avLst/>
-          </a:prstGeom>
-          <a:solidFill>
-            <a:srgbClr val="111111"/>
-          </a:solidFill>
-          <a:ln/>
-          <a:effectLst>
-            <a:outerShdw sx="100000" sy="100000" kx="0" ky="0" algn="bl" rotWithShape="0" blurRad="76200" dist="25400" dir="8100000">
-              <a:srgbClr val="000000">
-                <a:alpha val="40000"/>
-              </a:srgbClr>
-            </a:outerShdw>
-          </a:effectLst>
-        </p:spPr>
-      </p:sp>
-      <p:sp>
-        <p:nvSpPr>
-          <p:cNvPr id="5" name="Shape 3"/>
-          <p:cNvSpPr/>
-          <p:nvPr/>
-        </p:nvSpPr>
-        <p:spPr>
-          <a:xfrm>
-            <a:off x="457200" y="822960"/>
-            <a:ext cx="1920240" cy="1097280"/>
-          </a:xfrm>
-          <a:prstGeom prst="rect">
-            <a:avLst/>
-          </a:prstGeom>
-          <a:solidFill>
-            <a:srgbClr val="222222"/>
-          </a:solidFill>
-          <a:ln/>
-        </p:spPr>
-      </p:sp>
-      <p:sp>
-        <p:nvSpPr>
-          <p:cNvPr id="6" name="Text 4"/>
-          <p:cNvSpPr/>
-          <p:nvPr/>
-        </p:nvSpPr>
-        <p:spPr>
-          <a:xfrm>
-            <a:off x="594360" y="868680"/>
-            <a:ext cx="1645920" cy="502920"/>
-          </a:xfrm>
-          <a:prstGeom prst="rect">
-            <a:avLst/>
-          </a:prstGeom>
-          <a:noFill/>
-          <a:ln/>
-        </p:spPr>
-        <p:txBody>
-          <a:bodyPr wrap="square" lIns="0" tIns="0" rIns="0" bIns="0" rtlCol="0" anchor="ctr"/>
-          <a:lstStyle/>
-          <a:p>
-            <a:pPr indent="0" marL="0">
-              <a:buNone/>
-            </a:pPr>
-            <a:r>
-              <a:rPr lang="en-US" sz="2800" b="1" dirty="0">
-                <a:solidFill>
-                  <a:srgbClr val="FFFFFF"/>
-                </a:solidFill>
-                <a:latin typeface="Arial Black" pitchFamily="34" charset="0"/>
-                <a:ea typeface="Arial Black" pitchFamily="34" charset="-122"/>
-                <a:cs typeface="Arial Black" pitchFamily="34" charset="-120"/>
-              </a:rPr>
-              <a:t>47</a:t>
-            </a:r>
-            <a:endParaRPr lang="en-US" sz="2800" dirty="0"/>
-          </a:p>
-        </p:txBody>
-      </p:sp>
-      <p:sp>
-        <p:nvSpPr>
-          <p:cNvPr id="7" name="Text 5"/>
-          <p:cNvSpPr/>
-          <p:nvPr/>
-        </p:nvSpPr>
-        <p:spPr>
-          <a:xfrm>
-            <a:off x="594360" y="1371600"/>
-            <a:ext cx="1097280" cy="320040"/>
-          </a:xfrm>
-          <a:prstGeom prst="rect">
-            <a:avLst/>
-          </a:prstGeom>
-          <a:noFill/>
-          <a:ln/>
-        </p:spPr>
-        <p:txBody>
-          <a:bodyPr wrap="square" lIns="0" tIns="0" rIns="0" bIns="0" rtlCol="0" anchor="ctr"/>
-          <a:lstStyle/>
-          <a:p>
-            <a:pPr indent="0" marL="0">
-              <a:lnSpc>
-                <a:spcPct val="120000"/>
-              </a:lnSpc>
-              <a:buNone/>
-            </a:pPr>
-            <a:r>
-              <a:rPr lang="en-US" sz="700" dirty="0">
-                <a:solidFill>
-                  <a:srgbClr val="888888"/>
-                </a:solidFill>
-                <a:latin typeface="Arial" pitchFamily="34" charset="0"/>
-                <a:ea typeface="Arial" pitchFamily="34" charset="-122"/>
-                <a:cs typeface="Arial" pitchFamily="34" charset="-120"/>
-              </a:rPr>
-              <a:t>Urgenze risolte</a:t>
-            </a:r>
-            <a:endParaRPr lang="en-US" sz="700" dirty="0"/>
-          </a:p>
-          <a:p>
-            <a:pPr indent="0" marL="0">
-              <a:lnSpc>
-                <a:spcPct val="120000"/>
-              </a:lnSpc>
-              <a:buNone/>
-            </a:pPr>
-            <a:r>
-              <a:rPr lang="en-US" sz="700" dirty="0">
-                <a:solidFill>
-                  <a:srgbClr val="888888"/>
-                </a:solidFill>
-                <a:latin typeface="Arial" pitchFamily="34" charset="0"/>
-                <a:ea typeface="Arial" pitchFamily="34" charset="-122"/>
-                <a:cs typeface="Arial" pitchFamily="34" charset="-120"/>
-              </a:rPr>
-              <a:t>questo mese</a:t>
-            </a:r>
-            <a:endParaRPr lang="en-US" sz="700" dirty="0"/>
-          </a:p>
-        </p:txBody>
-      </p:sp>
-      <p:sp>
-        <p:nvSpPr>
-          <p:cNvPr id="8" name="Text 6"/>
-          <p:cNvSpPr/>
-          <p:nvPr/>
-        </p:nvSpPr>
-        <p:spPr>
-          <a:xfrm>
-            <a:off x="1737360" y="1371600"/>
-            <a:ext cx="502920" cy="228600"/>
-          </a:xfrm>
-          <a:prstGeom prst="rect">
-            <a:avLst/>
-          </a:prstGeom>
-          <a:noFill/>
-          <a:ln/>
-        </p:spPr>
-        <p:txBody>
-          <a:bodyPr wrap="square" lIns="0" tIns="0" rIns="0" bIns="0" rtlCol="0" anchor="ctr"/>
-          <a:lstStyle/>
-          <a:p>
-            <a:pPr algn="r" indent="0" marL="0">
-              <a:buNone/>
-            </a:pPr>
-            <a:r>
-              <a:rPr lang="en-US" sz="900" b="1" dirty="0">
-                <a:solidFill>
-                  <a:srgbClr val="34D058"/>
-                </a:solidFill>
-                <a:latin typeface="Arial" pitchFamily="34" charset="0"/>
-                <a:ea typeface="Arial" pitchFamily="34" charset="-122"/>
-                <a:cs typeface="Arial" pitchFamily="34" charset="-120"/>
-              </a:rPr>
-              <a:t>+12%</a:t>
-            </a:r>
-            <a:endParaRPr lang="en-US" sz="900" dirty="0"/>
-          </a:p>
-        </p:txBody>
-      </p:sp>
-      <p:sp>
-        <p:nvSpPr>
-          <p:cNvPr id="9" name="Shape 7"/>
-          <p:cNvSpPr/>
-          <p:nvPr/>
-        </p:nvSpPr>
-        <p:spPr>
-          <a:xfrm>
-            <a:off x="2560320" y="822960"/>
-            <a:ext cx="1920240" cy="1097280"/>
-          </a:xfrm>
-          <a:prstGeom prst="rect">
-            <a:avLst/>
-          </a:prstGeom>
-          <a:solidFill>
-            <a:srgbClr val="222222"/>
-          </a:solidFill>
-          <a:ln/>
-        </p:spPr>
-      </p:sp>
-      <p:sp>
-        <p:nvSpPr>
-          <p:cNvPr id="10" name="Text 8"/>
-          <p:cNvSpPr/>
-          <p:nvPr/>
-        </p:nvSpPr>
-        <p:spPr>
-          <a:xfrm>
-            <a:off x="2697480" y="868680"/>
-            <a:ext cx="1645920" cy="502920"/>
-          </a:xfrm>
-          <a:prstGeom prst="rect">
-            <a:avLst/>
-          </a:prstGeom>
-          <a:noFill/>
-          <a:ln/>
-        </p:spPr>
-        <p:txBody>
-          <a:bodyPr wrap="square" lIns="0" tIns="0" rIns="0" bIns="0" rtlCol="0" anchor="ctr"/>
-          <a:lstStyle/>
-          <a:p>
-            <a:pPr indent="0" marL="0">
-              <a:buNone/>
-            </a:pPr>
-            <a:r>
-              <a:rPr lang="en-US" sz="2800" b="1" dirty="0">
-                <a:solidFill>
-                  <a:srgbClr val="FFFFFF"/>
-                </a:solidFill>
-                <a:latin typeface="Arial Black" pitchFamily="34" charset="0"/>
-                <a:ea typeface="Arial Black" pitchFamily="34" charset="-122"/>
-                <a:cs typeface="Arial Black" pitchFamily="34" charset="-120"/>
-              </a:rPr>
-              <a:t>2.4h</a:t>
-            </a:r>
-            <a:endParaRPr lang="en-US" sz="2800" dirty="0"/>
-          </a:p>
-        </p:txBody>
-      </p:sp>
-      <p:sp>
-        <p:nvSpPr>
-          <p:cNvPr id="11" name="Text 9"/>
-          <p:cNvSpPr/>
-          <p:nvPr/>
-        </p:nvSpPr>
-        <p:spPr>
-          <a:xfrm>
-            <a:off x="2697480" y="1371600"/>
-            <a:ext cx="1097280" cy="320040"/>
-          </a:xfrm>
-          <a:prstGeom prst="rect">
-            <a:avLst/>
-          </a:prstGeom>
-          <a:noFill/>
-          <a:ln/>
-        </p:spPr>
-        <p:txBody>
-          <a:bodyPr wrap="square" lIns="0" tIns="0" rIns="0" bIns="0" rtlCol="0" anchor="ctr"/>
-          <a:lstStyle/>
-          <a:p>
-            <a:pPr indent="0" marL="0">
-              <a:lnSpc>
-                <a:spcPct val="120000"/>
-              </a:lnSpc>
-              <a:buNone/>
-            </a:pPr>
-            <a:r>
-              <a:rPr lang="en-US" sz="700" dirty="0">
-                <a:solidFill>
-                  <a:srgbClr val="888888"/>
-                </a:solidFill>
-                <a:latin typeface="Arial" pitchFamily="34" charset="0"/>
-                <a:ea typeface="Arial" pitchFamily="34" charset="-122"/>
-                <a:cs typeface="Arial" pitchFamily="34" charset="-120"/>
-              </a:rPr>
-              <a:t>Tempo medio</a:t>
-            </a:r>
-            <a:endParaRPr lang="en-US" sz="700" dirty="0"/>
-          </a:p>
-          <a:p>
-            <a:pPr indent="0" marL="0">
-              <a:lnSpc>
-                <a:spcPct val="120000"/>
-              </a:lnSpc>
-              <a:buNone/>
-            </a:pPr>
-            <a:r>
-              <a:rPr lang="en-US" sz="700" dirty="0">
-                <a:solidFill>
-                  <a:srgbClr val="888888"/>
-                </a:solidFill>
-                <a:latin typeface="Arial" pitchFamily="34" charset="0"/>
-                <a:ea typeface="Arial" pitchFamily="34" charset="-122"/>
-                <a:cs typeface="Arial" pitchFamily="34" charset="-120"/>
-              </a:rPr>
-              <a:t>risoluzione</a:t>
-            </a:r>
-            <a:endParaRPr lang="en-US" sz="700" dirty="0"/>
-          </a:p>
-        </p:txBody>
-      </p:sp>
-      <p:sp>
-        <p:nvSpPr>
-          <p:cNvPr id="12" name="Text 10"/>
-          <p:cNvSpPr/>
-          <p:nvPr/>
-        </p:nvSpPr>
-        <p:spPr>
-          <a:xfrm>
-            <a:off x="3840480" y="1371600"/>
-            <a:ext cx="502920" cy="228600"/>
-          </a:xfrm>
-          <a:prstGeom prst="rect">
-            <a:avLst/>
-          </a:prstGeom>
-          <a:noFill/>
-          <a:ln/>
-        </p:spPr>
-        <p:txBody>
-          <a:bodyPr wrap="square" lIns="0" tIns="0" rIns="0" bIns="0" rtlCol="0" anchor="ctr"/>
-          <a:lstStyle/>
-          <a:p>
-            <a:pPr algn="r" indent="0" marL="0">
-              <a:buNone/>
-            </a:pPr>
-            <a:r>
-              <a:rPr lang="en-US" sz="900" b="1" dirty="0">
-                <a:solidFill>
-                  <a:srgbClr val="3B7EF7"/>
-                </a:solidFill>
-                <a:latin typeface="Arial" pitchFamily="34" charset="0"/>
-                <a:ea typeface="Arial" pitchFamily="34" charset="-122"/>
-                <a:cs typeface="Arial" pitchFamily="34" charset="-120"/>
-              </a:rPr>
-              <a:t>-35%</a:t>
-            </a:r>
-            <a:endParaRPr lang="en-US" sz="900" dirty="0"/>
-          </a:p>
-        </p:txBody>
-      </p:sp>
-      <p:sp>
-        <p:nvSpPr>
-          <p:cNvPr id="13" name="Shape 11"/>
-          <p:cNvSpPr/>
-          <p:nvPr/>
-        </p:nvSpPr>
-        <p:spPr>
-          <a:xfrm>
-            <a:off x="4663440" y="822960"/>
-            <a:ext cx="1920240" cy="1097280"/>
-          </a:xfrm>
-          <a:prstGeom prst="rect">
-            <a:avLst/>
-          </a:prstGeom>
-          <a:solidFill>
-            <a:srgbClr val="222222"/>
-          </a:solidFill>
-          <a:ln/>
-        </p:spPr>
-      </p:sp>
-      <p:sp>
-        <p:nvSpPr>
-          <p:cNvPr id="14" name="Text 12"/>
-          <p:cNvSpPr/>
-          <p:nvPr/>
-        </p:nvSpPr>
-        <p:spPr>
-          <a:xfrm>
-            <a:off x="4800600" y="868680"/>
-            <a:ext cx="1645920" cy="502920"/>
-          </a:xfrm>
-          <a:prstGeom prst="rect">
-            <a:avLst/>
-          </a:prstGeom>
-          <a:noFill/>
-          <a:ln/>
-        </p:spPr>
-        <p:txBody>
-          <a:bodyPr wrap="square" lIns="0" tIns="0" rIns="0" bIns="0" rtlCol="0" anchor="ctr"/>
-          <a:lstStyle/>
-          <a:p>
-            <a:pPr indent="0" marL="0">
-              <a:buNone/>
-            </a:pPr>
-            <a:r>
-              <a:rPr lang="en-US" sz="2800" b="1" dirty="0">
-                <a:solidFill>
-                  <a:srgbClr val="FFFFFF"/>
-                </a:solidFill>
-                <a:latin typeface="Arial Black" pitchFamily="34" charset="0"/>
-                <a:ea typeface="Arial Black" pitchFamily="34" charset="-122"/>
-                <a:cs typeface="Arial Black" pitchFamily="34" charset="-120"/>
-              </a:rPr>
-              <a:t>94%</a:t>
-            </a:r>
-            <a:endParaRPr lang="en-US" sz="2800" dirty="0"/>
-          </a:p>
-        </p:txBody>
-      </p:sp>
-      <p:sp>
-        <p:nvSpPr>
-          <p:cNvPr id="15" name="Text 13"/>
-          <p:cNvSpPr/>
-          <p:nvPr/>
-        </p:nvSpPr>
-        <p:spPr>
-          <a:xfrm>
-            <a:off x="4800600" y="1371600"/>
-            <a:ext cx="1097280" cy="320040"/>
-          </a:xfrm>
-          <a:prstGeom prst="rect">
-            <a:avLst/>
-          </a:prstGeom>
-          <a:noFill/>
-          <a:ln/>
-        </p:spPr>
-        <p:txBody>
-          <a:bodyPr wrap="square" lIns="0" tIns="0" rIns="0" bIns="0" rtlCol="0" anchor="ctr"/>
-          <a:lstStyle/>
-          <a:p>
-            <a:pPr indent="0" marL="0">
-              <a:lnSpc>
-                <a:spcPct val="120000"/>
-              </a:lnSpc>
-              <a:buNone/>
-            </a:pPr>
-            <a:r>
-              <a:rPr lang="en-US" sz="700" dirty="0">
-                <a:solidFill>
-                  <a:srgbClr val="888888"/>
-                </a:solidFill>
-                <a:latin typeface="Arial" pitchFamily="34" charset="0"/>
-                <a:ea typeface="Arial" pitchFamily="34" charset="-122"/>
-                <a:cs typeface="Arial" pitchFamily="34" charset="-120"/>
-              </a:rPr>
-              <a:t>SLA</a:t>
-            </a:r>
-            <a:endParaRPr lang="en-US" sz="700" dirty="0"/>
-          </a:p>
-          <a:p>
-            <a:pPr indent="0" marL="0">
-              <a:lnSpc>
-                <a:spcPct val="120000"/>
-              </a:lnSpc>
-              <a:buNone/>
-            </a:pPr>
-            <a:r>
-              <a:rPr lang="en-US" sz="700" dirty="0">
-                <a:solidFill>
-                  <a:srgbClr val="888888"/>
-                </a:solidFill>
-                <a:latin typeface="Arial" pitchFamily="34" charset="0"/>
-                <a:ea typeface="Arial" pitchFamily="34" charset="-122"/>
-                <a:cs typeface="Arial" pitchFamily="34" charset="-120"/>
-              </a:rPr>
-              <a:t>compliance</a:t>
-            </a:r>
-            <a:endParaRPr lang="en-US" sz="700" dirty="0"/>
-          </a:p>
-        </p:txBody>
-      </p:sp>
-      <p:sp>
-        <p:nvSpPr>
-          <p:cNvPr id="16" name="Text 14"/>
-          <p:cNvSpPr/>
-          <p:nvPr/>
-        </p:nvSpPr>
-        <p:spPr>
-          <a:xfrm>
-            <a:off x="5943600" y="1371600"/>
-            <a:ext cx="502920" cy="228600"/>
-          </a:xfrm>
-          <a:prstGeom prst="rect">
-            <a:avLst/>
-          </a:prstGeom>
-          <a:noFill/>
-          <a:ln/>
-        </p:spPr>
-        <p:txBody>
-          <a:bodyPr wrap="square" lIns="0" tIns="0" rIns="0" bIns="0" rtlCol="0" anchor="ctr"/>
-          <a:lstStyle/>
-          <a:p>
-            <a:pPr algn="r" indent="0" marL="0">
-              <a:buNone/>
-            </a:pPr>
-            <a:r>
-              <a:rPr lang="en-US" sz="900" b="1" dirty="0">
-                <a:solidFill>
-                  <a:srgbClr val="34D058"/>
-                </a:solidFill>
-                <a:latin typeface="Arial" pitchFamily="34" charset="0"/>
-                <a:ea typeface="Arial" pitchFamily="34" charset="-122"/>
-                <a:cs typeface="Arial" pitchFamily="34" charset="-120"/>
-              </a:rPr>
-              <a:t>+8%</a:t>
-            </a:r>
-            <a:endParaRPr lang="en-US" sz="900" dirty="0"/>
-          </a:p>
-        </p:txBody>
-      </p:sp>
-      <p:sp>
-        <p:nvSpPr>
-          <p:cNvPr id="17" name="Shape 15"/>
-          <p:cNvSpPr/>
-          <p:nvPr/>
-        </p:nvSpPr>
-        <p:spPr>
-          <a:xfrm>
-            <a:off x="6766560" y="822960"/>
-            <a:ext cx="1920240" cy="1097280"/>
-          </a:xfrm>
-          <a:prstGeom prst="rect">
-            <a:avLst/>
-          </a:prstGeom>
-          <a:solidFill>
-            <a:srgbClr val="222222"/>
-          </a:solidFill>
-          <a:ln/>
-        </p:spPr>
-      </p:sp>
-      <p:sp>
-        <p:nvSpPr>
-          <p:cNvPr id="18" name="Text 16"/>
-          <p:cNvSpPr/>
-          <p:nvPr/>
-        </p:nvSpPr>
-        <p:spPr>
-          <a:xfrm>
-            <a:off x="6903720" y="868680"/>
-            <a:ext cx="1645920" cy="502920"/>
-          </a:xfrm>
-          <a:prstGeom prst="rect">
-            <a:avLst/>
-          </a:prstGeom>
-          <a:noFill/>
-          <a:ln/>
-        </p:spPr>
-        <p:txBody>
-          <a:bodyPr wrap="square" lIns="0" tIns="0" rIns="0" bIns="0" rtlCol="0" anchor="ctr"/>
-          <a:lstStyle/>
-          <a:p>
-            <a:pPr indent="0" marL="0">
-              <a:buNone/>
-            </a:pPr>
-            <a:r>
-              <a:rPr lang="en-US" sz="2800" b="1" dirty="0">
-                <a:solidFill>
-                  <a:srgbClr val="FFFFFF"/>
-                </a:solidFill>
-                <a:latin typeface="Arial Black" pitchFamily="34" charset="0"/>
-                <a:ea typeface="Arial Black" pitchFamily="34" charset="-122"/>
-                <a:cs typeface="Arial Black" pitchFamily="34" charset="-120"/>
-              </a:rPr>
-              <a:t>156</a:t>
-            </a:r>
-            <a:endParaRPr lang="en-US" sz="2800" dirty="0"/>
-          </a:p>
-        </p:txBody>
-      </p:sp>
-      <p:sp>
-        <p:nvSpPr>
-          <p:cNvPr id="19" name="Text 17"/>
-          <p:cNvSpPr/>
-          <p:nvPr/>
-        </p:nvSpPr>
-        <p:spPr>
-          <a:xfrm>
-            <a:off x="6903720" y="1371600"/>
-            <a:ext cx="1097280" cy="320040"/>
-          </a:xfrm>
-          <a:prstGeom prst="rect">
-            <a:avLst/>
-          </a:prstGeom>
-          <a:noFill/>
-          <a:ln/>
-        </p:spPr>
-        <p:txBody>
-          <a:bodyPr wrap="square" lIns="0" tIns="0" rIns="0" bIns="0" rtlCol="0" anchor="ctr"/>
-          <a:lstStyle/>
-          <a:p>
-            <a:pPr indent="0" marL="0">
-              <a:lnSpc>
-                <a:spcPct val="120000"/>
-              </a:lnSpc>
-              <a:buNone/>
-            </a:pPr>
-            <a:r>
-              <a:rPr lang="en-US" sz="700" dirty="0">
-                <a:solidFill>
-                  <a:srgbClr val="888888"/>
-                </a:solidFill>
-                <a:latin typeface="Arial" pitchFamily="34" charset="0"/>
-                <a:ea typeface="Arial" pitchFamily="34" charset="-122"/>
-                <a:cs typeface="Arial" pitchFamily="34" charset="-120"/>
-              </a:rPr>
-              <a:t>Interventi</a:t>
-            </a:r>
-            <a:endParaRPr lang="en-US" sz="700" dirty="0"/>
-          </a:p>
-          <a:p>
-            <a:pPr indent="0" marL="0">
-              <a:lnSpc>
-                <a:spcPct val="120000"/>
-              </a:lnSpc>
-              <a:buNone/>
-            </a:pPr>
-            <a:r>
-              <a:rPr lang="en-US" sz="700" dirty="0">
-                <a:solidFill>
-                  <a:srgbClr val="888888"/>
-                </a:solidFill>
-                <a:latin typeface="Arial" pitchFamily="34" charset="0"/>
-                <a:ea typeface="Arial" pitchFamily="34" charset="-122"/>
-                <a:cs typeface="Arial" pitchFamily="34" charset="-120"/>
-              </a:rPr>
-              <a:t>completati</a:t>
-            </a:r>
-            <a:endParaRPr lang="en-US" sz="700" dirty="0"/>
-          </a:p>
-        </p:txBody>
-      </p:sp>
-      <p:sp>
-        <p:nvSpPr>
-          <p:cNvPr id="20" name="Text 18"/>
-          <p:cNvSpPr/>
-          <p:nvPr/>
-        </p:nvSpPr>
-        <p:spPr>
-          <a:xfrm>
-            <a:off x="8046720" y="1371600"/>
-            <a:ext cx="502920" cy="228600"/>
-          </a:xfrm>
-          <a:prstGeom prst="rect">
-            <a:avLst/>
-          </a:prstGeom>
-          <a:noFill/>
-          <a:ln/>
-        </p:spPr>
-        <p:txBody>
-          <a:bodyPr wrap="square" lIns="0" tIns="0" rIns="0" bIns="0" rtlCol="0" anchor="ctr"/>
-          <a:lstStyle/>
-          <a:p>
-            <a:pPr algn="r" indent="0" marL="0">
-              <a:buNone/>
-            </a:pPr>
-            <a:r>
-              <a:rPr lang="en-US" sz="900" b="1" dirty="0">
-                <a:solidFill>
-                  <a:srgbClr val="34D058"/>
-                </a:solidFill>
-                <a:latin typeface="Arial" pitchFamily="34" charset="0"/>
-                <a:ea typeface="Arial" pitchFamily="34" charset="-122"/>
-                <a:cs typeface="Arial" pitchFamily="34" charset="-120"/>
-              </a:rPr>
-              <a:t>+22%</a:t>
-            </a:r>
-            <a:endParaRPr lang="en-US" sz="900" dirty="0"/>
-          </a:p>
-        </p:txBody>
-      </p:sp>
-      <p:sp>
-        <p:nvSpPr>
-          <p:cNvPr id="21" name="Shape 19"/>
-          <p:cNvSpPr/>
-          <p:nvPr/>
-        </p:nvSpPr>
-        <p:spPr>
-          <a:xfrm>
-            <a:off x="457200" y="2103120"/>
-            <a:ext cx="5303520" cy="2560320"/>
-          </a:xfrm>
-          <a:prstGeom prst="rect">
-            <a:avLst/>
-          </a:prstGeom>
-          <a:solidFill>
-            <a:srgbClr val="222222"/>
-          </a:solidFill>
-          <a:ln/>
-        </p:spPr>
-      </p:sp>
-      <p:sp>
-        <p:nvSpPr>
-          <p:cNvPr id="22" name="Text 20"/>
-          <p:cNvSpPr/>
-          <p:nvPr/>
-        </p:nvSpPr>
-        <p:spPr>
-          <a:xfrm>
-            <a:off x="594360" y="2194560"/>
-            <a:ext cx="5029200" cy="228600"/>
-          </a:xfrm>
-          <a:prstGeom prst="rect">
-            <a:avLst/>
-          </a:prstGeom>
-          <a:noFill/>
-          <a:ln/>
-        </p:spPr>
-        <p:txBody>
-          <a:bodyPr wrap="square" lIns="0" tIns="0" rIns="0" bIns="0" rtlCol="0" anchor="ctr"/>
-          <a:lstStyle/>
-          <a:p>
-            <a:pPr indent="0" marL="0">
-              <a:buNone/>
-            </a:pPr>
-            <a:r>
-              <a:rPr lang="en-US" sz="800" b="1" dirty="0">
-                <a:solidFill>
-                  <a:srgbClr val="CCCCCC"/>
-                </a:solidFill>
-                <a:latin typeface="Arial" pitchFamily="34" charset="0"/>
-                <a:ea typeface="Arial" pitchFamily="34" charset="-122"/>
-                <a:cs typeface="Arial" pitchFamily="34" charset="-120"/>
-              </a:rPr>
-              <a:t>Trend Urgenze — Ultimi 30 giorni</a:t>
-            </a:r>
-            <a:endParaRPr lang="en-US" sz="800" dirty="0"/>
-          </a:p>
-        </p:txBody>
-      </p:sp>
-      <p:sp>
-        <p:nvSpPr>
-          <p:cNvPr id="23" name="Shape 21"/>
-          <p:cNvSpPr/>
-          <p:nvPr/>
-        </p:nvSpPr>
-        <p:spPr>
-          <a:xfrm>
-            <a:off x="612648" y="3703320"/>
-            <a:ext cx="54864" cy="54864"/>
-          </a:xfrm>
-          <a:prstGeom prst="ellipse">
-            <a:avLst/>
-          </a:prstGeom>
-          <a:solidFill>
-            <a:srgbClr val="3B7EF7"/>
-          </a:solidFill>
-          <a:ln/>
-        </p:spPr>
-      </p:sp>
-      <p:sp>
-        <p:nvSpPr>
-          <p:cNvPr id="24" name="Shape 22"/>
-          <p:cNvSpPr/>
-          <p:nvPr/>
-        </p:nvSpPr>
-        <p:spPr>
-          <a:xfrm>
-            <a:off x="941832" y="3538728"/>
-            <a:ext cx="54864" cy="54864"/>
-          </a:xfrm>
-          <a:prstGeom prst="ellipse">
-            <a:avLst/>
-          </a:prstGeom>
-          <a:solidFill>
-            <a:srgbClr val="3B7EF7"/>
-          </a:solidFill>
-          <a:ln/>
-        </p:spPr>
-      </p:sp>
-      <p:sp>
-        <p:nvSpPr>
-          <p:cNvPr id="25" name="Shape 23"/>
-          <p:cNvSpPr/>
-          <p:nvPr/>
-        </p:nvSpPr>
-        <p:spPr>
-          <a:xfrm>
-            <a:off x="640080" y="3730752"/>
-            <a:ext cx="329184" cy="-164592"/>
-          </a:xfrm>
-          <a:prstGeom prst="line">
-            <a:avLst/>
-          </a:prstGeom>
-          <a:noFill/>
-          <a:ln w="12700">
-            <a:solidFill>
-              <a:srgbClr val="3B7EF7"/>
-            </a:solidFill>
-            <a:prstDash val="solid"/>
-          </a:ln>
-        </p:spPr>
-      </p:sp>
-      <p:sp>
-        <p:nvSpPr>
-          <p:cNvPr id="26" name="Shape 24"/>
-          <p:cNvSpPr/>
-          <p:nvPr/>
-        </p:nvSpPr>
-        <p:spPr>
-          <a:xfrm>
-            <a:off x="1271016" y="3867912"/>
-            <a:ext cx="54864" cy="54864"/>
-          </a:xfrm>
-          <a:prstGeom prst="ellipse">
-            <a:avLst/>
-          </a:prstGeom>
-          <a:solidFill>
-            <a:srgbClr val="3B7EF7"/>
-          </a:solidFill>
-          <a:ln/>
-        </p:spPr>
-      </p:sp>
-      <p:sp>
-        <p:nvSpPr>
-          <p:cNvPr id="27" name="Shape 25"/>
-          <p:cNvSpPr/>
-          <p:nvPr/>
-        </p:nvSpPr>
-        <p:spPr>
-          <a:xfrm>
-            <a:off x="969264" y="3566160"/>
-            <a:ext cx="329184" cy="329184"/>
-          </a:xfrm>
-          <a:prstGeom prst="line">
-            <a:avLst/>
-          </a:prstGeom>
-          <a:noFill/>
-          <a:ln w="12700">
-            <a:solidFill>
-              <a:srgbClr val="3B7EF7"/>
-            </a:solidFill>
-            <a:prstDash val="solid"/>
-          </a:ln>
-        </p:spPr>
-      </p:sp>
-      <p:sp>
-        <p:nvSpPr>
-          <p:cNvPr id="28" name="Shape 26"/>
-          <p:cNvSpPr/>
-          <p:nvPr/>
-        </p:nvSpPr>
-        <p:spPr>
-          <a:xfrm>
-            <a:off x="1600200" y="3209544"/>
-            <a:ext cx="54864" cy="54864"/>
-          </a:xfrm>
-          <a:prstGeom prst="ellipse">
-            <a:avLst/>
-          </a:prstGeom>
-          <a:solidFill>
-            <a:srgbClr val="3B7EF7"/>
-          </a:solidFill>
-          <a:ln/>
-        </p:spPr>
-      </p:sp>
-      <p:sp>
-        <p:nvSpPr>
-          <p:cNvPr id="29" name="Shape 27"/>
-          <p:cNvSpPr/>
-          <p:nvPr/>
-        </p:nvSpPr>
-        <p:spPr>
-          <a:xfrm>
-            <a:off x="1298448" y="3895344"/>
-            <a:ext cx="329184" cy="-658368"/>
-          </a:xfrm>
-          <a:prstGeom prst="line">
-            <a:avLst/>
-          </a:prstGeom>
-          <a:noFill/>
-          <a:ln w="12700">
-            <a:solidFill>
-              <a:srgbClr val="3B7EF7"/>
-            </a:solidFill>
-            <a:prstDash val="solid"/>
-          </a:ln>
-        </p:spPr>
-      </p:sp>
-      <p:sp>
-        <p:nvSpPr>
-          <p:cNvPr id="30" name="Shape 28"/>
-          <p:cNvSpPr/>
-          <p:nvPr/>
-        </p:nvSpPr>
-        <p:spPr>
-          <a:xfrm>
-            <a:off x="1929384" y="3374136"/>
-            <a:ext cx="54864" cy="54864"/>
-          </a:xfrm>
-          <a:prstGeom prst="ellipse">
-            <a:avLst/>
-          </a:prstGeom>
-          <a:solidFill>
-            <a:srgbClr val="3B7EF7"/>
-          </a:solidFill>
-          <a:ln/>
-        </p:spPr>
-      </p:sp>
-      <p:sp>
-        <p:nvSpPr>
-          <p:cNvPr id="31" name="Shape 29"/>
-          <p:cNvSpPr/>
-          <p:nvPr/>
-        </p:nvSpPr>
-        <p:spPr>
-          <a:xfrm>
-            <a:off x="1627632" y="3236976"/>
-            <a:ext cx="329184" cy="164592"/>
-          </a:xfrm>
-          <a:prstGeom prst="line">
-            <a:avLst/>
-          </a:prstGeom>
-          <a:noFill/>
-          <a:ln w="12700">
-            <a:solidFill>
-              <a:srgbClr val="3B7EF7"/>
-            </a:solidFill>
-            <a:prstDash val="solid"/>
-          </a:ln>
-        </p:spPr>
-      </p:sp>
-      <p:sp>
-        <p:nvSpPr>
-          <p:cNvPr id="32" name="Shape 30"/>
-          <p:cNvSpPr/>
-          <p:nvPr/>
-        </p:nvSpPr>
-        <p:spPr>
-          <a:xfrm>
-            <a:off x="2258568" y="3044952"/>
-            <a:ext cx="54864" cy="54864"/>
-          </a:xfrm>
-          <a:prstGeom prst="ellipse">
-            <a:avLst/>
-          </a:prstGeom>
-          <a:solidFill>
-            <a:srgbClr val="3B7EF7"/>
-          </a:solidFill>
-          <a:ln/>
-        </p:spPr>
-      </p:sp>
-      <p:sp>
-        <p:nvSpPr>
-          <p:cNvPr id="33" name="Shape 31"/>
-          <p:cNvSpPr/>
-          <p:nvPr/>
-        </p:nvSpPr>
-        <p:spPr>
-          <a:xfrm>
-            <a:off x="1956816" y="3401568"/>
-            <a:ext cx="329184" cy="-329184"/>
-          </a:xfrm>
-          <a:prstGeom prst="line">
-            <a:avLst/>
-          </a:prstGeom>
-          <a:noFill/>
-          <a:ln w="12700">
-            <a:solidFill>
-              <a:srgbClr val="3B7EF7"/>
-            </a:solidFill>
-            <a:prstDash val="solid"/>
-          </a:ln>
-        </p:spPr>
-      </p:sp>
-      <p:sp>
-        <p:nvSpPr>
-          <p:cNvPr id="34" name="Shape 32"/>
-          <p:cNvSpPr/>
-          <p:nvPr/>
-        </p:nvSpPr>
-        <p:spPr>
-          <a:xfrm>
-            <a:off x="2587752" y="3538728"/>
-            <a:ext cx="54864" cy="54864"/>
-          </a:xfrm>
-          <a:prstGeom prst="ellipse">
-            <a:avLst/>
-          </a:prstGeom>
-          <a:solidFill>
-            <a:srgbClr val="3B7EF7"/>
-          </a:solidFill>
-          <a:ln/>
-        </p:spPr>
-      </p:sp>
-      <p:sp>
-        <p:nvSpPr>
-          <p:cNvPr id="35" name="Shape 33"/>
-          <p:cNvSpPr/>
-          <p:nvPr/>
-        </p:nvSpPr>
-        <p:spPr>
-          <a:xfrm>
-            <a:off x="2286000" y="3072384"/>
-            <a:ext cx="329184" cy="493776"/>
-          </a:xfrm>
-          <a:prstGeom prst="line">
-            <a:avLst/>
-          </a:prstGeom>
-          <a:noFill/>
-          <a:ln w="12700">
-            <a:solidFill>
-              <a:srgbClr val="3B7EF7"/>
-            </a:solidFill>
-            <a:prstDash val="solid"/>
-          </a:ln>
-        </p:spPr>
-      </p:sp>
-      <p:sp>
-        <p:nvSpPr>
-          <p:cNvPr id="36" name="Shape 34"/>
-          <p:cNvSpPr/>
-          <p:nvPr/>
-        </p:nvSpPr>
-        <p:spPr>
-          <a:xfrm>
-            <a:off x="2916936" y="2880360"/>
-            <a:ext cx="54864" cy="54864"/>
-          </a:xfrm>
-          <a:prstGeom prst="ellipse">
-            <a:avLst/>
-          </a:prstGeom>
-          <a:solidFill>
-            <a:srgbClr val="3B7EF7"/>
-          </a:solidFill>
-          <a:ln/>
-        </p:spPr>
-      </p:sp>
-      <p:sp>
-        <p:nvSpPr>
-          <p:cNvPr id="37" name="Shape 35"/>
-          <p:cNvSpPr/>
-          <p:nvPr/>
-        </p:nvSpPr>
-        <p:spPr>
-          <a:xfrm>
-            <a:off x="2615184" y="3566160"/>
-            <a:ext cx="329184" cy="-658368"/>
-          </a:xfrm>
-          <a:prstGeom prst="line">
-            <a:avLst/>
-          </a:prstGeom>
-          <a:noFill/>
-          <a:ln w="12700">
-            <a:solidFill>
-              <a:srgbClr val="3B7EF7"/>
-            </a:solidFill>
-            <a:prstDash val="solid"/>
-          </a:ln>
-        </p:spPr>
-      </p:sp>
-      <p:sp>
-        <p:nvSpPr>
-          <p:cNvPr id="38" name="Shape 36"/>
-          <p:cNvSpPr/>
-          <p:nvPr/>
-        </p:nvSpPr>
-        <p:spPr>
-          <a:xfrm>
-            <a:off x="3246120" y="3209544"/>
-            <a:ext cx="54864" cy="54864"/>
-          </a:xfrm>
-          <a:prstGeom prst="ellipse">
-            <a:avLst/>
-          </a:prstGeom>
-          <a:solidFill>
-            <a:srgbClr val="3B7EF7"/>
-          </a:solidFill>
-          <a:ln/>
-        </p:spPr>
-      </p:sp>
-      <p:sp>
-        <p:nvSpPr>
-          <p:cNvPr id="39" name="Shape 37"/>
-          <p:cNvSpPr/>
-          <p:nvPr/>
-        </p:nvSpPr>
-        <p:spPr>
-          <a:xfrm>
-            <a:off x="2944368" y="2907792"/>
-            <a:ext cx="329184" cy="329184"/>
-          </a:xfrm>
-          <a:prstGeom prst="line">
-            <a:avLst/>
-          </a:prstGeom>
-          <a:noFill/>
-          <a:ln w="12700">
-            <a:solidFill>
-              <a:srgbClr val="3B7EF7"/>
-            </a:solidFill>
-            <a:prstDash val="solid"/>
-          </a:ln>
-        </p:spPr>
-      </p:sp>
-      <p:sp>
-        <p:nvSpPr>
-          <p:cNvPr id="40" name="Shape 38"/>
-          <p:cNvSpPr/>
-          <p:nvPr/>
-        </p:nvSpPr>
-        <p:spPr>
-          <a:xfrm>
-            <a:off x="3575304" y="2715768"/>
-            <a:ext cx="54864" cy="54864"/>
-          </a:xfrm>
-          <a:prstGeom prst="ellipse">
-            <a:avLst/>
-          </a:prstGeom>
-          <a:solidFill>
-            <a:srgbClr val="3B7EF7"/>
-          </a:solidFill>
-          <a:ln/>
-        </p:spPr>
-      </p:sp>
-      <p:sp>
-        <p:nvSpPr>
-          <p:cNvPr id="41" name="Shape 39"/>
-          <p:cNvSpPr/>
-          <p:nvPr/>
-        </p:nvSpPr>
-        <p:spPr>
-          <a:xfrm>
-            <a:off x="3273552" y="3236976"/>
-            <a:ext cx="329184" cy="-493776"/>
-          </a:xfrm>
-          <a:prstGeom prst="line">
-            <a:avLst/>
-          </a:prstGeom>
-          <a:noFill/>
-          <a:ln w="12700">
-            <a:solidFill>
-              <a:srgbClr val="3B7EF7"/>
-            </a:solidFill>
-            <a:prstDash val="solid"/>
-          </a:ln>
-        </p:spPr>
-      </p:sp>
-      <p:sp>
-        <p:nvSpPr>
-          <p:cNvPr id="42" name="Shape 40"/>
-          <p:cNvSpPr/>
-          <p:nvPr/>
-        </p:nvSpPr>
-        <p:spPr>
-          <a:xfrm>
-            <a:off x="3904488" y="3044952"/>
-            <a:ext cx="54864" cy="54864"/>
-          </a:xfrm>
-          <a:prstGeom prst="ellipse">
-            <a:avLst/>
-          </a:prstGeom>
-          <a:solidFill>
-            <a:srgbClr val="3B7EF7"/>
-          </a:solidFill>
-          <a:ln/>
-        </p:spPr>
-      </p:sp>
-      <p:sp>
-        <p:nvSpPr>
-          <p:cNvPr id="43" name="Shape 41"/>
-          <p:cNvSpPr/>
-          <p:nvPr/>
-        </p:nvSpPr>
-        <p:spPr>
-          <a:xfrm>
-            <a:off x="3602736" y="2743200"/>
-            <a:ext cx="329184" cy="329184"/>
-          </a:xfrm>
-          <a:prstGeom prst="line">
-            <a:avLst/>
-          </a:prstGeom>
-          <a:noFill/>
-          <a:ln w="12700">
-            <a:solidFill>
-              <a:srgbClr val="3B7EF7"/>
-            </a:solidFill>
-            <a:prstDash val="solid"/>
-          </a:ln>
-        </p:spPr>
-      </p:sp>
-      <p:sp>
-        <p:nvSpPr>
-          <p:cNvPr id="44" name="Shape 42"/>
-          <p:cNvSpPr/>
-          <p:nvPr/>
-        </p:nvSpPr>
-        <p:spPr>
-          <a:xfrm>
-            <a:off x="4233672" y="3374136"/>
-            <a:ext cx="54864" cy="54864"/>
-          </a:xfrm>
-          <a:prstGeom prst="ellipse">
-            <a:avLst/>
-          </a:prstGeom>
-          <a:solidFill>
-            <a:srgbClr val="3B7EF7"/>
-          </a:solidFill>
-          <a:ln/>
-        </p:spPr>
-      </p:sp>
-      <p:sp>
-        <p:nvSpPr>
-          <p:cNvPr id="45" name="Shape 43"/>
-          <p:cNvSpPr/>
-          <p:nvPr/>
-        </p:nvSpPr>
-        <p:spPr>
-          <a:xfrm>
-            <a:off x="3931920" y="3072384"/>
-            <a:ext cx="329184" cy="329184"/>
-          </a:xfrm>
-          <a:prstGeom prst="line">
-            <a:avLst/>
-          </a:prstGeom>
-          <a:noFill/>
-          <a:ln w="12700">
-            <a:solidFill>
-              <a:srgbClr val="3B7EF7"/>
-            </a:solidFill>
-            <a:prstDash val="solid"/>
-          </a:ln>
-        </p:spPr>
-      </p:sp>
-      <p:sp>
-        <p:nvSpPr>
-          <p:cNvPr id="46" name="Shape 44"/>
-          <p:cNvSpPr/>
-          <p:nvPr/>
-        </p:nvSpPr>
-        <p:spPr>
-          <a:xfrm>
-            <a:off x="4562856" y="2880360"/>
-            <a:ext cx="54864" cy="54864"/>
-          </a:xfrm>
-          <a:prstGeom prst="ellipse">
-            <a:avLst/>
-          </a:prstGeom>
-          <a:solidFill>
-            <a:srgbClr val="3B7EF7"/>
-          </a:solidFill>
-          <a:ln/>
-        </p:spPr>
-      </p:sp>
-      <p:sp>
-        <p:nvSpPr>
-          <p:cNvPr id="47" name="Shape 45"/>
-          <p:cNvSpPr/>
-          <p:nvPr/>
-        </p:nvSpPr>
-        <p:spPr>
-          <a:xfrm>
-            <a:off x="4261104" y="3401568"/>
-            <a:ext cx="329184" cy="-493776"/>
-          </a:xfrm>
-          <a:prstGeom prst="line">
-            <a:avLst/>
-          </a:prstGeom>
-          <a:noFill/>
-          <a:ln w="12700">
-            <a:solidFill>
-              <a:srgbClr val="3B7EF7"/>
-            </a:solidFill>
-            <a:prstDash val="solid"/>
-          </a:ln>
-        </p:spPr>
-      </p:sp>
-      <p:sp>
-        <p:nvSpPr>
-          <p:cNvPr id="48" name="Shape 46"/>
-          <p:cNvSpPr/>
-          <p:nvPr/>
-        </p:nvSpPr>
-        <p:spPr>
-          <a:xfrm>
-            <a:off x="4892040" y="3209544"/>
-            <a:ext cx="54864" cy="54864"/>
-          </a:xfrm>
-          <a:prstGeom prst="ellipse">
-            <a:avLst/>
-          </a:prstGeom>
-          <a:solidFill>
-            <a:srgbClr val="3B7EF7"/>
-          </a:solidFill>
-          <a:ln/>
-        </p:spPr>
-      </p:sp>
-      <p:sp>
-        <p:nvSpPr>
-          <p:cNvPr id="49" name="Shape 47"/>
-          <p:cNvSpPr/>
-          <p:nvPr/>
-        </p:nvSpPr>
-        <p:spPr>
-          <a:xfrm>
-            <a:off x="4590288" y="2907792"/>
-            <a:ext cx="329184" cy="329184"/>
-          </a:xfrm>
-          <a:prstGeom prst="line">
-            <a:avLst/>
-          </a:prstGeom>
-          <a:noFill/>
-          <a:ln w="12700">
-            <a:solidFill>
-              <a:srgbClr val="3B7EF7"/>
-            </a:solidFill>
-            <a:prstDash val="solid"/>
-          </a:ln>
-        </p:spPr>
-      </p:sp>
-      <p:sp>
-        <p:nvSpPr>
-          <p:cNvPr id="50" name="Shape 48"/>
-          <p:cNvSpPr/>
-          <p:nvPr/>
-        </p:nvSpPr>
-        <p:spPr>
-          <a:xfrm>
-            <a:off x="5221224" y="3044952"/>
-            <a:ext cx="54864" cy="54864"/>
-          </a:xfrm>
-          <a:prstGeom prst="ellipse">
-            <a:avLst/>
-          </a:prstGeom>
-          <a:solidFill>
-            <a:srgbClr val="3B7EF7"/>
-          </a:solidFill>
-          <a:ln/>
-        </p:spPr>
-      </p:sp>
-      <p:sp>
-        <p:nvSpPr>
-          <p:cNvPr id="51" name="Shape 49"/>
-          <p:cNvSpPr/>
-          <p:nvPr/>
-        </p:nvSpPr>
-        <p:spPr>
-          <a:xfrm>
-            <a:off x="4919472" y="3236976"/>
-            <a:ext cx="329184" cy="-164592"/>
-          </a:xfrm>
-          <a:prstGeom prst="line">
-            <a:avLst/>
-          </a:prstGeom>
-          <a:noFill/>
-          <a:ln w="12700">
-            <a:solidFill>
-              <a:srgbClr val="3B7EF7"/>
-            </a:solidFill>
-            <a:prstDash val="solid"/>
-          </a:ln>
-        </p:spPr>
-      </p:sp>
-      <p:sp>
-        <p:nvSpPr>
-          <p:cNvPr id="52" name="Shape 50"/>
-          <p:cNvSpPr/>
-          <p:nvPr/>
-        </p:nvSpPr>
-        <p:spPr>
-          <a:xfrm>
-            <a:off x="5943600" y="2103120"/>
-            <a:ext cx="2743200" cy="2560320"/>
-          </a:xfrm>
-          <a:prstGeom prst="rect">
-            <a:avLst/>
-          </a:prstGeom>
-          <a:solidFill>
-            <a:srgbClr val="222222"/>
-          </a:solidFill>
-          <a:ln/>
-        </p:spPr>
-      </p:sp>
-      <p:sp>
-        <p:nvSpPr>
-          <p:cNvPr id="53" name="Text 51"/>
-          <p:cNvSpPr/>
-          <p:nvPr/>
-        </p:nvSpPr>
-        <p:spPr>
-          <a:xfrm>
-            <a:off x="6035040" y="2194560"/>
-            <a:ext cx="2560320" cy="228600"/>
-          </a:xfrm>
-          <a:prstGeom prst="rect">
-            <a:avLst/>
-          </a:prstGeom>
-          <a:noFill/>
-          <a:ln/>
-        </p:spPr>
-        <p:txBody>
-          <a:bodyPr wrap="square" lIns="0" tIns="0" rIns="0" bIns="0" rtlCol="0" anchor="ctr"/>
-          <a:lstStyle/>
-          <a:p>
-            <a:pPr indent="0" marL="0">
-              <a:buNone/>
-            </a:pPr>
-            <a:r>
-              <a:rPr lang="en-US" sz="800" b="1" dirty="0">
-                <a:solidFill>
-                  <a:srgbClr val="CCCCCC"/>
-                </a:solidFill>
-                <a:latin typeface="Arial" pitchFamily="34" charset="0"/>
-                <a:ea typeface="Arial" pitchFamily="34" charset="-122"/>
-                <a:cs typeface="Arial" pitchFamily="34" charset="-120"/>
-              </a:rPr>
-              <a:t>Performance Tecnici</a:t>
-            </a:r>
-            <a:endParaRPr lang="en-US" sz="800" dirty="0"/>
-          </a:p>
-        </p:txBody>
-      </p:sp>
-      <p:sp>
-        <p:nvSpPr>
-          <p:cNvPr id="54" name="Text 52"/>
-          <p:cNvSpPr/>
-          <p:nvPr/>
-        </p:nvSpPr>
-        <p:spPr>
-          <a:xfrm>
-            <a:off x="6035040" y="2560320"/>
-            <a:ext cx="914400" cy="274320"/>
-          </a:xfrm>
-          <a:prstGeom prst="rect">
-            <a:avLst/>
-          </a:prstGeom>
-          <a:noFill/>
-          <a:ln/>
-        </p:spPr>
-        <p:txBody>
-          <a:bodyPr wrap="square" lIns="0" tIns="0" rIns="0" bIns="0" rtlCol="0" anchor="ctr"/>
-          <a:lstStyle/>
-          <a:p>
-            <a:pPr indent="0" marL="0">
-              <a:buNone/>
-            </a:pPr>
-            <a:r>
-              <a:rPr lang="en-US" sz="700" dirty="0">
-                <a:solidFill>
-                  <a:srgbClr val="CCCCCC"/>
-                </a:solidFill>
-                <a:latin typeface="Arial" pitchFamily="34" charset="0"/>
-                <a:ea typeface="Arial" pitchFamily="34" charset="-122"/>
-                <a:cs typeface="Arial" pitchFamily="34" charset="-120"/>
-              </a:rPr>
-              <a:t>Jacopo</a:t>
-            </a:r>
-            <a:endParaRPr lang="en-US" sz="700" dirty="0"/>
-          </a:p>
-        </p:txBody>
-      </p:sp>
-      <p:sp>
-        <p:nvSpPr>
-          <p:cNvPr id="55" name="Shape 53"/>
-          <p:cNvSpPr/>
-          <p:nvPr/>
-        </p:nvSpPr>
-        <p:spPr>
-          <a:xfrm>
-            <a:off x="6949440" y="2633472"/>
-            <a:ext cx="1344168" cy="128016"/>
-          </a:xfrm>
-          <a:prstGeom prst="rect">
-            <a:avLst/>
-          </a:prstGeom>
-          <a:solidFill>
-            <a:srgbClr val="34D058"/>
-          </a:solidFill>
-          <a:ln/>
-        </p:spPr>
-      </p:sp>
-      <p:sp>
-        <p:nvSpPr>
-          <p:cNvPr id="56" name="Text 54"/>
-          <p:cNvSpPr/>
-          <p:nvPr/>
-        </p:nvSpPr>
-        <p:spPr>
-          <a:xfrm>
-            <a:off x="8229600" y="2560320"/>
-            <a:ext cx="365760" cy="274320"/>
-          </a:xfrm>
-          <a:prstGeom prst="rect">
-            <a:avLst/>
-          </a:prstGeom>
-          <a:noFill/>
-          <a:ln/>
-        </p:spPr>
-        <p:txBody>
-          <a:bodyPr wrap="square" lIns="0" tIns="0" rIns="0" bIns="0" rtlCol="0" anchor="ctr"/>
-          <a:lstStyle/>
-          <a:p>
-            <a:pPr indent="0" marL="0">
-              <a:buNone/>
-            </a:pPr>
-            <a:r>
-              <a:rPr lang="en-US" sz="700" b="1" dirty="0">
-                <a:solidFill>
-                  <a:srgbClr val="34D058"/>
-                </a:solidFill>
-                <a:latin typeface="Arial" pitchFamily="34" charset="0"/>
-                <a:ea typeface="Arial" pitchFamily="34" charset="-122"/>
-                <a:cs typeface="Arial" pitchFamily="34" charset="-120"/>
-              </a:rPr>
-              <a:t>98%</a:t>
-            </a:r>
-            <a:endParaRPr lang="en-US" sz="700" dirty="0"/>
-          </a:p>
-        </p:txBody>
-      </p:sp>
-      <p:sp>
-        <p:nvSpPr>
-          <p:cNvPr id="57" name="Text 55"/>
-          <p:cNvSpPr/>
-          <p:nvPr/>
-        </p:nvSpPr>
-        <p:spPr>
-          <a:xfrm>
-            <a:off x="6035040" y="2944368"/>
-            <a:ext cx="914400" cy="274320"/>
-          </a:xfrm>
-          <a:prstGeom prst="rect">
-            <a:avLst/>
-          </a:prstGeom>
-          <a:noFill/>
-          <a:ln/>
-        </p:spPr>
-        <p:txBody>
-          <a:bodyPr wrap="square" lIns="0" tIns="0" rIns="0" bIns="0" rtlCol="0" anchor="ctr"/>
-          <a:lstStyle/>
-          <a:p>
-            <a:pPr indent="0" marL="0">
-              <a:buNone/>
-            </a:pPr>
-            <a:r>
-              <a:rPr lang="en-US" sz="700" dirty="0">
-                <a:solidFill>
-                  <a:srgbClr val="CCCCCC"/>
-                </a:solidFill>
-                <a:latin typeface="Arial" pitchFamily="34" charset="0"/>
-                <a:ea typeface="Arial" pitchFamily="34" charset="-122"/>
-                <a:cs typeface="Arial" pitchFamily="34" charset="-120"/>
-              </a:rPr>
-              <a:t>Anton</a:t>
-            </a:r>
-            <a:endParaRPr lang="en-US" sz="700" dirty="0"/>
-          </a:p>
-        </p:txBody>
-      </p:sp>
-      <p:sp>
-        <p:nvSpPr>
-          <p:cNvPr id="58" name="Shape 56"/>
-          <p:cNvSpPr/>
-          <p:nvPr/>
-        </p:nvSpPr>
-        <p:spPr>
-          <a:xfrm>
-            <a:off x="6949440" y="3017520"/>
-            <a:ext cx="1303020" cy="128016"/>
-          </a:xfrm>
-          <a:prstGeom prst="rect">
-            <a:avLst/>
-          </a:prstGeom>
-          <a:solidFill>
-            <a:srgbClr val="34D058"/>
-          </a:solidFill>
-          <a:ln/>
-        </p:spPr>
-      </p:sp>
-      <p:sp>
-        <p:nvSpPr>
-          <p:cNvPr id="59" name="Text 57"/>
-          <p:cNvSpPr/>
-          <p:nvPr/>
-        </p:nvSpPr>
-        <p:spPr>
-          <a:xfrm>
-            <a:off x="8229600" y="2944368"/>
-            <a:ext cx="365760" cy="274320"/>
-          </a:xfrm>
-          <a:prstGeom prst="rect">
-            <a:avLst/>
-          </a:prstGeom>
-          <a:noFill/>
-          <a:ln/>
-        </p:spPr>
-        <p:txBody>
-          <a:bodyPr wrap="square" lIns="0" tIns="0" rIns="0" bIns="0" rtlCol="0" anchor="ctr"/>
-          <a:lstStyle/>
-          <a:p>
-            <a:pPr indent="0" marL="0">
-              <a:buNone/>
-            </a:pPr>
-            <a:r>
-              <a:rPr lang="en-US" sz="700" b="1" dirty="0">
-                <a:solidFill>
-                  <a:srgbClr val="34D058"/>
-                </a:solidFill>
-                <a:latin typeface="Arial" pitchFamily="34" charset="0"/>
-                <a:ea typeface="Arial" pitchFamily="34" charset="-122"/>
-                <a:cs typeface="Arial" pitchFamily="34" charset="-120"/>
-              </a:rPr>
-              <a:t>95%</a:t>
-            </a:r>
-            <a:endParaRPr lang="en-US" sz="700" dirty="0"/>
-          </a:p>
-        </p:txBody>
-      </p:sp>
-      <p:sp>
-        <p:nvSpPr>
-          <p:cNvPr id="60" name="Text 58"/>
-          <p:cNvSpPr/>
-          <p:nvPr/>
-        </p:nvSpPr>
-        <p:spPr>
-          <a:xfrm>
-            <a:off x="6035040" y="3328416"/>
-            <a:ext cx="914400" cy="274320"/>
-          </a:xfrm>
-          <a:prstGeom prst="rect">
-            <a:avLst/>
-          </a:prstGeom>
-          <a:noFill/>
-          <a:ln/>
-        </p:spPr>
-        <p:txBody>
-          <a:bodyPr wrap="square" lIns="0" tIns="0" rIns="0" bIns="0" rtlCol="0" anchor="ctr"/>
-          <a:lstStyle/>
-          <a:p>
-            <a:pPr indent="0" marL="0">
-              <a:buNone/>
-            </a:pPr>
-            <a:r>
-              <a:rPr lang="en-US" sz="700" dirty="0">
-                <a:solidFill>
-                  <a:srgbClr val="CCCCCC"/>
-                </a:solidFill>
-                <a:latin typeface="Arial" pitchFamily="34" charset="0"/>
-                <a:ea typeface="Arial" pitchFamily="34" charset="-122"/>
-                <a:cs typeface="Arial" pitchFamily="34" charset="-120"/>
-              </a:rPr>
-              <a:t>Giovanni</a:t>
-            </a:r>
-            <a:endParaRPr lang="en-US" sz="700" dirty="0"/>
-          </a:p>
-        </p:txBody>
-      </p:sp>
-      <p:sp>
-        <p:nvSpPr>
-          <p:cNvPr id="61" name="Shape 59"/>
-          <p:cNvSpPr/>
-          <p:nvPr/>
-        </p:nvSpPr>
-        <p:spPr>
-          <a:xfrm>
-            <a:off x="6949440" y="3401568"/>
-            <a:ext cx="1261872" cy="128016"/>
-          </a:xfrm>
-          <a:prstGeom prst="rect">
-            <a:avLst/>
-          </a:prstGeom>
-          <a:solidFill>
-            <a:srgbClr val="34D058"/>
-          </a:solidFill>
-          <a:ln/>
-        </p:spPr>
-      </p:sp>
-      <p:sp>
-        <p:nvSpPr>
-          <p:cNvPr id="62" name="Text 60"/>
-          <p:cNvSpPr/>
-          <p:nvPr/>
-        </p:nvSpPr>
-        <p:spPr>
-          <a:xfrm>
-            <a:off x="8229600" y="3328416"/>
-            <a:ext cx="365760" cy="274320"/>
-          </a:xfrm>
-          <a:prstGeom prst="rect">
-            <a:avLst/>
-          </a:prstGeom>
-          <a:noFill/>
-          <a:ln/>
-        </p:spPr>
-        <p:txBody>
-          <a:bodyPr wrap="square" lIns="0" tIns="0" rIns="0" bIns="0" rtlCol="0" anchor="ctr"/>
-          <a:lstStyle/>
-          <a:p>
-            <a:pPr indent="0" marL="0">
-              <a:buNone/>
-            </a:pPr>
-            <a:r>
-              <a:rPr lang="en-US" sz="700" b="1" dirty="0">
-                <a:solidFill>
-                  <a:srgbClr val="34D058"/>
-                </a:solidFill>
-                <a:latin typeface="Arial" pitchFamily="34" charset="0"/>
-                <a:ea typeface="Arial" pitchFamily="34" charset="-122"/>
-                <a:cs typeface="Arial" pitchFamily="34" charset="-120"/>
-              </a:rPr>
-              <a:t>92%</a:t>
-            </a:r>
-            <a:endParaRPr lang="en-US" sz="700" dirty="0"/>
-          </a:p>
-        </p:txBody>
-      </p:sp>
-      <p:sp>
-        <p:nvSpPr>
-          <p:cNvPr id="63" name="Text 61"/>
-          <p:cNvSpPr/>
-          <p:nvPr/>
-        </p:nvSpPr>
-        <p:spPr>
-          <a:xfrm>
-            <a:off x="6035040" y="3712464"/>
-            <a:ext cx="914400" cy="274320"/>
-          </a:xfrm>
-          <a:prstGeom prst="rect">
-            <a:avLst/>
-          </a:prstGeom>
-          <a:noFill/>
-          <a:ln/>
-        </p:spPr>
-        <p:txBody>
-          <a:bodyPr wrap="square" lIns="0" tIns="0" rIns="0" bIns="0" rtlCol="0" anchor="ctr"/>
-          <a:lstStyle/>
-          <a:p>
-            <a:pPr indent="0" marL="0">
-              <a:buNone/>
-            </a:pPr>
-            <a:r>
-              <a:rPr lang="en-US" sz="700" dirty="0">
-                <a:solidFill>
-                  <a:srgbClr val="CCCCCC"/>
-                </a:solidFill>
-                <a:latin typeface="Arial" pitchFamily="34" charset="0"/>
-                <a:ea typeface="Arial" pitchFamily="34" charset="-122"/>
-                <a:cs typeface="Arial" pitchFamily="34" charset="-120"/>
-              </a:rPr>
-              <a:t>Fabio</a:t>
-            </a:r>
-            <a:endParaRPr lang="en-US" sz="700" dirty="0"/>
-          </a:p>
-        </p:txBody>
-      </p:sp>
-      <p:sp>
-        <p:nvSpPr>
-          <p:cNvPr id="64" name="Shape 62"/>
-          <p:cNvSpPr/>
-          <p:nvPr/>
-        </p:nvSpPr>
-        <p:spPr>
-          <a:xfrm>
-            <a:off x="6949440" y="3785616"/>
-            <a:ext cx="1207008" cy="128016"/>
-          </a:xfrm>
-          <a:prstGeom prst="rect">
-            <a:avLst/>
-          </a:prstGeom>
-          <a:solidFill>
-            <a:srgbClr val="3B7EF7"/>
-          </a:solidFill>
-          <a:ln/>
-        </p:spPr>
-      </p:sp>
-      <p:sp>
-        <p:nvSpPr>
-          <p:cNvPr id="65" name="Text 63"/>
-          <p:cNvSpPr/>
-          <p:nvPr/>
-        </p:nvSpPr>
-        <p:spPr>
-          <a:xfrm>
-            <a:off x="8229600" y="3712464"/>
-            <a:ext cx="365760" cy="274320"/>
-          </a:xfrm>
-          <a:prstGeom prst="rect">
-            <a:avLst/>
-          </a:prstGeom>
-          <a:noFill/>
-          <a:ln/>
-        </p:spPr>
-        <p:txBody>
-          <a:bodyPr wrap="square" lIns="0" tIns="0" rIns="0" bIns="0" rtlCol="0" anchor="ctr"/>
-          <a:lstStyle/>
-          <a:p>
-            <a:pPr indent="0" marL="0">
-              <a:buNone/>
-            </a:pPr>
-            <a:r>
-              <a:rPr lang="en-US" sz="700" b="1" dirty="0">
-                <a:solidFill>
-                  <a:srgbClr val="3B7EF7"/>
-                </a:solidFill>
-                <a:latin typeface="Arial" pitchFamily="34" charset="0"/>
-                <a:ea typeface="Arial" pitchFamily="34" charset="-122"/>
-                <a:cs typeface="Arial" pitchFamily="34" charset="-120"/>
-              </a:rPr>
-              <a:t>88%</a:t>
-            </a:r>
-            <a:endParaRPr lang="en-US" sz="700" dirty="0"/>
-          </a:p>
-        </p:txBody>
-      </p:sp>
-      <p:sp>
-        <p:nvSpPr>
-          <p:cNvPr id="66" name="Text 64"/>
-          <p:cNvSpPr/>
-          <p:nvPr/>
-        </p:nvSpPr>
-        <p:spPr>
-          <a:xfrm>
-            <a:off x="6035040" y="4096512"/>
-            <a:ext cx="914400" cy="274320"/>
-          </a:xfrm>
-          <a:prstGeom prst="rect">
-            <a:avLst/>
-          </a:prstGeom>
-          <a:noFill/>
-          <a:ln/>
-        </p:spPr>
-        <p:txBody>
-          <a:bodyPr wrap="square" lIns="0" tIns="0" rIns="0" bIns="0" rtlCol="0" anchor="ctr"/>
-          <a:lstStyle/>
-          <a:p>
-            <a:pPr indent="0" marL="0">
-              <a:buNone/>
-            </a:pPr>
-            <a:r>
-              <a:rPr lang="en-US" sz="700" dirty="0">
-                <a:solidFill>
-                  <a:srgbClr val="CCCCCC"/>
-                </a:solidFill>
-                <a:latin typeface="Arial" pitchFamily="34" charset="0"/>
-                <a:ea typeface="Arial" pitchFamily="34" charset="-122"/>
-                <a:cs typeface="Arial" pitchFamily="34" charset="-120"/>
-              </a:rPr>
-              <a:t>Giuseppe</a:t>
-            </a:r>
-            <a:endParaRPr lang="en-US" sz="700" dirty="0"/>
-          </a:p>
-        </p:txBody>
-      </p:sp>
-      <p:sp>
-        <p:nvSpPr>
-          <p:cNvPr id="67" name="Shape 65"/>
-          <p:cNvSpPr/>
-          <p:nvPr/>
-        </p:nvSpPr>
-        <p:spPr>
-          <a:xfrm>
-            <a:off x="6949440" y="4169664"/>
-            <a:ext cx="1165860" cy="128016"/>
-          </a:xfrm>
-          <a:prstGeom prst="rect">
-            <a:avLst/>
-          </a:prstGeom>
-          <a:solidFill>
-            <a:srgbClr val="3B7EF7"/>
-          </a:solidFill>
-          <a:ln/>
-        </p:spPr>
-      </p:sp>
-      <p:sp>
-        <p:nvSpPr>
-          <p:cNvPr id="68" name="Text 66"/>
-          <p:cNvSpPr/>
-          <p:nvPr/>
-        </p:nvSpPr>
-        <p:spPr>
-          <a:xfrm>
-            <a:off x="8229600" y="4096512"/>
-            <a:ext cx="365760" cy="274320"/>
-          </a:xfrm>
-          <a:prstGeom prst="rect">
-            <a:avLst/>
-          </a:prstGeom>
-          <a:noFill/>
-          <a:ln/>
-        </p:spPr>
-        <p:txBody>
-          <a:bodyPr wrap="square" lIns="0" tIns="0" rIns="0" bIns="0" rtlCol="0" anchor="ctr"/>
-          <a:lstStyle/>
-          <a:p>
-            <a:pPr indent="0" marL="0">
-              <a:buNone/>
-            </a:pPr>
-            <a:r>
-              <a:rPr lang="en-US" sz="700" b="1" dirty="0">
-                <a:solidFill>
-                  <a:srgbClr val="3B7EF7"/>
-                </a:solidFill>
-                <a:latin typeface="Arial" pitchFamily="34" charset="0"/>
-                <a:ea typeface="Arial" pitchFamily="34" charset="-122"/>
-                <a:cs typeface="Arial" pitchFamily="34" charset="-120"/>
-              </a:rPr>
-              <a:t>85%</a:t>
-            </a:r>
-            <a:endParaRPr lang="en-US" sz="700" dirty="0"/>
-          </a:p>
-        </p:txBody>
-      </p:sp>
+            <a:ext cx="8595360" cy="5733288"/>
+          </a:xfrm>
+          <a:prstGeom prst="rect">
+            <a:avLst/>
+          </a:prstGeom>
+        </p:spPr>
+      </p:pic>
     </p:spTree>
   </p:cSld>
   <p:clrMapOvr>
@@ -8733,2138 +6860,30 @@
           </a:p>
         </p:txBody>
       </p:sp>
-      <p:sp>
-        <p:nvSpPr>
-          <p:cNvPr id="4" name="Shape 2"/>
-          <p:cNvSpPr/>
-          <p:nvPr/>
-        </p:nvSpPr>
+      <p:pic>
+        <p:nvPicPr>
+          <p:cNvPr id="4" name="Image 0" descr="/sessions/brave-peaceful-lovelace/mockups/admin_dashboard.png">    </p:cNvPr>
+          <p:cNvPicPr>
+            <a:picLocks noChangeAspect="1"/>
+          </p:cNvPicPr>
+          <p:nvPr/>
+        </p:nvPicPr>
+        <p:blipFill>
+          <a:blip r:embed="rId1"/>
+          <a:stretch>
+            <a:fillRect/>
+          </a:stretch>
+        </p:blipFill>
         <p:spPr>
           <a:xfrm>
             <a:off x="274320" y="640080"/>
-            <a:ext cx="8595360" cy="320040"/>
-          </a:xfrm>
-          <a:prstGeom prst="rect">
-            <a:avLst/>
-          </a:prstGeom>
-          <a:solidFill>
-            <a:srgbClr val="2D2D2D"/>
-          </a:solidFill>
-          <a:ln/>
-          <a:effectLst>
-            <a:outerShdw sx="100000" sy="100000" kx="0" ky="0" algn="bl" rotWithShape="0" blurRad="76200" dist="25400" dir="8100000">
-              <a:srgbClr val="000000">
-                <a:alpha val="40000"/>
-              </a:srgbClr>
-            </a:outerShdw>
-          </a:effectLst>
-        </p:spPr>
-      </p:sp>
-      <p:sp>
-        <p:nvSpPr>
-          <p:cNvPr id="5" name="Shape 3"/>
-          <p:cNvSpPr/>
-          <p:nvPr/>
-        </p:nvSpPr>
-        <p:spPr>
-          <a:xfrm>
-            <a:off x="411480" y="731520"/>
-            <a:ext cx="109728" cy="109728"/>
-          </a:xfrm>
-          <a:prstGeom prst="ellipse">
-            <a:avLst/>
-          </a:prstGeom>
-          <a:solidFill>
-            <a:srgbClr val="FF5F57"/>
-          </a:solidFill>
-          <a:ln/>
-        </p:spPr>
-      </p:sp>
-      <p:sp>
-        <p:nvSpPr>
-          <p:cNvPr id="6" name="Shape 4"/>
-          <p:cNvSpPr/>
-          <p:nvPr/>
-        </p:nvSpPr>
-        <p:spPr>
-          <a:xfrm>
-            <a:off x="594360" y="731520"/>
-            <a:ext cx="109728" cy="109728"/>
-          </a:xfrm>
-          <a:prstGeom prst="ellipse">
-            <a:avLst/>
-          </a:prstGeom>
-          <a:solidFill>
-            <a:srgbClr val="FEBC2E"/>
-          </a:solidFill>
-          <a:ln/>
-        </p:spPr>
-      </p:sp>
-      <p:sp>
-        <p:nvSpPr>
-          <p:cNvPr id="7" name="Shape 5"/>
-          <p:cNvSpPr/>
-          <p:nvPr/>
-        </p:nvSpPr>
-        <p:spPr>
-          <a:xfrm>
-            <a:off x="777240" y="731520"/>
-            <a:ext cx="109728" cy="109728"/>
-          </a:xfrm>
-          <a:prstGeom prst="ellipse">
-            <a:avLst/>
-          </a:prstGeom>
-          <a:solidFill>
-            <a:srgbClr val="28C840"/>
-          </a:solidFill>
-          <a:ln/>
-        </p:spPr>
-      </p:sp>
-      <p:sp>
-        <p:nvSpPr>
-          <p:cNvPr id="8" name="Text 6"/>
-          <p:cNvSpPr/>
-          <p:nvPr/>
-        </p:nvSpPr>
-        <p:spPr>
-          <a:xfrm>
-            <a:off x="1188720" y="658368"/>
-            <a:ext cx="4572000" cy="274320"/>
-          </a:xfrm>
-          <a:prstGeom prst="rect">
-            <a:avLst/>
-          </a:prstGeom>
-          <a:noFill/>
-          <a:ln/>
-        </p:spPr>
-        <p:txBody>
-          <a:bodyPr wrap="square" rtlCol="0" anchor="ctr"/>
-          <a:lstStyle/>
-          <a:p>
-            <a:pPr indent="0" marL="0">
-              <a:buNone/>
-            </a:pPr>
-            <a:r>
-              <a:rPr lang="en-US" sz="800" dirty="0">
-                <a:solidFill>
-                  <a:srgbClr val="888888"/>
-                </a:solidFill>
-                <a:latin typeface="Arial" pitchFamily="34" charset="0"/>
-                <a:ea typeface="Arial" pitchFamily="34" charset="-122"/>
-                <a:cs typeface="Arial" pitchFamily="34" charset="-120"/>
-              </a:rPr>
-              <a:t>syntoniqa-mrs-api.fieldforcemrser.workers.dev</a:t>
-            </a:r>
-            <a:endParaRPr lang="en-US" sz="800" dirty="0"/>
-          </a:p>
-        </p:txBody>
-      </p:sp>
-      <p:sp>
-        <p:nvSpPr>
-          <p:cNvPr id="9" name="Shape 7"/>
-          <p:cNvSpPr/>
-          <p:nvPr/>
-        </p:nvSpPr>
-        <p:spPr>
-          <a:xfrm>
-            <a:off x="274320" y="960120"/>
-            <a:ext cx="8595360" cy="3886200"/>
-          </a:xfrm>
-          <a:prstGeom prst="rect">
-            <a:avLst/>
-          </a:prstGeom>
-          <a:solidFill>
-            <a:srgbClr val="111111"/>
-          </a:solidFill>
-          <a:ln/>
-        </p:spPr>
-      </p:sp>
-      <p:sp>
-        <p:nvSpPr>
-          <p:cNvPr id="10" name="Shape 8"/>
-          <p:cNvSpPr/>
-          <p:nvPr/>
-        </p:nvSpPr>
-        <p:spPr>
-          <a:xfrm>
-            <a:off x="274320" y="960120"/>
-            <a:ext cx="1371600" cy="3886200"/>
-          </a:xfrm>
-          <a:prstGeom prst="rect">
-            <a:avLst/>
-          </a:prstGeom>
-          <a:solidFill>
-            <a:srgbClr val="1A1A1A"/>
-          </a:solidFill>
-          <a:ln/>
-        </p:spPr>
-      </p:sp>
-      <p:sp>
-        <p:nvSpPr>
-          <p:cNvPr id="11" name="Text 9"/>
-          <p:cNvSpPr/>
-          <p:nvPr/>
-        </p:nvSpPr>
-        <p:spPr>
-          <a:xfrm>
-            <a:off x="365760" y="1051560"/>
-            <a:ext cx="1188720" cy="274320"/>
-          </a:xfrm>
-          <a:prstGeom prst="rect">
-            <a:avLst/>
-          </a:prstGeom>
-          <a:noFill/>
-          <a:ln/>
-        </p:spPr>
-        <p:txBody>
-          <a:bodyPr wrap="square" lIns="0" tIns="0" rIns="0" bIns="0" rtlCol="0" anchor="ctr"/>
-          <a:lstStyle/>
-          <a:p>
-            <a:pPr indent="0" marL="0">
-              <a:buNone/>
-            </a:pPr>
-            <a:r>
-              <a:rPr lang="en-US" sz="1000" b="1" dirty="0">
-                <a:solidFill>
-                  <a:srgbClr val="C30A14"/>
-                </a:solidFill>
-                <a:latin typeface="Arial Black" pitchFamily="34" charset="0"/>
-                <a:ea typeface="Arial Black" pitchFamily="34" charset="-122"/>
-                <a:cs typeface="Arial Black" pitchFamily="34" charset="-120"/>
-              </a:rPr>
-              <a:t>SYNTONIQA</a:t>
-            </a:r>
-            <a:endParaRPr lang="en-US" sz="1000" dirty="0"/>
-          </a:p>
-        </p:txBody>
-      </p:sp>
-      <p:sp>
-        <p:nvSpPr>
-          <p:cNvPr id="12" name="Shape 10"/>
-          <p:cNvSpPr/>
-          <p:nvPr/>
-        </p:nvSpPr>
-        <p:spPr>
-          <a:xfrm>
-            <a:off x="274320" y="1417320"/>
-            <a:ext cx="1371600" cy="274320"/>
-          </a:xfrm>
-          <a:prstGeom prst="rect">
-            <a:avLst/>
-          </a:prstGeom>
-          <a:solidFill>
-            <a:srgbClr val="C30A14"/>
-          </a:solidFill>
-          <a:ln/>
-        </p:spPr>
-      </p:sp>
-      <p:sp>
-        <p:nvSpPr>
-          <p:cNvPr id="13" name="Text 11"/>
-          <p:cNvSpPr/>
-          <p:nvPr/>
-        </p:nvSpPr>
-        <p:spPr>
-          <a:xfrm>
-            <a:off x="411480" y="1417320"/>
-            <a:ext cx="1097280" cy="274320"/>
-          </a:xfrm>
-          <a:prstGeom prst="rect">
-            <a:avLst/>
-          </a:prstGeom>
-          <a:noFill/>
-          <a:ln/>
-        </p:spPr>
-        <p:txBody>
-          <a:bodyPr wrap="square" lIns="0" tIns="0" rIns="0" bIns="0" rtlCol="0" anchor="ctr"/>
-          <a:lstStyle/>
-          <a:p>
-            <a:pPr indent="0" marL="0">
-              <a:buNone/>
-            </a:pPr>
-            <a:r>
-              <a:rPr lang="en-US" sz="800" dirty="0">
-                <a:solidFill>
-                  <a:srgbClr val="FFFFFF"/>
-                </a:solidFill>
-                <a:latin typeface="Arial" pitchFamily="34" charset="0"/>
-                <a:ea typeface="Arial" pitchFamily="34" charset="-122"/>
-                <a:cs typeface="Arial" pitchFamily="34" charset="-120"/>
-              </a:rPr>
-              <a:t>Dashboard</a:t>
-            </a:r>
-            <a:endParaRPr lang="en-US" sz="800" dirty="0"/>
-          </a:p>
-        </p:txBody>
-      </p:sp>
-      <p:sp>
-        <p:nvSpPr>
-          <p:cNvPr id="14" name="Text 12"/>
-          <p:cNvSpPr/>
-          <p:nvPr/>
-        </p:nvSpPr>
-        <p:spPr>
-          <a:xfrm>
-            <a:off x="411480" y="1709928"/>
-            <a:ext cx="1097280" cy="274320"/>
-          </a:xfrm>
-          <a:prstGeom prst="rect">
-            <a:avLst/>
-          </a:prstGeom>
-          <a:noFill/>
-          <a:ln/>
-        </p:spPr>
-        <p:txBody>
-          <a:bodyPr wrap="square" lIns="0" tIns="0" rIns="0" bIns="0" rtlCol="0" anchor="ctr"/>
-          <a:lstStyle/>
-          <a:p>
-            <a:pPr indent="0" marL="0">
-              <a:buNone/>
-            </a:pPr>
-            <a:r>
-              <a:rPr lang="en-US" sz="800" dirty="0">
-                <a:solidFill>
-                  <a:srgbClr val="888888"/>
-                </a:solidFill>
-                <a:latin typeface="Arial" pitchFamily="34" charset="0"/>
-                <a:ea typeface="Arial" pitchFamily="34" charset="-122"/>
-                <a:cs typeface="Arial" pitchFamily="34" charset="-120"/>
-              </a:rPr>
-              <a:t>Urgenze</a:t>
-            </a:r>
-            <a:endParaRPr lang="en-US" sz="800" dirty="0"/>
-          </a:p>
-        </p:txBody>
-      </p:sp>
-      <p:sp>
-        <p:nvSpPr>
-          <p:cNvPr id="15" name="Text 13"/>
-          <p:cNvSpPr/>
-          <p:nvPr/>
-        </p:nvSpPr>
-        <p:spPr>
-          <a:xfrm>
-            <a:off x="411480" y="2002536"/>
-            <a:ext cx="1097280" cy="274320"/>
-          </a:xfrm>
-          <a:prstGeom prst="rect">
-            <a:avLst/>
-          </a:prstGeom>
-          <a:noFill/>
-          <a:ln/>
-        </p:spPr>
-        <p:txBody>
-          <a:bodyPr wrap="square" lIns="0" tIns="0" rIns="0" bIns="0" rtlCol="0" anchor="ctr"/>
-          <a:lstStyle/>
-          <a:p>
-            <a:pPr indent="0" marL="0">
-              <a:buNone/>
-            </a:pPr>
-            <a:r>
-              <a:rPr lang="en-US" sz="800" dirty="0">
-                <a:solidFill>
-                  <a:srgbClr val="888888"/>
-                </a:solidFill>
-                <a:latin typeface="Arial" pitchFamily="34" charset="0"/>
-                <a:ea typeface="Arial" pitchFamily="34" charset="-122"/>
-                <a:cs typeface="Arial" pitchFamily="34" charset="-120"/>
-              </a:rPr>
-              <a:t>Piano</a:t>
-            </a:r>
-            <a:endParaRPr lang="en-US" sz="800" dirty="0"/>
-          </a:p>
-        </p:txBody>
-      </p:sp>
-      <p:sp>
-        <p:nvSpPr>
-          <p:cNvPr id="16" name="Text 14"/>
-          <p:cNvSpPr/>
-          <p:nvPr/>
-        </p:nvSpPr>
-        <p:spPr>
-          <a:xfrm>
-            <a:off x="411480" y="2295144"/>
-            <a:ext cx="1097280" cy="274320"/>
-          </a:xfrm>
-          <a:prstGeom prst="rect">
-            <a:avLst/>
-          </a:prstGeom>
-          <a:noFill/>
-          <a:ln/>
-        </p:spPr>
-        <p:txBody>
-          <a:bodyPr wrap="square" lIns="0" tIns="0" rIns="0" bIns="0" rtlCol="0" anchor="ctr"/>
-          <a:lstStyle/>
-          <a:p>
-            <a:pPr indent="0" marL="0">
-              <a:buNone/>
-            </a:pPr>
-            <a:r>
-              <a:rPr lang="en-US" sz="800" dirty="0">
-                <a:solidFill>
-                  <a:srgbClr val="888888"/>
-                </a:solidFill>
-                <a:latin typeface="Arial" pitchFamily="34" charset="0"/>
-                <a:ea typeface="Arial" pitchFamily="34" charset="-122"/>
-                <a:cs typeface="Arial" pitchFamily="34" charset="-120"/>
-              </a:rPr>
-              <a:t>Ordini</a:t>
-            </a:r>
-            <a:endParaRPr lang="en-US" sz="800" dirty="0"/>
-          </a:p>
-        </p:txBody>
-      </p:sp>
-      <p:sp>
-        <p:nvSpPr>
-          <p:cNvPr id="17" name="Text 15"/>
-          <p:cNvSpPr/>
-          <p:nvPr/>
-        </p:nvSpPr>
-        <p:spPr>
-          <a:xfrm>
-            <a:off x="411480" y="2587752"/>
-            <a:ext cx="1097280" cy="274320"/>
-          </a:xfrm>
-          <a:prstGeom prst="rect">
-            <a:avLst/>
-          </a:prstGeom>
-          <a:noFill/>
-          <a:ln/>
-        </p:spPr>
-        <p:txBody>
-          <a:bodyPr wrap="square" lIns="0" tIns="0" rIns="0" bIns="0" rtlCol="0" anchor="ctr"/>
-          <a:lstStyle/>
-          <a:p>
-            <a:pPr indent="0" marL="0">
-              <a:buNone/>
-            </a:pPr>
-            <a:r>
-              <a:rPr lang="en-US" sz="800" dirty="0">
-                <a:solidFill>
-                  <a:srgbClr val="888888"/>
-                </a:solidFill>
-                <a:latin typeface="Arial" pitchFamily="34" charset="0"/>
-                <a:ea typeface="Arial" pitchFamily="34" charset="-122"/>
-                <a:cs typeface="Arial" pitchFamily="34" charset="-120"/>
-              </a:rPr>
-              <a:t>Clienti</a:t>
-            </a:r>
-            <a:endParaRPr lang="en-US" sz="800" dirty="0"/>
-          </a:p>
-        </p:txBody>
-      </p:sp>
-      <p:sp>
-        <p:nvSpPr>
-          <p:cNvPr id="18" name="Text 16"/>
-          <p:cNvSpPr/>
-          <p:nvPr/>
-        </p:nvSpPr>
-        <p:spPr>
-          <a:xfrm>
-            <a:off x="411480" y="2880360"/>
-            <a:ext cx="1097280" cy="274320"/>
-          </a:xfrm>
-          <a:prstGeom prst="rect">
-            <a:avLst/>
-          </a:prstGeom>
-          <a:noFill/>
-          <a:ln/>
-        </p:spPr>
-        <p:txBody>
-          <a:bodyPr wrap="square" lIns="0" tIns="0" rIns="0" bIns="0" rtlCol="0" anchor="ctr"/>
-          <a:lstStyle/>
-          <a:p>
-            <a:pPr indent="0" marL="0">
-              <a:buNone/>
-            </a:pPr>
-            <a:r>
-              <a:rPr lang="en-US" sz="800" dirty="0">
-                <a:solidFill>
-                  <a:srgbClr val="888888"/>
-                </a:solidFill>
-                <a:latin typeface="Arial" pitchFamily="34" charset="0"/>
-                <a:ea typeface="Arial" pitchFamily="34" charset="-122"/>
-                <a:cs typeface="Arial" pitchFamily="34" charset="-120"/>
-              </a:rPr>
-              <a:t>Macchine</a:t>
-            </a:r>
-            <a:endParaRPr lang="en-US" sz="800" dirty="0"/>
-          </a:p>
-        </p:txBody>
-      </p:sp>
-      <p:sp>
-        <p:nvSpPr>
-          <p:cNvPr id="19" name="Text 17"/>
-          <p:cNvSpPr/>
-          <p:nvPr/>
-        </p:nvSpPr>
-        <p:spPr>
-          <a:xfrm>
-            <a:off x="411480" y="3172968"/>
-            <a:ext cx="1097280" cy="274320"/>
-          </a:xfrm>
-          <a:prstGeom prst="rect">
-            <a:avLst/>
-          </a:prstGeom>
-          <a:noFill/>
-          <a:ln/>
-        </p:spPr>
-        <p:txBody>
-          <a:bodyPr wrap="square" lIns="0" tIns="0" rIns="0" bIns="0" rtlCol="0" anchor="ctr"/>
-          <a:lstStyle/>
-          <a:p>
-            <a:pPr indent="0" marL="0">
-              <a:buNone/>
-            </a:pPr>
-            <a:r>
-              <a:rPr lang="en-US" sz="800" dirty="0">
-                <a:solidFill>
-                  <a:srgbClr val="888888"/>
-                </a:solidFill>
-                <a:latin typeface="Arial" pitchFamily="34" charset="0"/>
-                <a:ea typeface="Arial" pitchFamily="34" charset="-122"/>
-                <a:cs typeface="Arial" pitchFamily="34" charset="-120"/>
-              </a:rPr>
-              <a:t>Mappa</a:t>
-            </a:r>
-            <a:endParaRPr lang="en-US" sz="800" dirty="0"/>
-          </a:p>
-        </p:txBody>
-      </p:sp>
-      <p:sp>
-        <p:nvSpPr>
-          <p:cNvPr id="20" name="Text 18"/>
-          <p:cNvSpPr/>
-          <p:nvPr/>
-        </p:nvSpPr>
-        <p:spPr>
-          <a:xfrm>
-            <a:off x="411480" y="3465576"/>
-            <a:ext cx="1097280" cy="274320"/>
-          </a:xfrm>
-          <a:prstGeom prst="rect">
-            <a:avLst/>
-          </a:prstGeom>
-          <a:noFill/>
-          <a:ln/>
-        </p:spPr>
-        <p:txBody>
-          <a:bodyPr wrap="square" lIns="0" tIns="0" rIns="0" bIns="0" rtlCol="0" anchor="ctr"/>
-          <a:lstStyle/>
-          <a:p>
-            <a:pPr indent="0" marL="0">
-              <a:buNone/>
-            </a:pPr>
-            <a:r>
-              <a:rPr lang="en-US" sz="800" dirty="0">
-                <a:solidFill>
-                  <a:srgbClr val="888888"/>
-                </a:solidFill>
-                <a:latin typeface="Arial" pitchFamily="34" charset="0"/>
-                <a:ea typeface="Arial" pitchFamily="34" charset="-122"/>
-                <a:cs typeface="Arial" pitchFamily="34" charset="-120"/>
-              </a:rPr>
-              <a:t>KPI</a:t>
-            </a:r>
-            <a:endParaRPr lang="en-US" sz="800" dirty="0"/>
-          </a:p>
-        </p:txBody>
-      </p:sp>
-      <p:sp>
-        <p:nvSpPr>
-          <p:cNvPr id="21" name="Text 19"/>
-          <p:cNvSpPr/>
-          <p:nvPr/>
-        </p:nvSpPr>
-        <p:spPr>
-          <a:xfrm>
-            <a:off x="411480" y="3758184"/>
-            <a:ext cx="1097280" cy="274320"/>
-          </a:xfrm>
-          <a:prstGeom prst="rect">
-            <a:avLst/>
-          </a:prstGeom>
-          <a:noFill/>
-          <a:ln/>
-        </p:spPr>
-        <p:txBody>
-          <a:bodyPr wrap="square" lIns="0" tIns="0" rIns="0" bIns="0" rtlCol="0" anchor="ctr"/>
-          <a:lstStyle/>
-          <a:p>
-            <a:pPr indent="0" marL="0">
-              <a:buNone/>
-            </a:pPr>
-            <a:r>
-              <a:rPr lang="en-US" sz="800" dirty="0">
-                <a:solidFill>
-                  <a:srgbClr val="888888"/>
-                </a:solidFill>
-                <a:latin typeface="Arial" pitchFamily="34" charset="0"/>
-                <a:ea typeface="Arial" pitchFamily="34" charset="-122"/>
-                <a:cs typeface="Arial" pitchFamily="34" charset="-120"/>
-              </a:rPr>
-              <a:t>Chat</a:t>
-            </a:r>
-            <a:endParaRPr lang="en-US" sz="800" dirty="0"/>
-          </a:p>
-        </p:txBody>
-      </p:sp>
-      <p:sp>
-        <p:nvSpPr>
-          <p:cNvPr id="22" name="Text 20"/>
-          <p:cNvSpPr/>
-          <p:nvPr/>
-        </p:nvSpPr>
-        <p:spPr>
-          <a:xfrm>
-            <a:off x="411480" y="4050792"/>
-            <a:ext cx="1097280" cy="274320"/>
-          </a:xfrm>
-          <a:prstGeom prst="rect">
-            <a:avLst/>
-          </a:prstGeom>
-          <a:noFill/>
-          <a:ln/>
-        </p:spPr>
-        <p:txBody>
-          <a:bodyPr wrap="square" lIns="0" tIns="0" rIns="0" bIns="0" rtlCol="0" anchor="ctr"/>
-          <a:lstStyle/>
-          <a:p>
-            <a:pPr indent="0" marL="0">
-              <a:buNone/>
-            </a:pPr>
-            <a:r>
-              <a:rPr lang="en-US" sz="800" dirty="0">
-                <a:solidFill>
-                  <a:srgbClr val="888888"/>
-                </a:solidFill>
-                <a:latin typeface="Arial" pitchFamily="34" charset="0"/>
-                <a:ea typeface="Arial" pitchFamily="34" charset="-122"/>
-                <a:cs typeface="Arial" pitchFamily="34" charset="-120"/>
-              </a:rPr>
-              <a:t>Config</a:t>
-            </a:r>
-            <a:endParaRPr lang="en-US" sz="800" dirty="0"/>
-          </a:p>
-        </p:txBody>
-      </p:sp>
-      <p:sp>
-        <p:nvSpPr>
-          <p:cNvPr id="23" name="Shape 21"/>
-          <p:cNvSpPr/>
-          <p:nvPr/>
-        </p:nvSpPr>
-        <p:spPr>
-          <a:xfrm>
-            <a:off x="1828800" y="1097280"/>
-            <a:ext cx="1600200" cy="731520"/>
-          </a:xfrm>
-          <a:prstGeom prst="rect">
-            <a:avLst/>
-          </a:prstGeom>
-          <a:solidFill>
-            <a:srgbClr val="222222"/>
-          </a:solidFill>
-          <a:ln/>
-        </p:spPr>
-      </p:sp>
-      <p:sp>
-        <p:nvSpPr>
-          <p:cNvPr id="24" name="Shape 22"/>
-          <p:cNvSpPr/>
-          <p:nvPr/>
-        </p:nvSpPr>
-        <p:spPr>
-          <a:xfrm>
-            <a:off x="1828800" y="1097280"/>
-            <a:ext cx="1600200" cy="27432"/>
-          </a:xfrm>
-          <a:prstGeom prst="rect">
-            <a:avLst/>
-          </a:prstGeom>
-          <a:solidFill>
-            <a:srgbClr val="C30A14"/>
-          </a:solidFill>
-          <a:ln/>
-        </p:spPr>
-      </p:sp>
-      <p:sp>
-        <p:nvSpPr>
-          <p:cNvPr id="25" name="Text 23"/>
-          <p:cNvSpPr/>
-          <p:nvPr/>
-        </p:nvSpPr>
-        <p:spPr>
-          <a:xfrm>
-            <a:off x="1920240" y="1115568"/>
-            <a:ext cx="1371600" cy="411480"/>
-          </a:xfrm>
-          <a:prstGeom prst="rect">
-            <a:avLst/>
-          </a:prstGeom>
-          <a:noFill/>
-          <a:ln/>
-        </p:spPr>
-        <p:txBody>
-          <a:bodyPr wrap="square" lIns="0" tIns="0" rIns="0" bIns="0" rtlCol="0" anchor="ctr"/>
-          <a:lstStyle/>
-          <a:p>
-            <a:pPr indent="0" marL="0">
-              <a:buNone/>
-            </a:pPr>
-            <a:r>
-              <a:rPr lang="en-US" sz="2200" b="1" dirty="0">
-                <a:solidFill>
-                  <a:srgbClr val="C30A14"/>
-                </a:solidFill>
-                <a:latin typeface="Arial Black" pitchFamily="34" charset="0"/>
-                <a:ea typeface="Arial Black" pitchFamily="34" charset="-122"/>
-                <a:cs typeface="Arial Black" pitchFamily="34" charset="-120"/>
-              </a:rPr>
-              <a:t>12</a:t>
-            </a:r>
-            <a:endParaRPr lang="en-US" sz="2200" dirty="0"/>
-          </a:p>
-        </p:txBody>
-      </p:sp>
-      <p:sp>
-        <p:nvSpPr>
-          <p:cNvPr id="26" name="Text 24"/>
-          <p:cNvSpPr/>
-          <p:nvPr/>
-        </p:nvSpPr>
-        <p:spPr>
-          <a:xfrm>
-            <a:off x="1920240" y="1508760"/>
-            <a:ext cx="1371600" cy="228600"/>
-          </a:xfrm>
-          <a:prstGeom prst="rect">
-            <a:avLst/>
-          </a:prstGeom>
-          <a:noFill/>
-          <a:ln/>
-        </p:spPr>
-        <p:txBody>
-          <a:bodyPr wrap="square" lIns="0" tIns="0" rIns="0" bIns="0" rtlCol="0" anchor="ctr"/>
-          <a:lstStyle/>
-          <a:p>
-            <a:pPr indent="0" marL="0">
-              <a:buNone/>
-            </a:pPr>
-            <a:r>
-              <a:rPr lang="en-US" sz="700" dirty="0">
-                <a:solidFill>
-                  <a:srgbClr val="888888"/>
-                </a:solidFill>
-                <a:latin typeface="Arial" pitchFamily="34" charset="0"/>
-                <a:ea typeface="Arial" pitchFamily="34" charset="-122"/>
-                <a:cs typeface="Arial" pitchFamily="34" charset="-120"/>
-              </a:rPr>
-              <a:t>Urgenze Aperte</a:t>
-            </a:r>
-            <a:endParaRPr lang="en-US" sz="700" dirty="0"/>
-          </a:p>
-        </p:txBody>
-      </p:sp>
-      <p:sp>
-        <p:nvSpPr>
-          <p:cNvPr id="27" name="Shape 25"/>
-          <p:cNvSpPr/>
-          <p:nvPr/>
-        </p:nvSpPr>
-        <p:spPr>
-          <a:xfrm>
-            <a:off x="3566160" y="1097280"/>
-            <a:ext cx="1600200" cy="731520"/>
-          </a:xfrm>
-          <a:prstGeom prst="rect">
-            <a:avLst/>
-          </a:prstGeom>
-          <a:solidFill>
-            <a:srgbClr val="222222"/>
-          </a:solidFill>
-          <a:ln/>
-        </p:spPr>
-      </p:sp>
-      <p:sp>
-        <p:nvSpPr>
-          <p:cNvPr id="28" name="Shape 26"/>
-          <p:cNvSpPr/>
-          <p:nvPr/>
-        </p:nvSpPr>
-        <p:spPr>
-          <a:xfrm>
-            <a:off x="3566160" y="1097280"/>
-            <a:ext cx="1600200" cy="27432"/>
-          </a:xfrm>
-          <a:prstGeom prst="rect">
-            <a:avLst/>
-          </a:prstGeom>
-          <a:solidFill>
-            <a:srgbClr val="3B7EF7"/>
-          </a:solidFill>
-          <a:ln/>
-        </p:spPr>
-      </p:sp>
-      <p:sp>
-        <p:nvSpPr>
-          <p:cNvPr id="29" name="Text 27"/>
-          <p:cNvSpPr/>
-          <p:nvPr/>
-        </p:nvSpPr>
-        <p:spPr>
-          <a:xfrm>
-            <a:off x="3657600" y="1115568"/>
-            <a:ext cx="1371600" cy="411480"/>
-          </a:xfrm>
-          <a:prstGeom prst="rect">
-            <a:avLst/>
-          </a:prstGeom>
-          <a:noFill/>
-          <a:ln/>
-        </p:spPr>
-        <p:txBody>
-          <a:bodyPr wrap="square" lIns="0" tIns="0" rIns="0" bIns="0" rtlCol="0" anchor="ctr"/>
-          <a:lstStyle/>
-          <a:p>
-            <a:pPr indent="0" marL="0">
-              <a:buNone/>
-            </a:pPr>
-            <a:r>
-              <a:rPr lang="en-US" sz="2200" b="1" dirty="0">
-                <a:solidFill>
-                  <a:srgbClr val="3B7EF7"/>
-                </a:solidFill>
-                <a:latin typeface="Arial Black" pitchFamily="34" charset="0"/>
-                <a:ea typeface="Arial Black" pitchFamily="34" charset="-122"/>
-                <a:cs typeface="Arial Black" pitchFamily="34" charset="-120"/>
-              </a:rPr>
-              <a:t>8</a:t>
-            </a:r>
-            <a:endParaRPr lang="en-US" sz="2200" dirty="0"/>
-          </a:p>
-        </p:txBody>
-      </p:sp>
-      <p:sp>
-        <p:nvSpPr>
-          <p:cNvPr id="30" name="Text 28"/>
-          <p:cNvSpPr/>
-          <p:nvPr/>
-        </p:nvSpPr>
-        <p:spPr>
-          <a:xfrm>
-            <a:off x="3657600" y="1508760"/>
-            <a:ext cx="1371600" cy="228600"/>
-          </a:xfrm>
-          <a:prstGeom prst="rect">
-            <a:avLst/>
-          </a:prstGeom>
-          <a:noFill/>
-          <a:ln/>
-        </p:spPr>
-        <p:txBody>
-          <a:bodyPr wrap="square" lIns="0" tIns="0" rIns="0" bIns="0" rtlCol="0" anchor="ctr"/>
-          <a:lstStyle/>
-          <a:p>
-            <a:pPr indent="0" marL="0">
-              <a:buNone/>
-            </a:pPr>
-            <a:r>
-              <a:rPr lang="en-US" sz="700" dirty="0">
-                <a:solidFill>
-                  <a:srgbClr val="888888"/>
-                </a:solidFill>
-                <a:latin typeface="Arial" pitchFamily="34" charset="0"/>
-                <a:ea typeface="Arial" pitchFamily="34" charset="-122"/>
-                <a:cs typeface="Arial" pitchFamily="34" charset="-120"/>
-              </a:rPr>
-              <a:t>Interventi Oggi</a:t>
-            </a:r>
-            <a:endParaRPr lang="en-US" sz="700" dirty="0"/>
-          </a:p>
-        </p:txBody>
-      </p:sp>
-      <p:sp>
-        <p:nvSpPr>
-          <p:cNvPr id="31" name="Shape 29"/>
-          <p:cNvSpPr/>
-          <p:nvPr/>
-        </p:nvSpPr>
-        <p:spPr>
-          <a:xfrm>
-            <a:off x="5303520" y="1097280"/>
-            <a:ext cx="1600200" cy="731520"/>
-          </a:xfrm>
-          <a:prstGeom prst="rect">
-            <a:avLst/>
-          </a:prstGeom>
-          <a:solidFill>
-            <a:srgbClr val="222222"/>
-          </a:solidFill>
-          <a:ln/>
-        </p:spPr>
-      </p:sp>
-      <p:sp>
-        <p:nvSpPr>
-          <p:cNvPr id="32" name="Shape 30"/>
-          <p:cNvSpPr/>
-          <p:nvPr/>
-        </p:nvSpPr>
-        <p:spPr>
-          <a:xfrm>
-            <a:off x="5303520" y="1097280"/>
-            <a:ext cx="1600200" cy="27432"/>
-          </a:xfrm>
-          <a:prstGeom prst="rect">
-            <a:avLst/>
-          </a:prstGeom>
-          <a:solidFill>
-            <a:srgbClr val="F7B731"/>
-          </a:solidFill>
-          <a:ln/>
-        </p:spPr>
-      </p:sp>
-      <p:sp>
-        <p:nvSpPr>
-          <p:cNvPr id="33" name="Text 31"/>
-          <p:cNvSpPr/>
-          <p:nvPr/>
-        </p:nvSpPr>
-        <p:spPr>
-          <a:xfrm>
-            <a:off x="5394960" y="1115568"/>
-            <a:ext cx="1371600" cy="411480"/>
-          </a:xfrm>
-          <a:prstGeom prst="rect">
-            <a:avLst/>
-          </a:prstGeom>
-          <a:noFill/>
-          <a:ln/>
-        </p:spPr>
-        <p:txBody>
-          <a:bodyPr wrap="square" lIns="0" tIns="0" rIns="0" bIns="0" rtlCol="0" anchor="ctr"/>
-          <a:lstStyle/>
-          <a:p>
-            <a:pPr indent="0" marL="0">
-              <a:buNone/>
-            </a:pPr>
-            <a:r>
-              <a:rPr lang="en-US" sz="2200" b="1" dirty="0">
-                <a:solidFill>
-                  <a:srgbClr val="F7B731"/>
-                </a:solidFill>
-                <a:latin typeface="Arial Black" pitchFamily="34" charset="0"/>
-                <a:ea typeface="Arial Black" pitchFamily="34" charset="-122"/>
-                <a:cs typeface="Arial Black" pitchFamily="34" charset="-120"/>
-              </a:rPr>
-              <a:t>5</a:t>
-            </a:r>
-            <a:endParaRPr lang="en-US" sz="2200" dirty="0"/>
-          </a:p>
-        </p:txBody>
-      </p:sp>
-      <p:sp>
-        <p:nvSpPr>
-          <p:cNvPr id="34" name="Text 32"/>
-          <p:cNvSpPr/>
-          <p:nvPr/>
-        </p:nvSpPr>
-        <p:spPr>
-          <a:xfrm>
-            <a:off x="5394960" y="1508760"/>
-            <a:ext cx="1371600" cy="228600"/>
-          </a:xfrm>
-          <a:prstGeom prst="rect">
-            <a:avLst/>
-          </a:prstGeom>
-          <a:noFill/>
-          <a:ln/>
-        </p:spPr>
-        <p:txBody>
-          <a:bodyPr wrap="square" lIns="0" tIns="0" rIns="0" bIns="0" rtlCol="0" anchor="ctr"/>
-          <a:lstStyle/>
-          <a:p>
-            <a:pPr indent="0" marL="0">
-              <a:buNone/>
-            </a:pPr>
-            <a:r>
-              <a:rPr lang="en-US" sz="700" dirty="0">
-                <a:solidFill>
-                  <a:srgbClr val="888888"/>
-                </a:solidFill>
-                <a:latin typeface="Arial" pitchFamily="34" charset="0"/>
-                <a:ea typeface="Arial" pitchFamily="34" charset="-122"/>
-                <a:cs typeface="Arial" pitchFamily="34" charset="-120"/>
-              </a:rPr>
-              <a:t>Ordini Pendenti</a:t>
-            </a:r>
-            <a:endParaRPr lang="en-US" sz="700" dirty="0"/>
-          </a:p>
-        </p:txBody>
-      </p:sp>
-      <p:sp>
-        <p:nvSpPr>
-          <p:cNvPr id="35" name="Shape 33"/>
-          <p:cNvSpPr/>
-          <p:nvPr/>
-        </p:nvSpPr>
-        <p:spPr>
-          <a:xfrm>
-            <a:off x="7040880" y="1097280"/>
-            <a:ext cx="1600200" cy="731520"/>
-          </a:xfrm>
-          <a:prstGeom prst="rect">
-            <a:avLst/>
-          </a:prstGeom>
-          <a:solidFill>
-            <a:srgbClr val="222222"/>
-          </a:solidFill>
-          <a:ln/>
-        </p:spPr>
-      </p:sp>
-      <p:sp>
-        <p:nvSpPr>
-          <p:cNvPr id="36" name="Shape 34"/>
-          <p:cNvSpPr/>
-          <p:nvPr/>
-        </p:nvSpPr>
-        <p:spPr>
-          <a:xfrm>
-            <a:off x="7040880" y="1097280"/>
-            <a:ext cx="1600200" cy="27432"/>
-          </a:xfrm>
-          <a:prstGeom prst="rect">
-            <a:avLst/>
-          </a:prstGeom>
-          <a:solidFill>
-            <a:srgbClr val="34D058"/>
-          </a:solidFill>
-          <a:ln/>
-        </p:spPr>
-      </p:sp>
-      <p:sp>
-        <p:nvSpPr>
-          <p:cNvPr id="37" name="Text 35"/>
-          <p:cNvSpPr/>
-          <p:nvPr/>
-        </p:nvSpPr>
-        <p:spPr>
-          <a:xfrm>
-            <a:off x="7132320" y="1115568"/>
-            <a:ext cx="1371600" cy="411480"/>
-          </a:xfrm>
-          <a:prstGeom prst="rect">
-            <a:avLst/>
-          </a:prstGeom>
-          <a:noFill/>
-          <a:ln/>
-        </p:spPr>
-        <p:txBody>
-          <a:bodyPr wrap="square" lIns="0" tIns="0" rIns="0" bIns="0" rtlCol="0" anchor="ctr"/>
-          <a:lstStyle/>
-          <a:p>
-            <a:pPr indent="0" marL="0">
-              <a:buNone/>
-            </a:pPr>
-            <a:r>
-              <a:rPr lang="en-US" sz="2200" b="1" dirty="0">
-                <a:solidFill>
-                  <a:srgbClr val="34D058"/>
-                </a:solidFill>
-                <a:latin typeface="Arial Black" pitchFamily="34" charset="0"/>
-                <a:ea typeface="Arial Black" pitchFamily="34" charset="-122"/>
-                <a:cs typeface="Arial Black" pitchFamily="34" charset="-120"/>
-              </a:rPr>
-              <a:t>7/10</a:t>
-            </a:r>
-            <a:endParaRPr lang="en-US" sz="2200" dirty="0"/>
-          </a:p>
-        </p:txBody>
-      </p:sp>
-      <p:sp>
-        <p:nvSpPr>
-          <p:cNvPr id="38" name="Text 36"/>
-          <p:cNvSpPr/>
-          <p:nvPr/>
-        </p:nvSpPr>
-        <p:spPr>
-          <a:xfrm>
-            <a:off x="7132320" y="1508760"/>
-            <a:ext cx="1371600" cy="228600"/>
-          </a:xfrm>
-          <a:prstGeom prst="rect">
-            <a:avLst/>
-          </a:prstGeom>
-          <a:noFill/>
-          <a:ln/>
-        </p:spPr>
-        <p:txBody>
-          <a:bodyPr wrap="square" lIns="0" tIns="0" rIns="0" bIns="0" rtlCol="0" anchor="ctr"/>
-          <a:lstStyle/>
-          <a:p>
-            <a:pPr indent="0" marL="0">
-              <a:buNone/>
-            </a:pPr>
-            <a:r>
-              <a:rPr lang="en-US" sz="700" dirty="0">
-                <a:solidFill>
-                  <a:srgbClr val="888888"/>
-                </a:solidFill>
-                <a:latin typeface="Arial" pitchFamily="34" charset="0"/>
-                <a:ea typeface="Arial" pitchFamily="34" charset="-122"/>
-                <a:cs typeface="Arial" pitchFamily="34" charset="-120"/>
-              </a:rPr>
-              <a:t>Tecnici Attivi</a:t>
-            </a:r>
-            <a:endParaRPr lang="en-US" sz="700" dirty="0"/>
-          </a:p>
-        </p:txBody>
-      </p:sp>
-      <p:sp>
-        <p:nvSpPr>
-          <p:cNvPr id="39" name="Shape 37"/>
-          <p:cNvSpPr/>
-          <p:nvPr/>
-        </p:nvSpPr>
-        <p:spPr>
-          <a:xfrm>
-            <a:off x="1828800" y="2011680"/>
-            <a:ext cx="7132320" cy="274320"/>
-          </a:xfrm>
-          <a:prstGeom prst="rect">
-            <a:avLst/>
-          </a:prstGeom>
-          <a:solidFill>
-            <a:srgbClr val="222222"/>
-          </a:solidFill>
-          <a:ln/>
-        </p:spPr>
-      </p:sp>
-      <p:sp>
-        <p:nvSpPr>
-          <p:cNvPr id="40" name="Text 38"/>
-          <p:cNvSpPr/>
-          <p:nvPr/>
-        </p:nvSpPr>
-        <p:spPr>
-          <a:xfrm>
-            <a:off x="1920240" y="2011680"/>
-            <a:ext cx="6949440" cy="274320"/>
-          </a:xfrm>
-          <a:prstGeom prst="rect">
-            <a:avLst/>
-          </a:prstGeom>
-          <a:noFill/>
-          <a:ln/>
-        </p:spPr>
-        <p:txBody>
-          <a:bodyPr wrap="square" lIns="0" tIns="0" rIns="0" bIns="0" rtlCol="0" anchor="ctr"/>
-          <a:lstStyle/>
-          <a:p>
-            <a:pPr indent="0" marL="0">
-              <a:buNone/>
-            </a:pPr>
-            <a:r>
-              <a:rPr lang="en-US" sz="700" b="1" dirty="0">
-                <a:solidFill>
-                  <a:srgbClr val="888888"/>
-                </a:solidFill>
-                <a:latin typeface="Courier New" pitchFamily="34" charset="0"/>
-                <a:ea typeface="Courier New" pitchFamily="34" charset="-122"/>
-                <a:cs typeface="Courier New" pitchFamily="34" charset="-120"/>
-              </a:rPr>
-              <a:t>ID              Cliente              Priorità         Tecnico          SLA              Stato</a:t>
-            </a:r>
-            <a:endParaRPr lang="en-US" sz="700" dirty="0"/>
-          </a:p>
-        </p:txBody>
-      </p:sp>
-      <p:sp>
-        <p:nvSpPr>
-          <p:cNvPr id="41" name="Shape 39"/>
-          <p:cNvSpPr/>
-          <p:nvPr/>
-        </p:nvSpPr>
-        <p:spPr>
-          <a:xfrm>
-            <a:off x="1828800" y="2304288"/>
-            <a:ext cx="7132320" cy="256032"/>
-          </a:xfrm>
-          <a:prstGeom prst="rect">
-            <a:avLst/>
-          </a:prstGeom>
-          <a:solidFill>
-            <a:srgbClr val="111111"/>
-          </a:solidFill>
-          <a:ln/>
-        </p:spPr>
-      </p:sp>
-      <p:sp>
-        <p:nvSpPr>
-          <p:cNvPr id="42" name="Text 40"/>
-          <p:cNvSpPr/>
-          <p:nvPr/>
-        </p:nvSpPr>
-        <p:spPr>
-          <a:xfrm>
-            <a:off x="1920240" y="2304288"/>
-            <a:ext cx="6949440" cy="256032"/>
-          </a:xfrm>
-          <a:prstGeom prst="rect">
-            <a:avLst/>
-          </a:prstGeom>
-          <a:noFill/>
-          <a:ln/>
-        </p:spPr>
-        <p:txBody>
-          <a:bodyPr wrap="square" lIns="0" tIns="0" rIns="0" bIns="0" rtlCol="0" anchor="ctr"/>
-          <a:lstStyle/>
-          <a:p>
-            <a:pPr indent="0" marL="0">
-              <a:buNone/>
-            </a:pPr>
-            <a:r>
-              <a:rPr lang="en-US" sz="700" dirty="0">
-                <a:solidFill>
-                  <a:srgbClr val="CCCCCC"/>
-                </a:solidFill>
-                <a:latin typeface="Courier New" pitchFamily="34" charset="0"/>
-                <a:ea typeface="Courier New" pitchFamily="34" charset="-122"/>
-                <a:cs typeface="Courier New" pitchFamily="34" charset="-120"/>
-              </a:rPr>
-              <a:t>URG_042    Az. Rossi              Alta            Jacopo           OK                Assegnata</a:t>
-            </a:r>
-            <a:endParaRPr lang="en-US" sz="700" dirty="0"/>
-          </a:p>
-        </p:txBody>
-      </p:sp>
-      <p:sp>
-        <p:nvSpPr>
-          <p:cNvPr id="43" name="Shape 41"/>
-          <p:cNvSpPr/>
-          <p:nvPr/>
-        </p:nvSpPr>
-        <p:spPr>
-          <a:xfrm>
-            <a:off x="1828800" y="2578608"/>
-            <a:ext cx="7132320" cy="256032"/>
-          </a:xfrm>
-          <a:prstGeom prst="rect">
-            <a:avLst/>
-          </a:prstGeom>
-          <a:solidFill>
-            <a:srgbClr val="1A1A1A"/>
-          </a:solidFill>
-          <a:ln/>
-        </p:spPr>
-      </p:sp>
-      <p:sp>
-        <p:nvSpPr>
-          <p:cNvPr id="44" name="Text 42"/>
-          <p:cNvSpPr/>
-          <p:nvPr/>
-        </p:nvSpPr>
-        <p:spPr>
-          <a:xfrm>
-            <a:off x="1920240" y="2578608"/>
-            <a:ext cx="6949440" cy="256032"/>
-          </a:xfrm>
-          <a:prstGeom prst="rect">
-            <a:avLst/>
-          </a:prstGeom>
-          <a:noFill/>
-          <a:ln/>
-        </p:spPr>
-        <p:txBody>
-          <a:bodyPr wrap="square" lIns="0" tIns="0" rIns="0" bIns="0" rtlCol="0" anchor="ctr"/>
-          <a:lstStyle/>
-          <a:p>
-            <a:pPr indent="0" marL="0">
-              <a:buNone/>
-            </a:pPr>
-            <a:r>
-              <a:rPr lang="en-US" sz="700" dirty="0">
-                <a:solidFill>
-                  <a:srgbClr val="CCCCCC"/>
-                </a:solidFill>
-                <a:latin typeface="Courier New" pitchFamily="34" charset="0"/>
-                <a:ea typeface="Courier New" pitchFamily="34" charset="-122"/>
-                <a:cs typeface="Courier New" pitchFamily="34" charset="-120"/>
-              </a:rPr>
-              <a:t>URG_041    Coop Verdi             Critica          Giovanni         WARNING      In Corso</a:t>
-            </a:r>
-            <a:endParaRPr lang="en-US" sz="700" dirty="0"/>
-          </a:p>
-        </p:txBody>
-      </p:sp>
-      <p:sp>
-        <p:nvSpPr>
-          <p:cNvPr id="45" name="Shape 43"/>
-          <p:cNvSpPr/>
-          <p:nvPr/>
-        </p:nvSpPr>
-        <p:spPr>
-          <a:xfrm>
-            <a:off x="1828800" y="2852928"/>
-            <a:ext cx="7132320" cy="256032"/>
-          </a:xfrm>
-          <a:prstGeom prst="rect">
-            <a:avLst/>
-          </a:prstGeom>
-          <a:solidFill>
-            <a:srgbClr val="111111"/>
-          </a:solidFill>
-          <a:ln/>
-        </p:spPr>
-      </p:sp>
-      <p:sp>
-        <p:nvSpPr>
-          <p:cNvPr id="46" name="Text 44"/>
-          <p:cNvSpPr/>
-          <p:nvPr/>
-        </p:nvSpPr>
-        <p:spPr>
-          <a:xfrm>
-            <a:off x="1920240" y="2852928"/>
-            <a:ext cx="6949440" cy="256032"/>
-          </a:xfrm>
-          <a:prstGeom prst="rect">
-            <a:avLst/>
-          </a:prstGeom>
-          <a:noFill/>
-          <a:ln/>
-        </p:spPr>
-        <p:txBody>
-          <a:bodyPr wrap="square" lIns="0" tIns="0" rIns="0" bIns="0" rtlCol="0" anchor="ctr"/>
-          <a:lstStyle/>
-          <a:p>
-            <a:pPr indent="0" marL="0">
-              <a:buNone/>
-            </a:pPr>
-            <a:r>
-              <a:rPr lang="en-US" sz="700" dirty="0">
-                <a:solidFill>
-                  <a:srgbClr val="CCCCCC"/>
-                </a:solidFill>
-                <a:latin typeface="Courier New" pitchFamily="34" charset="0"/>
-                <a:ea typeface="Courier New" pitchFamily="34" charset="-122"/>
-                <a:cs typeface="Courier New" pitchFamily="34" charset="-120"/>
-              </a:rPr>
-              <a:t>URG_040    Latteria Bianchi      Media           Anton             OK                Schedulata</a:t>
-            </a:r>
-            <a:endParaRPr lang="en-US" sz="700" dirty="0"/>
-          </a:p>
-        </p:txBody>
-      </p:sp>
-      <p:sp>
-        <p:nvSpPr>
-          <p:cNvPr id="47" name="Shape 45"/>
-          <p:cNvSpPr/>
-          <p:nvPr/>
-        </p:nvSpPr>
-        <p:spPr>
-          <a:xfrm>
-            <a:off x="1828800" y="3127248"/>
-            <a:ext cx="7132320" cy="256032"/>
-          </a:xfrm>
-          <a:prstGeom prst="rect">
-            <a:avLst/>
-          </a:prstGeom>
-          <a:solidFill>
-            <a:srgbClr val="1A1A1A"/>
-          </a:solidFill>
-          <a:ln/>
-        </p:spPr>
-      </p:sp>
-      <p:sp>
-        <p:nvSpPr>
-          <p:cNvPr id="48" name="Text 46"/>
-          <p:cNvSpPr/>
-          <p:nvPr/>
-        </p:nvSpPr>
-        <p:spPr>
-          <a:xfrm>
-            <a:off x="1920240" y="3127248"/>
-            <a:ext cx="6949440" cy="256032"/>
-          </a:xfrm>
-          <a:prstGeom prst="rect">
-            <a:avLst/>
-          </a:prstGeom>
-          <a:noFill/>
-          <a:ln/>
-        </p:spPr>
-        <p:txBody>
-          <a:bodyPr wrap="square" lIns="0" tIns="0" rIns="0" bIns="0" rtlCol="0" anchor="ctr"/>
-          <a:lstStyle/>
-          <a:p>
-            <a:pPr indent="0" marL="0">
-              <a:buNone/>
-            </a:pPr>
-            <a:r>
-              <a:rPr lang="en-US" sz="700" dirty="0">
-                <a:solidFill>
-                  <a:srgbClr val="CCCCCC"/>
-                </a:solidFill>
-                <a:latin typeface="Courier New" pitchFamily="34" charset="0"/>
-                <a:ea typeface="Courier New" pitchFamily="34" charset="-122"/>
-                <a:cs typeface="Courier New" pitchFamily="34" charset="-120"/>
-              </a:rPr>
-              <a:t>URG_039    Az. Neri                Bassa           Fabio             OK                Aperta</a:t>
-            </a:r>
-            <a:endParaRPr lang="en-US" sz="700" dirty="0"/>
-          </a:p>
-        </p:txBody>
-      </p:sp>
-      <p:sp>
-        <p:nvSpPr>
-          <p:cNvPr id="49" name="Shape 47"/>
-          <p:cNvSpPr/>
-          <p:nvPr/>
-        </p:nvSpPr>
-        <p:spPr>
-          <a:xfrm>
-            <a:off x="1828800" y="3401568"/>
-            <a:ext cx="7132320" cy="256032"/>
-          </a:xfrm>
-          <a:prstGeom prst="rect">
-            <a:avLst/>
-          </a:prstGeom>
-          <a:solidFill>
-            <a:srgbClr val="111111"/>
-          </a:solidFill>
-          <a:ln/>
-        </p:spPr>
-      </p:sp>
-      <p:sp>
-        <p:nvSpPr>
-          <p:cNvPr id="50" name="Text 48"/>
-          <p:cNvSpPr/>
-          <p:nvPr/>
-        </p:nvSpPr>
-        <p:spPr>
-          <a:xfrm>
-            <a:off x="1920240" y="3401568"/>
-            <a:ext cx="6949440" cy="256032"/>
-          </a:xfrm>
-          <a:prstGeom prst="rect">
-            <a:avLst/>
-          </a:prstGeom>
-          <a:noFill/>
-          <a:ln/>
-        </p:spPr>
-        <p:txBody>
-          <a:bodyPr wrap="square" lIns="0" tIns="0" rIns="0" bIns="0" rtlCol="0" anchor="ctr"/>
-          <a:lstStyle/>
-          <a:p>
-            <a:pPr indent="0" marL="0">
-              <a:buNone/>
-            </a:pPr>
-            <a:r>
-              <a:rPr lang="en-US" sz="700" dirty="0">
-                <a:solidFill>
-                  <a:srgbClr val="CCCCCC"/>
-                </a:solidFill>
-                <a:latin typeface="Courier New" pitchFamily="34" charset="0"/>
-                <a:ea typeface="Courier New" pitchFamily="34" charset="-122"/>
-                <a:cs typeface="Courier New" pitchFamily="34" charset="-120"/>
-              </a:rPr>
-              <a:t>URG_038    Stalla Gialli           Alta            Giuseppe         CRITICAL       Assegnata</a:t>
-            </a:r>
-            <a:endParaRPr lang="en-US" sz="700" dirty="0"/>
-          </a:p>
-        </p:txBody>
-      </p:sp>
-      <p:sp>
-        <p:nvSpPr>
-          <p:cNvPr id="51" name="Shape 49"/>
-          <p:cNvSpPr/>
-          <p:nvPr/>
-        </p:nvSpPr>
-        <p:spPr>
-          <a:xfrm>
-            <a:off x="5303520" y="3749040"/>
-            <a:ext cx="3657600" cy="1554480"/>
-          </a:xfrm>
-          <a:prstGeom prst="rect">
-            <a:avLst/>
-          </a:prstGeom>
-          <a:solidFill>
-            <a:srgbClr val="222222"/>
-          </a:solidFill>
-          <a:ln/>
-        </p:spPr>
-      </p:sp>
-      <p:sp>
-        <p:nvSpPr>
-          <p:cNvPr id="52" name="Text 50"/>
-          <p:cNvSpPr/>
-          <p:nvPr/>
-        </p:nvSpPr>
-        <p:spPr>
-          <a:xfrm>
-            <a:off x="5394960" y="3794760"/>
-            <a:ext cx="3474720" cy="182880"/>
-          </a:xfrm>
-          <a:prstGeom prst="rect">
-            <a:avLst/>
-          </a:prstGeom>
-          <a:noFill/>
-          <a:ln/>
-        </p:spPr>
-        <p:txBody>
-          <a:bodyPr wrap="square" lIns="0" tIns="0" rIns="0" bIns="0" rtlCol="0" anchor="ctr"/>
-          <a:lstStyle/>
-          <a:p>
-            <a:pPr indent="0" marL="0">
-              <a:buNone/>
-            </a:pPr>
-            <a:r>
-              <a:rPr lang="en-US" sz="700" b="1" dirty="0">
-                <a:solidFill>
-                  <a:srgbClr val="CCCCCC"/>
-                </a:solidFill>
-                <a:latin typeface="Arial" pitchFamily="34" charset="0"/>
-                <a:ea typeface="Arial" pitchFamily="34" charset="-122"/>
-                <a:cs typeface="Arial" pitchFamily="34" charset="-120"/>
-              </a:rPr>
-              <a:t>Urgenze / Settimana</a:t>
-            </a:r>
-            <a:endParaRPr lang="en-US" sz="700" dirty="0"/>
-          </a:p>
-        </p:txBody>
-      </p:sp>
-      <p:sp>
-        <p:nvSpPr>
-          <p:cNvPr id="53" name="Shape 51"/>
-          <p:cNvSpPr/>
-          <p:nvPr/>
-        </p:nvSpPr>
-        <p:spPr>
-          <a:xfrm>
-            <a:off x="5577840" y="4700016"/>
-            <a:ext cx="274320" cy="329184"/>
-          </a:xfrm>
-          <a:prstGeom prst="rect">
-            <a:avLst/>
-          </a:prstGeom>
-          <a:solidFill>
-            <a:srgbClr val="3B7EF7"/>
-          </a:solidFill>
-          <a:ln/>
-        </p:spPr>
-      </p:sp>
-      <p:sp>
-        <p:nvSpPr>
-          <p:cNvPr id="54" name="Text 52"/>
-          <p:cNvSpPr/>
-          <p:nvPr/>
-        </p:nvSpPr>
-        <p:spPr>
-          <a:xfrm>
-            <a:off x="5577840" y="5074920"/>
-            <a:ext cx="274320" cy="137160"/>
-          </a:xfrm>
-          <a:prstGeom prst="rect">
-            <a:avLst/>
-          </a:prstGeom>
-          <a:noFill/>
-          <a:ln/>
-        </p:spPr>
-        <p:txBody>
-          <a:bodyPr wrap="square" lIns="0" tIns="0" rIns="0" bIns="0" rtlCol="0" anchor="ctr"/>
-          <a:lstStyle/>
-          <a:p>
-            <a:pPr algn="ctr" indent="0" marL="0">
-              <a:buNone/>
-            </a:pPr>
-            <a:r>
-              <a:rPr lang="en-US" sz="600" dirty="0">
-                <a:solidFill>
-                  <a:srgbClr val="888888"/>
-                </a:solidFill>
-                <a:latin typeface="Arial" pitchFamily="34" charset="0"/>
-                <a:ea typeface="Arial" pitchFamily="34" charset="-122"/>
-                <a:cs typeface="Arial" pitchFamily="34" charset="-120"/>
-              </a:rPr>
-              <a:t>L</a:t>
-            </a:r>
-            <a:endParaRPr lang="en-US" sz="600" dirty="0"/>
-          </a:p>
-        </p:txBody>
-      </p:sp>
-      <p:sp>
-        <p:nvSpPr>
-          <p:cNvPr id="55" name="Shape 53"/>
-          <p:cNvSpPr/>
-          <p:nvPr/>
-        </p:nvSpPr>
-        <p:spPr>
-          <a:xfrm>
-            <a:off x="6016752" y="4453128"/>
-            <a:ext cx="274320" cy="576072"/>
-          </a:xfrm>
-          <a:prstGeom prst="rect">
-            <a:avLst/>
-          </a:prstGeom>
-          <a:solidFill>
-            <a:srgbClr val="3B7EF7"/>
-          </a:solidFill>
-          <a:ln/>
-        </p:spPr>
-      </p:sp>
-      <p:sp>
-        <p:nvSpPr>
-          <p:cNvPr id="56" name="Text 54"/>
-          <p:cNvSpPr/>
-          <p:nvPr/>
-        </p:nvSpPr>
-        <p:spPr>
-          <a:xfrm>
-            <a:off x="6016752" y="5074920"/>
-            <a:ext cx="274320" cy="137160"/>
-          </a:xfrm>
-          <a:prstGeom prst="rect">
-            <a:avLst/>
-          </a:prstGeom>
-          <a:noFill/>
-          <a:ln/>
-        </p:spPr>
-        <p:txBody>
-          <a:bodyPr wrap="square" lIns="0" tIns="0" rIns="0" bIns="0" rtlCol="0" anchor="ctr"/>
-          <a:lstStyle/>
-          <a:p>
-            <a:pPr algn="ctr" indent="0" marL="0">
-              <a:buNone/>
-            </a:pPr>
-            <a:r>
-              <a:rPr lang="en-US" sz="600" dirty="0">
-                <a:solidFill>
-                  <a:srgbClr val="888888"/>
-                </a:solidFill>
-                <a:latin typeface="Arial" pitchFamily="34" charset="0"/>
-                <a:ea typeface="Arial" pitchFamily="34" charset="-122"/>
-                <a:cs typeface="Arial" pitchFamily="34" charset="-120"/>
-              </a:rPr>
-              <a:t>M</a:t>
-            </a:r>
-            <a:endParaRPr lang="en-US" sz="600" dirty="0"/>
-          </a:p>
-        </p:txBody>
-      </p:sp>
-      <p:sp>
-        <p:nvSpPr>
-          <p:cNvPr id="57" name="Shape 55"/>
-          <p:cNvSpPr/>
-          <p:nvPr/>
-        </p:nvSpPr>
-        <p:spPr>
-          <a:xfrm>
-            <a:off x="6455664" y="4617720"/>
-            <a:ext cx="274320" cy="411480"/>
-          </a:xfrm>
-          <a:prstGeom prst="rect">
-            <a:avLst/>
-          </a:prstGeom>
-          <a:solidFill>
-            <a:srgbClr val="3B7EF7"/>
-          </a:solidFill>
-          <a:ln/>
-        </p:spPr>
-      </p:sp>
-      <p:sp>
-        <p:nvSpPr>
-          <p:cNvPr id="58" name="Text 56"/>
-          <p:cNvSpPr/>
-          <p:nvPr/>
-        </p:nvSpPr>
-        <p:spPr>
-          <a:xfrm>
-            <a:off x="6455664" y="5074920"/>
-            <a:ext cx="274320" cy="137160"/>
-          </a:xfrm>
-          <a:prstGeom prst="rect">
-            <a:avLst/>
-          </a:prstGeom>
-          <a:noFill/>
-          <a:ln/>
-        </p:spPr>
-        <p:txBody>
-          <a:bodyPr wrap="square" lIns="0" tIns="0" rIns="0" bIns="0" rtlCol="0" anchor="ctr"/>
-          <a:lstStyle/>
-          <a:p>
-            <a:pPr algn="ctr" indent="0" marL="0">
-              <a:buNone/>
-            </a:pPr>
-            <a:r>
-              <a:rPr lang="en-US" sz="600" dirty="0">
-                <a:solidFill>
-                  <a:srgbClr val="888888"/>
-                </a:solidFill>
-                <a:latin typeface="Arial" pitchFamily="34" charset="0"/>
-                <a:ea typeface="Arial" pitchFamily="34" charset="-122"/>
-                <a:cs typeface="Arial" pitchFamily="34" charset="-120"/>
-              </a:rPr>
-              <a:t>M</a:t>
-            </a:r>
-            <a:endParaRPr lang="en-US" sz="600" dirty="0"/>
-          </a:p>
-        </p:txBody>
-      </p:sp>
-      <p:sp>
-        <p:nvSpPr>
-          <p:cNvPr id="59" name="Shape 57"/>
-          <p:cNvSpPr/>
-          <p:nvPr/>
-        </p:nvSpPr>
-        <p:spPr>
-          <a:xfrm>
-            <a:off x="6894576" y="4288536"/>
-            <a:ext cx="274320" cy="740664"/>
-          </a:xfrm>
-          <a:prstGeom prst="rect">
-            <a:avLst/>
-          </a:prstGeom>
-          <a:solidFill>
-            <a:srgbClr val="3B7EF7"/>
-          </a:solidFill>
-          <a:ln/>
-        </p:spPr>
-      </p:sp>
-      <p:sp>
-        <p:nvSpPr>
-          <p:cNvPr id="60" name="Text 58"/>
-          <p:cNvSpPr/>
-          <p:nvPr/>
-        </p:nvSpPr>
-        <p:spPr>
-          <a:xfrm>
-            <a:off x="6894576" y="5074920"/>
-            <a:ext cx="274320" cy="137160"/>
-          </a:xfrm>
-          <a:prstGeom prst="rect">
-            <a:avLst/>
-          </a:prstGeom>
-          <a:noFill/>
-          <a:ln/>
-        </p:spPr>
-        <p:txBody>
-          <a:bodyPr wrap="square" lIns="0" tIns="0" rIns="0" bIns="0" rtlCol="0" anchor="ctr"/>
-          <a:lstStyle/>
-          <a:p>
-            <a:pPr algn="ctr" indent="0" marL="0">
-              <a:buNone/>
-            </a:pPr>
-            <a:r>
-              <a:rPr lang="en-US" sz="600" dirty="0">
-                <a:solidFill>
-                  <a:srgbClr val="888888"/>
-                </a:solidFill>
-                <a:latin typeface="Arial" pitchFamily="34" charset="0"/>
-                <a:ea typeface="Arial" pitchFamily="34" charset="-122"/>
-                <a:cs typeface="Arial" pitchFamily="34" charset="-120"/>
-              </a:rPr>
-              <a:t>G</a:t>
-            </a:r>
-            <a:endParaRPr lang="en-US" sz="600" dirty="0"/>
-          </a:p>
-        </p:txBody>
-      </p:sp>
-      <p:sp>
-        <p:nvSpPr>
-          <p:cNvPr id="61" name="Shape 59"/>
-          <p:cNvSpPr/>
-          <p:nvPr/>
-        </p:nvSpPr>
-        <p:spPr>
-          <a:xfrm>
-            <a:off x="7333488" y="4535424"/>
-            <a:ext cx="274320" cy="493776"/>
-          </a:xfrm>
-          <a:prstGeom prst="rect">
-            <a:avLst/>
-          </a:prstGeom>
-          <a:solidFill>
-            <a:srgbClr val="3B7EF7"/>
-          </a:solidFill>
-          <a:ln/>
-        </p:spPr>
-      </p:sp>
-      <p:sp>
-        <p:nvSpPr>
-          <p:cNvPr id="62" name="Text 60"/>
-          <p:cNvSpPr/>
-          <p:nvPr/>
-        </p:nvSpPr>
-        <p:spPr>
-          <a:xfrm>
-            <a:off x="7333488" y="5074920"/>
-            <a:ext cx="274320" cy="137160"/>
-          </a:xfrm>
-          <a:prstGeom prst="rect">
-            <a:avLst/>
-          </a:prstGeom>
-          <a:noFill/>
-          <a:ln/>
-        </p:spPr>
-        <p:txBody>
-          <a:bodyPr wrap="square" lIns="0" tIns="0" rIns="0" bIns="0" rtlCol="0" anchor="ctr"/>
-          <a:lstStyle/>
-          <a:p>
-            <a:pPr algn="ctr" indent="0" marL="0">
-              <a:buNone/>
-            </a:pPr>
-            <a:r>
-              <a:rPr lang="en-US" sz="600" dirty="0">
-                <a:solidFill>
-                  <a:srgbClr val="888888"/>
-                </a:solidFill>
-                <a:latin typeface="Arial" pitchFamily="34" charset="0"/>
-                <a:ea typeface="Arial" pitchFamily="34" charset="-122"/>
-                <a:cs typeface="Arial" pitchFamily="34" charset="-120"/>
-              </a:rPr>
-              <a:t>V</a:t>
-            </a:r>
-            <a:endParaRPr lang="en-US" sz="600" dirty="0"/>
-          </a:p>
-        </p:txBody>
-      </p:sp>
-      <p:sp>
-        <p:nvSpPr>
-          <p:cNvPr id="63" name="Shape 61"/>
-          <p:cNvSpPr/>
-          <p:nvPr/>
-        </p:nvSpPr>
-        <p:spPr>
-          <a:xfrm>
-            <a:off x="7772400" y="4370832"/>
-            <a:ext cx="274320" cy="658368"/>
-          </a:xfrm>
-          <a:prstGeom prst="rect">
-            <a:avLst/>
-          </a:prstGeom>
-          <a:solidFill>
-            <a:srgbClr val="3B7EF7"/>
-          </a:solidFill>
-          <a:ln/>
-        </p:spPr>
-      </p:sp>
-      <p:sp>
-        <p:nvSpPr>
-          <p:cNvPr id="64" name="Text 62"/>
-          <p:cNvSpPr/>
-          <p:nvPr/>
-        </p:nvSpPr>
-        <p:spPr>
-          <a:xfrm>
-            <a:off x="7772400" y="5074920"/>
-            <a:ext cx="274320" cy="137160"/>
-          </a:xfrm>
-          <a:prstGeom prst="rect">
-            <a:avLst/>
-          </a:prstGeom>
-          <a:noFill/>
-          <a:ln/>
-        </p:spPr>
-        <p:txBody>
-          <a:bodyPr wrap="square" lIns="0" tIns="0" rIns="0" bIns="0" rtlCol="0" anchor="ctr"/>
-          <a:lstStyle/>
-          <a:p>
-            <a:pPr algn="ctr" indent="0" marL="0">
-              <a:buNone/>
-            </a:pPr>
-            <a:r>
-              <a:rPr lang="en-US" sz="600" dirty="0">
-                <a:solidFill>
-                  <a:srgbClr val="888888"/>
-                </a:solidFill>
-                <a:latin typeface="Arial" pitchFamily="34" charset="0"/>
-                <a:ea typeface="Arial" pitchFamily="34" charset="-122"/>
-                <a:cs typeface="Arial" pitchFamily="34" charset="-120"/>
-              </a:rPr>
-              <a:t>S</a:t>
-            </a:r>
-            <a:endParaRPr lang="en-US" sz="600" dirty="0"/>
-          </a:p>
-        </p:txBody>
-      </p:sp>
-      <p:sp>
-        <p:nvSpPr>
-          <p:cNvPr id="65" name="Shape 63"/>
-          <p:cNvSpPr/>
-          <p:nvPr/>
-        </p:nvSpPr>
-        <p:spPr>
-          <a:xfrm>
-            <a:off x="8211312" y="4206240"/>
-            <a:ext cx="274320" cy="822960"/>
-          </a:xfrm>
-          <a:prstGeom prst="rect">
-            <a:avLst/>
-          </a:prstGeom>
-          <a:solidFill>
-            <a:srgbClr val="C30A14"/>
-          </a:solidFill>
-          <a:ln/>
-        </p:spPr>
-      </p:sp>
-      <p:sp>
-        <p:nvSpPr>
-          <p:cNvPr id="66" name="Text 64"/>
-          <p:cNvSpPr/>
-          <p:nvPr/>
-        </p:nvSpPr>
-        <p:spPr>
-          <a:xfrm>
-            <a:off x="8211312" y="5074920"/>
-            <a:ext cx="274320" cy="137160"/>
-          </a:xfrm>
-          <a:prstGeom prst="rect">
-            <a:avLst/>
-          </a:prstGeom>
-          <a:noFill/>
-          <a:ln/>
-        </p:spPr>
-        <p:txBody>
-          <a:bodyPr wrap="square" lIns="0" tIns="0" rIns="0" bIns="0" rtlCol="0" anchor="ctr"/>
-          <a:lstStyle/>
-          <a:p>
-            <a:pPr algn="ctr" indent="0" marL="0">
-              <a:buNone/>
-            </a:pPr>
-            <a:r>
-              <a:rPr lang="en-US" sz="600" dirty="0">
-                <a:solidFill>
-                  <a:srgbClr val="888888"/>
-                </a:solidFill>
-                <a:latin typeface="Arial" pitchFamily="34" charset="0"/>
-                <a:ea typeface="Arial" pitchFamily="34" charset="-122"/>
-                <a:cs typeface="Arial" pitchFamily="34" charset="-120"/>
-              </a:rPr>
-              <a:t>D</a:t>
-            </a:r>
-            <a:endParaRPr lang="en-US" sz="600" dirty="0"/>
-          </a:p>
-        </p:txBody>
-      </p:sp>
-      <p:sp>
-        <p:nvSpPr>
-          <p:cNvPr id="67" name="Shape 65"/>
-          <p:cNvSpPr/>
-          <p:nvPr/>
-        </p:nvSpPr>
-        <p:spPr>
-          <a:xfrm>
-            <a:off x="1828800" y="3749040"/>
-            <a:ext cx="3291840" cy="1554480"/>
-          </a:xfrm>
-          <a:prstGeom prst="rect">
-            <a:avLst/>
-          </a:prstGeom>
-          <a:solidFill>
-            <a:srgbClr val="1B2631"/>
-          </a:solidFill>
-          <a:ln/>
-        </p:spPr>
-      </p:sp>
-      <p:sp>
-        <p:nvSpPr>
-          <p:cNvPr id="68" name="Text 66"/>
-          <p:cNvSpPr/>
-          <p:nvPr/>
-        </p:nvSpPr>
-        <p:spPr>
-          <a:xfrm>
-            <a:off x="1920240" y="3794760"/>
-            <a:ext cx="3108960" cy="182880"/>
-          </a:xfrm>
-          <a:prstGeom prst="rect">
-            <a:avLst/>
-          </a:prstGeom>
-          <a:noFill/>
-          <a:ln/>
-        </p:spPr>
-        <p:txBody>
-          <a:bodyPr wrap="square" lIns="0" tIns="0" rIns="0" bIns="0" rtlCol="0" anchor="ctr"/>
-          <a:lstStyle/>
-          <a:p>
-            <a:pPr indent="0" marL="0">
-              <a:buNone/>
-            </a:pPr>
-            <a:r>
-              <a:rPr lang="en-US" sz="700" b="1" dirty="0">
-                <a:solidFill>
-                  <a:srgbClr val="CCCCCC"/>
-                </a:solidFill>
-                <a:latin typeface="Arial" pitchFamily="34" charset="0"/>
-                <a:ea typeface="Arial" pitchFamily="34" charset="-122"/>
-                <a:cs typeface="Arial" pitchFamily="34" charset="-120"/>
-              </a:rPr>
-              <a:t>Mappa Operativa</a:t>
-            </a:r>
-            <a:endParaRPr lang="en-US" sz="700" dirty="0"/>
-          </a:p>
-        </p:txBody>
-      </p:sp>
-      <p:sp>
-        <p:nvSpPr>
-          <p:cNvPr id="69" name="Shape 67"/>
-          <p:cNvSpPr/>
-          <p:nvPr/>
-        </p:nvSpPr>
-        <p:spPr>
-          <a:xfrm>
-            <a:off x="2560320" y="3931920"/>
-            <a:ext cx="109728" cy="109728"/>
-          </a:xfrm>
-          <a:prstGeom prst="ellipse">
-            <a:avLst/>
-          </a:prstGeom>
-          <a:solidFill>
-            <a:srgbClr val="C30A14"/>
-          </a:solidFill>
-          <a:ln/>
-        </p:spPr>
-      </p:sp>
-      <p:sp>
-        <p:nvSpPr>
-          <p:cNvPr id="70" name="Shape 68"/>
-          <p:cNvSpPr/>
-          <p:nvPr/>
-        </p:nvSpPr>
-        <p:spPr>
-          <a:xfrm>
-            <a:off x="3017520" y="3657600"/>
-            <a:ext cx="109728" cy="109728"/>
-          </a:xfrm>
-          <a:prstGeom prst="ellipse">
-            <a:avLst/>
-          </a:prstGeom>
-          <a:solidFill>
-            <a:srgbClr val="3B7EF7"/>
-          </a:solidFill>
-          <a:ln/>
-        </p:spPr>
-      </p:sp>
-      <p:sp>
-        <p:nvSpPr>
-          <p:cNvPr id="71" name="Shape 69"/>
-          <p:cNvSpPr/>
-          <p:nvPr/>
-        </p:nvSpPr>
-        <p:spPr>
-          <a:xfrm>
-            <a:off x="3749040" y="3749040"/>
-            <a:ext cx="109728" cy="109728"/>
-          </a:xfrm>
-          <a:prstGeom prst="ellipse">
-            <a:avLst/>
-          </a:prstGeom>
-          <a:solidFill>
-            <a:srgbClr val="34D058"/>
-          </a:solidFill>
-          <a:ln/>
-        </p:spPr>
-      </p:sp>
-      <p:sp>
-        <p:nvSpPr>
-          <p:cNvPr id="72" name="Shape 70"/>
-          <p:cNvSpPr/>
-          <p:nvPr/>
-        </p:nvSpPr>
-        <p:spPr>
-          <a:xfrm>
-            <a:off x="2834640" y="4206240"/>
-            <a:ext cx="109728" cy="109728"/>
-          </a:xfrm>
-          <a:prstGeom prst="ellipse">
-            <a:avLst/>
-          </a:prstGeom>
-          <a:solidFill>
-            <a:srgbClr val="F7B731"/>
-          </a:solidFill>
-          <a:ln/>
-        </p:spPr>
-      </p:sp>
-      <p:sp>
-        <p:nvSpPr>
-          <p:cNvPr id="73" name="Shape 71"/>
-          <p:cNvSpPr/>
-          <p:nvPr/>
-        </p:nvSpPr>
-        <p:spPr>
-          <a:xfrm>
-            <a:off x="3474720" y="4114800"/>
-            <a:ext cx="109728" cy="109728"/>
-          </a:xfrm>
-          <a:prstGeom prst="ellipse">
-            <a:avLst/>
-          </a:prstGeom>
-          <a:solidFill>
-            <a:srgbClr val="C30A14"/>
-          </a:solidFill>
-          <a:ln/>
-        </p:spPr>
-      </p:sp>
-      <p:sp>
-        <p:nvSpPr>
-          <p:cNvPr id="74" name="Shape 72"/>
-          <p:cNvSpPr/>
-          <p:nvPr/>
-        </p:nvSpPr>
-        <p:spPr>
-          <a:xfrm>
-            <a:off x="4114800" y="3840480"/>
-            <a:ext cx="109728" cy="109728"/>
-          </a:xfrm>
-          <a:prstGeom prst="ellipse">
-            <a:avLst/>
-          </a:prstGeom>
-          <a:solidFill>
-            <a:srgbClr val="3B7EF7"/>
-          </a:solidFill>
-          <a:ln/>
-        </p:spPr>
-      </p:sp>
-      <p:sp>
-        <p:nvSpPr>
-          <p:cNvPr id="75" name="Shape 73"/>
-          <p:cNvSpPr/>
-          <p:nvPr/>
-        </p:nvSpPr>
-        <p:spPr>
-          <a:xfrm>
-            <a:off x="2377440" y="3749040"/>
-            <a:ext cx="109728" cy="109728"/>
-          </a:xfrm>
-          <a:prstGeom prst="ellipse">
-            <a:avLst/>
-          </a:prstGeom>
-          <a:solidFill>
-            <a:srgbClr val="34D058"/>
-          </a:solidFill>
-          <a:ln/>
-        </p:spPr>
-      </p:sp>
-      <p:sp>
-        <p:nvSpPr>
-          <p:cNvPr id="76" name="Shape 74"/>
-          <p:cNvSpPr/>
-          <p:nvPr/>
-        </p:nvSpPr>
-        <p:spPr>
-          <a:xfrm>
-            <a:off x="3291840" y="4297680"/>
-            <a:ext cx="109728" cy="109728"/>
-          </a:xfrm>
-          <a:prstGeom prst="ellipse">
-            <a:avLst/>
-          </a:prstGeom>
-          <a:solidFill>
-            <a:srgbClr val="17C0EB"/>
-          </a:solidFill>
-          <a:ln/>
-        </p:spPr>
-      </p:sp>
+            <a:ext cx="8595360" cy="5733288"/>
+          </a:xfrm>
+          <a:prstGeom prst="rect">
+            <a:avLst/>
+          </a:prstGeom>
+        </p:spPr>
+      </p:pic>
     </p:spTree>
   </p:cSld>
   <p:clrMapOvr>
@@ -11488,1212 +7507,54 @@
           </a:p>
         </p:txBody>
       </p:sp>
-      <p:sp>
-        <p:nvSpPr>
-          <p:cNvPr id="19" name="Shape 17"/>
-          <p:cNvSpPr/>
-          <p:nvPr/>
-        </p:nvSpPr>
+      <p:pic>
+        <p:nvPicPr>
+          <p:cNvPr id="19" name="Image 0" descr="/sessions/brave-peaceful-lovelace/mockups/mobile_home.png">    </p:cNvPr>
+          <p:cNvPicPr>
+            <a:picLocks noChangeAspect="1"/>
+          </p:cNvPicPr>
+          <p:nvPr/>
+        </p:nvPicPr>
+        <p:blipFill>
+          <a:blip r:embed="rId1"/>
+          <a:stretch>
+            <a:fillRect/>
+          </a:stretch>
+        </p:blipFill>
         <p:spPr>
           <a:xfrm>
             <a:off x="5029200" y="274320"/>
-            <a:ext cx="2377440" cy="4572000"/>
-          </a:xfrm>
-          <a:prstGeom prst="roundRect">
-            <a:avLst>
-              <a:gd name="adj" fmla="val 5769"/>
-            </a:avLst>
-          </a:prstGeom>
-          <a:solidFill>
-            <a:srgbClr val="1A1A1A"/>
-          </a:solidFill>
-          <a:ln w="19050">
-            <a:solidFill>
-              <a:srgbClr val="444444"/>
-            </a:solidFill>
-            <a:prstDash val="solid"/>
-          </a:ln>
-          <a:effectLst>
-            <a:outerShdw sx="100000" sy="100000" kx="0" ky="0" algn="bl" rotWithShape="0" blurRad="76200" dist="25400" dir="8100000">
-              <a:srgbClr val="000000">
-                <a:alpha val="40000"/>
-              </a:srgbClr>
-            </a:outerShdw>
-          </a:effectLst>
-        </p:spPr>
-      </p:sp>
-      <p:sp>
-        <p:nvSpPr>
-          <p:cNvPr id="20" name="Shape 18"/>
-          <p:cNvSpPr/>
-          <p:nvPr/>
-        </p:nvSpPr>
-        <p:spPr>
-          <a:xfrm>
-            <a:off x="5074920" y="320040"/>
-            <a:ext cx="2286000" cy="182880"/>
-          </a:xfrm>
-          <a:prstGeom prst="rect">
-            <a:avLst/>
-          </a:prstGeom>
-          <a:solidFill>
-            <a:srgbClr val="111111"/>
-          </a:solidFill>
-          <a:ln/>
-        </p:spPr>
-      </p:sp>
-      <p:sp>
-        <p:nvSpPr>
-          <p:cNvPr id="21" name="Text 19"/>
-          <p:cNvSpPr/>
-          <p:nvPr/>
-        </p:nvSpPr>
-        <p:spPr>
-          <a:xfrm>
-            <a:off x="5120640" y="320040"/>
-            <a:ext cx="457200" cy="182880"/>
-          </a:xfrm>
-          <a:prstGeom prst="rect">
-            <a:avLst/>
-          </a:prstGeom>
-          <a:noFill/>
-          <a:ln/>
-        </p:spPr>
-        <p:txBody>
-          <a:bodyPr wrap="square" rtlCol="0" anchor="ctr"/>
-          <a:lstStyle/>
-          <a:p>
-            <a:pPr indent="0" marL="0">
-              <a:buNone/>
-            </a:pPr>
-            <a:r>
-              <a:rPr lang="en-US" sz="700" b="1" dirty="0">
-                <a:solidFill>
-                  <a:srgbClr val="FFFFFF"/>
-                </a:solidFill>
-                <a:latin typeface="Arial" pitchFamily="34" charset="0"/>
-                <a:ea typeface="Arial" pitchFamily="34" charset="-122"/>
-                <a:cs typeface="Arial" pitchFamily="34" charset="-120"/>
-              </a:rPr>
-              <a:t>9:41</a:t>
-            </a:r>
-            <a:endParaRPr lang="en-US" sz="700" dirty="0"/>
-          </a:p>
-        </p:txBody>
-      </p:sp>
-      <p:sp>
-        <p:nvSpPr>
-          <p:cNvPr id="22" name="Shape 20"/>
-          <p:cNvSpPr/>
-          <p:nvPr/>
-        </p:nvSpPr>
-        <p:spPr>
-          <a:xfrm>
-            <a:off x="5074920" y="502920"/>
-            <a:ext cx="2286000" cy="4069080"/>
-          </a:xfrm>
-          <a:prstGeom prst="rect">
-            <a:avLst/>
-          </a:prstGeom>
-          <a:solidFill>
-            <a:srgbClr val="000000"/>
-          </a:solidFill>
-          <a:ln/>
-        </p:spPr>
-      </p:sp>
-      <p:sp>
-        <p:nvSpPr>
-          <p:cNvPr id="23" name="Shape 21"/>
-          <p:cNvSpPr/>
-          <p:nvPr/>
-        </p:nvSpPr>
-        <p:spPr>
-          <a:xfrm>
-            <a:off x="5852160" y="4663440"/>
-            <a:ext cx="731520" cy="36576"/>
-          </a:xfrm>
-          <a:prstGeom prst="roundRect">
-            <a:avLst>
-              <a:gd name="adj" fmla="val 50000"/>
-            </a:avLst>
-          </a:prstGeom>
-          <a:solidFill>
-            <a:srgbClr val="444444"/>
-          </a:solidFill>
-          <a:ln/>
-        </p:spPr>
-      </p:sp>
-      <p:sp>
-        <p:nvSpPr>
-          <p:cNvPr id="24" name="Shape 22"/>
-          <p:cNvSpPr/>
-          <p:nvPr/>
-        </p:nvSpPr>
-        <p:spPr>
-          <a:xfrm>
-            <a:off x="5074920" y="502920"/>
-            <a:ext cx="2286000" cy="320040"/>
-          </a:xfrm>
-          <a:prstGeom prst="rect">
-            <a:avLst/>
-          </a:prstGeom>
-          <a:solidFill>
-            <a:srgbClr val="C30A14"/>
-          </a:solidFill>
-          <a:ln/>
-        </p:spPr>
-      </p:sp>
-      <p:sp>
-        <p:nvSpPr>
-          <p:cNvPr id="25" name="Text 23"/>
-          <p:cNvSpPr/>
-          <p:nvPr/>
-        </p:nvSpPr>
-        <p:spPr>
-          <a:xfrm>
-            <a:off x="5166360" y="521208"/>
-            <a:ext cx="2103120" cy="274320"/>
-          </a:xfrm>
-          <a:prstGeom prst="rect">
-            <a:avLst/>
-          </a:prstGeom>
-          <a:noFill/>
-          <a:ln/>
-        </p:spPr>
-        <p:txBody>
-          <a:bodyPr wrap="square" lIns="0" tIns="0" rIns="0" bIns="0" rtlCol="0" anchor="ctr"/>
-          <a:lstStyle/>
-          <a:p>
-            <a:pPr indent="0" marL="0">
-              <a:buNone/>
-            </a:pPr>
-            <a:r>
-              <a:rPr lang="en-US" sz="1000" b="1" dirty="0">
-                <a:solidFill>
-                  <a:srgbClr val="FFFFFF"/>
-                </a:solidFill>
-                <a:latin typeface="Arial" pitchFamily="34" charset="0"/>
-                <a:ea typeface="Arial" pitchFamily="34" charset="-122"/>
-                <a:cs typeface="Arial" pitchFamily="34" charset="-120"/>
-              </a:rPr>
-              <a:t>Syntoniqa</a:t>
-            </a:r>
-            <a:endParaRPr lang="en-US" sz="1000" dirty="0"/>
-          </a:p>
-        </p:txBody>
-      </p:sp>
-      <p:sp>
-        <p:nvSpPr>
-          <p:cNvPr id="26" name="Shape 24"/>
-          <p:cNvSpPr/>
-          <p:nvPr/>
-        </p:nvSpPr>
-        <p:spPr>
-          <a:xfrm>
-            <a:off x="5148072" y="914400"/>
-            <a:ext cx="2139696" cy="457200"/>
-          </a:xfrm>
-          <a:prstGeom prst="rect">
-            <a:avLst/>
-          </a:prstGeom>
-          <a:solidFill>
-            <a:srgbClr val="222222"/>
-          </a:solidFill>
-          <a:ln/>
-        </p:spPr>
-      </p:sp>
-      <p:sp>
-        <p:nvSpPr>
-          <p:cNvPr id="27" name="Shape 25"/>
-          <p:cNvSpPr/>
-          <p:nvPr/>
-        </p:nvSpPr>
-        <p:spPr>
-          <a:xfrm>
-            <a:off x="5148072" y="914400"/>
-            <a:ext cx="36576" cy="457200"/>
-          </a:xfrm>
-          <a:prstGeom prst="rect">
-            <a:avLst/>
-          </a:prstGeom>
-          <a:solidFill>
-            <a:srgbClr val="C30A14"/>
-          </a:solidFill>
-          <a:ln/>
-        </p:spPr>
-      </p:sp>
-      <p:sp>
-        <p:nvSpPr>
-          <p:cNvPr id="28" name="Text 26"/>
-          <p:cNvSpPr/>
-          <p:nvPr/>
-        </p:nvSpPr>
-        <p:spPr>
-          <a:xfrm>
-            <a:off x="5257800" y="941832"/>
-            <a:ext cx="1097280" cy="182880"/>
-          </a:xfrm>
-          <a:prstGeom prst="rect">
-            <a:avLst/>
-          </a:prstGeom>
-          <a:noFill/>
-          <a:ln/>
-        </p:spPr>
-        <p:txBody>
-          <a:bodyPr wrap="square" lIns="0" tIns="0" rIns="0" bIns="0" rtlCol="0" anchor="ctr"/>
-          <a:lstStyle/>
-          <a:p>
-            <a:pPr indent="0" marL="0">
-              <a:buNone/>
-            </a:pPr>
-            <a:r>
-              <a:rPr lang="en-US" sz="800" b="1" dirty="0">
-                <a:solidFill>
-                  <a:srgbClr val="FFFFFF"/>
-                </a:solidFill>
-                <a:latin typeface="Arial" pitchFamily="34" charset="0"/>
-                <a:ea typeface="Arial" pitchFamily="34" charset="-122"/>
-                <a:cs typeface="Arial" pitchFamily="34" charset="-120"/>
-              </a:rPr>
-              <a:t>Urgenze</a:t>
-            </a:r>
-            <a:endParaRPr lang="en-US" sz="800" dirty="0"/>
-          </a:p>
-        </p:txBody>
-      </p:sp>
-      <p:sp>
-        <p:nvSpPr>
-          <p:cNvPr id="29" name="Text 27"/>
-          <p:cNvSpPr/>
-          <p:nvPr/>
-        </p:nvSpPr>
-        <p:spPr>
-          <a:xfrm>
-            <a:off x="5257800" y="1143000"/>
-            <a:ext cx="1097280" cy="182880"/>
-          </a:xfrm>
-          <a:prstGeom prst="rect">
-            <a:avLst/>
-          </a:prstGeom>
-          <a:noFill/>
-          <a:ln/>
-        </p:spPr>
-        <p:txBody>
-          <a:bodyPr wrap="square" lIns="0" tIns="0" rIns="0" bIns="0" rtlCol="0" anchor="ctr"/>
-          <a:lstStyle/>
-          <a:p>
-            <a:pPr indent="0" marL="0">
-              <a:buNone/>
-            </a:pPr>
-            <a:r>
-              <a:rPr lang="en-US" sz="800" dirty="0">
-                <a:solidFill>
-                  <a:srgbClr val="C30A14"/>
-                </a:solidFill>
-                <a:latin typeface="Arial" pitchFamily="34" charset="0"/>
-                <a:ea typeface="Arial" pitchFamily="34" charset="-122"/>
-                <a:cs typeface="Arial" pitchFamily="34" charset="-120"/>
-              </a:rPr>
-              <a:t>3</a:t>
-            </a:r>
-            <a:endParaRPr lang="en-US" sz="800" dirty="0"/>
-          </a:p>
-        </p:txBody>
-      </p:sp>
-      <p:sp>
-        <p:nvSpPr>
-          <p:cNvPr id="30" name="Shape 28"/>
-          <p:cNvSpPr/>
-          <p:nvPr/>
-        </p:nvSpPr>
-        <p:spPr>
-          <a:xfrm>
-            <a:off x="5148072" y="1463040"/>
-            <a:ext cx="2139696" cy="457200"/>
-          </a:xfrm>
-          <a:prstGeom prst="rect">
-            <a:avLst/>
-          </a:prstGeom>
-          <a:solidFill>
-            <a:srgbClr val="222222"/>
-          </a:solidFill>
-          <a:ln/>
-        </p:spPr>
-      </p:sp>
-      <p:sp>
-        <p:nvSpPr>
-          <p:cNvPr id="31" name="Shape 29"/>
-          <p:cNvSpPr/>
-          <p:nvPr/>
-        </p:nvSpPr>
-        <p:spPr>
-          <a:xfrm>
-            <a:off x="5148072" y="1463040"/>
-            <a:ext cx="36576" cy="457200"/>
-          </a:xfrm>
-          <a:prstGeom prst="rect">
-            <a:avLst/>
-          </a:prstGeom>
-          <a:solidFill>
-            <a:srgbClr val="3B7EF7"/>
-          </a:solidFill>
-          <a:ln/>
-        </p:spPr>
-      </p:sp>
-      <p:sp>
-        <p:nvSpPr>
-          <p:cNvPr id="32" name="Text 30"/>
-          <p:cNvSpPr/>
-          <p:nvPr/>
-        </p:nvSpPr>
-        <p:spPr>
-          <a:xfrm>
-            <a:off x="5257800" y="1490472"/>
-            <a:ext cx="1097280" cy="182880"/>
-          </a:xfrm>
-          <a:prstGeom prst="rect">
-            <a:avLst/>
-          </a:prstGeom>
-          <a:noFill/>
-          <a:ln/>
-        </p:spPr>
-        <p:txBody>
-          <a:bodyPr wrap="square" lIns="0" tIns="0" rIns="0" bIns="0" rtlCol="0" anchor="ctr"/>
-          <a:lstStyle/>
-          <a:p>
-            <a:pPr indent="0" marL="0">
-              <a:buNone/>
-            </a:pPr>
-            <a:r>
-              <a:rPr lang="en-US" sz="800" b="1" dirty="0">
-                <a:solidFill>
-                  <a:srgbClr val="FFFFFF"/>
-                </a:solidFill>
-                <a:latin typeface="Arial" pitchFamily="34" charset="0"/>
-                <a:ea typeface="Arial" pitchFamily="34" charset="-122"/>
-                <a:cs typeface="Arial" pitchFamily="34" charset="-120"/>
-              </a:rPr>
-              <a:t>Oggi</a:t>
-            </a:r>
-            <a:endParaRPr lang="en-US" sz="800" dirty="0"/>
-          </a:p>
-        </p:txBody>
-      </p:sp>
-      <p:sp>
-        <p:nvSpPr>
-          <p:cNvPr id="33" name="Text 31"/>
-          <p:cNvSpPr/>
-          <p:nvPr/>
-        </p:nvSpPr>
-        <p:spPr>
-          <a:xfrm>
-            <a:off x="5257800" y="1691640"/>
-            <a:ext cx="1097280" cy="182880"/>
-          </a:xfrm>
-          <a:prstGeom prst="rect">
-            <a:avLst/>
-          </a:prstGeom>
-          <a:noFill/>
-          <a:ln/>
-        </p:spPr>
-        <p:txBody>
-          <a:bodyPr wrap="square" lIns="0" tIns="0" rIns="0" bIns="0" rtlCol="0" anchor="ctr"/>
-          <a:lstStyle/>
-          <a:p>
-            <a:pPr indent="0" marL="0">
-              <a:buNone/>
-            </a:pPr>
-            <a:r>
-              <a:rPr lang="en-US" sz="800" dirty="0">
-                <a:solidFill>
-                  <a:srgbClr val="3B7EF7"/>
-                </a:solidFill>
-                <a:latin typeface="Arial" pitchFamily="34" charset="0"/>
-                <a:ea typeface="Arial" pitchFamily="34" charset="-122"/>
-                <a:cs typeface="Arial" pitchFamily="34" charset="-120"/>
-              </a:rPr>
-              <a:t>5 interventi</a:t>
-            </a:r>
-            <a:endParaRPr lang="en-US" sz="800" dirty="0"/>
-          </a:p>
-        </p:txBody>
-      </p:sp>
-      <p:sp>
-        <p:nvSpPr>
-          <p:cNvPr id="34" name="Shape 32"/>
-          <p:cNvSpPr/>
-          <p:nvPr/>
-        </p:nvSpPr>
-        <p:spPr>
-          <a:xfrm>
-            <a:off x="5148072" y="2011680"/>
-            <a:ext cx="2139696" cy="457200"/>
-          </a:xfrm>
-          <a:prstGeom prst="rect">
-            <a:avLst/>
-          </a:prstGeom>
-          <a:solidFill>
-            <a:srgbClr val="222222"/>
-          </a:solidFill>
-          <a:ln/>
-        </p:spPr>
-      </p:sp>
-      <p:sp>
-        <p:nvSpPr>
-          <p:cNvPr id="35" name="Shape 33"/>
-          <p:cNvSpPr/>
-          <p:nvPr/>
-        </p:nvSpPr>
-        <p:spPr>
-          <a:xfrm>
-            <a:off x="5148072" y="2011680"/>
-            <a:ext cx="36576" cy="457200"/>
-          </a:xfrm>
-          <a:prstGeom prst="rect">
-            <a:avLst/>
-          </a:prstGeom>
-          <a:solidFill>
-            <a:srgbClr val="F7B731"/>
-          </a:solidFill>
-          <a:ln/>
-        </p:spPr>
-      </p:sp>
-      <p:sp>
-        <p:nvSpPr>
-          <p:cNvPr id="36" name="Text 34"/>
-          <p:cNvSpPr/>
-          <p:nvPr/>
-        </p:nvSpPr>
-        <p:spPr>
-          <a:xfrm>
-            <a:off x="5257800" y="2039112"/>
-            <a:ext cx="1097280" cy="182880"/>
-          </a:xfrm>
-          <a:prstGeom prst="rect">
-            <a:avLst/>
-          </a:prstGeom>
-          <a:noFill/>
-          <a:ln/>
-        </p:spPr>
-        <p:txBody>
-          <a:bodyPr wrap="square" lIns="0" tIns="0" rIns="0" bIns="0" rtlCol="0" anchor="ctr"/>
-          <a:lstStyle/>
-          <a:p>
-            <a:pPr indent="0" marL="0">
-              <a:buNone/>
-            </a:pPr>
-            <a:r>
-              <a:rPr lang="en-US" sz="800" b="1" dirty="0">
-                <a:solidFill>
-                  <a:srgbClr val="FFFFFF"/>
-                </a:solidFill>
-                <a:latin typeface="Arial" pitchFamily="34" charset="0"/>
-                <a:ea typeface="Arial" pitchFamily="34" charset="-122"/>
-                <a:cs typeface="Arial" pitchFamily="34" charset="-120"/>
-              </a:rPr>
-              <a:t>Ordini</a:t>
-            </a:r>
-            <a:endParaRPr lang="en-US" sz="800" dirty="0"/>
-          </a:p>
-        </p:txBody>
-      </p:sp>
-      <p:sp>
-        <p:nvSpPr>
-          <p:cNvPr id="37" name="Text 35"/>
-          <p:cNvSpPr/>
-          <p:nvPr/>
-        </p:nvSpPr>
-        <p:spPr>
-          <a:xfrm>
-            <a:off x="5257800" y="2240280"/>
-            <a:ext cx="1097280" cy="182880"/>
-          </a:xfrm>
-          <a:prstGeom prst="rect">
-            <a:avLst/>
-          </a:prstGeom>
-          <a:noFill/>
-          <a:ln/>
-        </p:spPr>
-        <p:txBody>
-          <a:bodyPr wrap="square" lIns="0" tIns="0" rIns="0" bIns="0" rtlCol="0" anchor="ctr"/>
-          <a:lstStyle/>
-          <a:p>
-            <a:pPr indent="0" marL="0">
-              <a:buNone/>
-            </a:pPr>
-            <a:r>
-              <a:rPr lang="en-US" sz="800" dirty="0">
-                <a:solidFill>
-                  <a:srgbClr val="F7B731"/>
-                </a:solidFill>
-                <a:latin typeface="Arial" pitchFamily="34" charset="0"/>
-                <a:ea typeface="Arial" pitchFamily="34" charset="-122"/>
-                <a:cs typeface="Arial" pitchFamily="34" charset="-120"/>
-              </a:rPr>
-              <a:t>2 in attesa</a:t>
-            </a:r>
-            <a:endParaRPr lang="en-US" sz="800" dirty="0"/>
-          </a:p>
-        </p:txBody>
-      </p:sp>
-      <p:sp>
-        <p:nvSpPr>
-          <p:cNvPr id="38" name="Shape 36"/>
-          <p:cNvSpPr/>
-          <p:nvPr/>
-        </p:nvSpPr>
-        <p:spPr>
-          <a:xfrm>
-            <a:off x="5074920" y="4251960"/>
-            <a:ext cx="2286000" cy="320040"/>
-          </a:xfrm>
-          <a:prstGeom prst="rect">
-            <a:avLst/>
-          </a:prstGeom>
-          <a:solidFill>
-            <a:srgbClr val="1A1A1A"/>
-          </a:solidFill>
-          <a:ln/>
-        </p:spPr>
-      </p:sp>
-      <p:sp>
-        <p:nvSpPr>
-          <p:cNvPr id="39" name="Text 37"/>
-          <p:cNvSpPr/>
-          <p:nvPr/>
-        </p:nvSpPr>
-        <p:spPr>
-          <a:xfrm>
-            <a:off x="5120640" y="4279392"/>
-            <a:ext cx="438912" cy="256032"/>
-          </a:xfrm>
-          <a:prstGeom prst="rect">
-            <a:avLst/>
-          </a:prstGeom>
-          <a:noFill/>
-          <a:ln/>
-        </p:spPr>
-        <p:txBody>
-          <a:bodyPr wrap="square" lIns="0" tIns="0" rIns="0" bIns="0" rtlCol="0" anchor="ctr"/>
-          <a:lstStyle/>
-          <a:p>
-            <a:pPr algn="ctr" indent="0" marL="0">
-              <a:buNone/>
-            </a:pPr>
-            <a:r>
-              <a:rPr lang="en-US" sz="550" dirty="0">
-                <a:solidFill>
-                  <a:srgbClr val="C30A14"/>
-                </a:solidFill>
-                <a:latin typeface="Arial" pitchFamily="34" charset="0"/>
-                <a:ea typeface="Arial" pitchFamily="34" charset="-122"/>
-                <a:cs typeface="Arial" pitchFamily="34" charset="-120"/>
-              </a:rPr>
-              <a:t>Home</a:t>
-            </a:r>
-            <a:endParaRPr lang="en-US" sz="550" dirty="0"/>
-          </a:p>
-        </p:txBody>
-      </p:sp>
-      <p:sp>
-        <p:nvSpPr>
-          <p:cNvPr id="40" name="Text 38"/>
-          <p:cNvSpPr/>
-          <p:nvPr/>
-        </p:nvSpPr>
-        <p:spPr>
-          <a:xfrm>
-            <a:off x="5559552" y="4279392"/>
-            <a:ext cx="438912" cy="256032"/>
-          </a:xfrm>
-          <a:prstGeom prst="rect">
-            <a:avLst/>
-          </a:prstGeom>
-          <a:noFill/>
-          <a:ln/>
-        </p:spPr>
-        <p:txBody>
-          <a:bodyPr wrap="square" lIns="0" tIns="0" rIns="0" bIns="0" rtlCol="0" anchor="ctr"/>
-          <a:lstStyle/>
-          <a:p>
-            <a:pPr algn="ctr" indent="0" marL="0">
-              <a:buNone/>
-            </a:pPr>
-            <a:r>
-              <a:rPr lang="en-US" sz="550" dirty="0">
-                <a:solidFill>
-                  <a:srgbClr val="888888"/>
-                </a:solidFill>
-                <a:latin typeface="Arial" pitchFamily="34" charset="0"/>
-                <a:ea typeface="Arial" pitchFamily="34" charset="-122"/>
-                <a:cs typeface="Arial" pitchFamily="34" charset="-120"/>
-              </a:rPr>
-              <a:t>Urgenze</a:t>
-            </a:r>
-            <a:endParaRPr lang="en-US" sz="550" dirty="0"/>
-          </a:p>
-        </p:txBody>
-      </p:sp>
-      <p:sp>
-        <p:nvSpPr>
-          <p:cNvPr id="41" name="Text 39"/>
-          <p:cNvSpPr/>
-          <p:nvPr/>
-        </p:nvSpPr>
-        <p:spPr>
-          <a:xfrm>
-            <a:off x="5998464" y="4279392"/>
-            <a:ext cx="438912" cy="256032"/>
-          </a:xfrm>
-          <a:prstGeom prst="rect">
-            <a:avLst/>
-          </a:prstGeom>
-          <a:noFill/>
-          <a:ln/>
-        </p:spPr>
-        <p:txBody>
-          <a:bodyPr wrap="square" lIns="0" tIns="0" rIns="0" bIns="0" rtlCol="0" anchor="ctr"/>
-          <a:lstStyle/>
-          <a:p>
-            <a:pPr algn="ctr" indent="0" marL="0">
-              <a:buNone/>
-            </a:pPr>
-            <a:r>
-              <a:rPr lang="en-US" sz="550" dirty="0">
-                <a:solidFill>
-                  <a:srgbClr val="888888"/>
-                </a:solidFill>
-                <a:latin typeface="Arial" pitchFamily="34" charset="0"/>
-                <a:ea typeface="Arial" pitchFamily="34" charset="-122"/>
-                <a:cs typeface="Arial" pitchFamily="34" charset="-120"/>
-              </a:rPr>
-              <a:t>Piano</a:t>
-            </a:r>
-            <a:endParaRPr lang="en-US" sz="550" dirty="0"/>
-          </a:p>
-        </p:txBody>
-      </p:sp>
-      <p:sp>
-        <p:nvSpPr>
-          <p:cNvPr id="42" name="Text 40"/>
-          <p:cNvSpPr/>
-          <p:nvPr/>
-        </p:nvSpPr>
-        <p:spPr>
-          <a:xfrm>
-            <a:off x="6437376" y="4279392"/>
-            <a:ext cx="438912" cy="256032"/>
-          </a:xfrm>
-          <a:prstGeom prst="rect">
-            <a:avLst/>
-          </a:prstGeom>
-          <a:noFill/>
-          <a:ln/>
-        </p:spPr>
-        <p:txBody>
-          <a:bodyPr wrap="square" lIns="0" tIns="0" rIns="0" bIns="0" rtlCol="0" anchor="ctr"/>
-          <a:lstStyle/>
-          <a:p>
-            <a:pPr algn="ctr" indent="0" marL="0">
-              <a:buNone/>
-            </a:pPr>
-            <a:r>
-              <a:rPr lang="en-US" sz="550" dirty="0">
-                <a:solidFill>
-                  <a:srgbClr val="888888"/>
-                </a:solidFill>
-                <a:latin typeface="Arial" pitchFamily="34" charset="0"/>
-                <a:ea typeface="Arial" pitchFamily="34" charset="-122"/>
-                <a:cs typeface="Arial" pitchFamily="34" charset="-120"/>
-              </a:rPr>
-              <a:t>Mappa</a:t>
-            </a:r>
-            <a:endParaRPr lang="en-US" sz="550" dirty="0"/>
-          </a:p>
-        </p:txBody>
-      </p:sp>
-      <p:sp>
-        <p:nvSpPr>
-          <p:cNvPr id="43" name="Text 41"/>
-          <p:cNvSpPr/>
-          <p:nvPr/>
-        </p:nvSpPr>
-        <p:spPr>
-          <a:xfrm>
-            <a:off x="6876288" y="4279392"/>
-            <a:ext cx="438912" cy="256032"/>
-          </a:xfrm>
-          <a:prstGeom prst="rect">
-            <a:avLst/>
-          </a:prstGeom>
-          <a:noFill/>
-          <a:ln/>
-        </p:spPr>
-        <p:txBody>
-          <a:bodyPr wrap="square" lIns="0" tIns="0" rIns="0" bIns="0" rtlCol="0" anchor="ctr"/>
-          <a:lstStyle/>
-          <a:p>
-            <a:pPr algn="ctr" indent="0" marL="0">
-              <a:buNone/>
-            </a:pPr>
-            <a:r>
-              <a:rPr lang="en-US" sz="550" dirty="0">
-                <a:solidFill>
-                  <a:srgbClr val="888888"/>
-                </a:solidFill>
-                <a:latin typeface="Arial" pitchFamily="34" charset="0"/>
-                <a:ea typeface="Arial" pitchFamily="34" charset="-122"/>
-                <a:cs typeface="Arial" pitchFamily="34" charset="-120"/>
-              </a:rPr>
-              <a:t>Profilo</a:t>
-            </a:r>
-            <a:endParaRPr lang="en-US" sz="550" dirty="0"/>
-          </a:p>
-        </p:txBody>
-      </p:sp>
-      <p:sp>
-        <p:nvSpPr>
-          <p:cNvPr id="44" name="Shape 42"/>
-          <p:cNvSpPr/>
-          <p:nvPr/>
-        </p:nvSpPr>
-        <p:spPr>
-          <a:xfrm>
-            <a:off x="7589520" y="731520"/>
-            <a:ext cx="1371600" cy="2743200"/>
-          </a:xfrm>
-          <a:prstGeom prst="roundRect">
-            <a:avLst>
-              <a:gd name="adj" fmla="val 10000"/>
-            </a:avLst>
-          </a:prstGeom>
-          <a:solidFill>
-            <a:srgbClr val="1A1A1A"/>
-          </a:solidFill>
-          <a:ln w="19050">
-            <a:solidFill>
-              <a:srgbClr val="444444"/>
-            </a:solidFill>
-            <a:prstDash val="solid"/>
-          </a:ln>
-          <a:effectLst>
-            <a:outerShdw sx="100000" sy="100000" kx="0" ky="0" algn="bl" rotWithShape="0" blurRad="76200" dist="25400" dir="8100000">
-              <a:srgbClr val="000000">
-                <a:alpha val="40000"/>
-              </a:srgbClr>
-            </a:outerShdw>
-          </a:effectLst>
-        </p:spPr>
-      </p:sp>
-      <p:sp>
-        <p:nvSpPr>
-          <p:cNvPr id="45" name="Shape 43"/>
-          <p:cNvSpPr/>
-          <p:nvPr/>
-        </p:nvSpPr>
-        <p:spPr>
-          <a:xfrm>
-            <a:off x="7635240" y="777240"/>
-            <a:ext cx="1280160" cy="182880"/>
-          </a:xfrm>
-          <a:prstGeom prst="rect">
-            <a:avLst/>
-          </a:prstGeom>
-          <a:solidFill>
-            <a:srgbClr val="111111"/>
-          </a:solidFill>
-          <a:ln/>
-        </p:spPr>
-      </p:sp>
-      <p:sp>
-        <p:nvSpPr>
-          <p:cNvPr id="46" name="Text 44"/>
-          <p:cNvSpPr/>
-          <p:nvPr/>
-        </p:nvSpPr>
-        <p:spPr>
-          <a:xfrm>
-            <a:off x="7680960" y="777240"/>
-            <a:ext cx="457200" cy="182880"/>
-          </a:xfrm>
-          <a:prstGeom prst="rect">
-            <a:avLst/>
-          </a:prstGeom>
-          <a:noFill/>
-          <a:ln/>
-        </p:spPr>
-        <p:txBody>
-          <a:bodyPr wrap="square" rtlCol="0" anchor="ctr"/>
-          <a:lstStyle/>
-          <a:p>
-            <a:pPr indent="0" marL="0">
-              <a:buNone/>
-            </a:pPr>
-            <a:r>
-              <a:rPr lang="en-US" sz="700" b="1" dirty="0">
-                <a:solidFill>
-                  <a:srgbClr val="FFFFFF"/>
-                </a:solidFill>
-                <a:latin typeface="Arial" pitchFamily="34" charset="0"/>
-                <a:ea typeface="Arial" pitchFamily="34" charset="-122"/>
-                <a:cs typeface="Arial" pitchFamily="34" charset="-120"/>
-              </a:rPr>
-              <a:t>9:41</a:t>
-            </a:r>
-            <a:endParaRPr lang="en-US" sz="700" dirty="0"/>
-          </a:p>
-        </p:txBody>
-      </p:sp>
-      <p:sp>
-        <p:nvSpPr>
-          <p:cNvPr id="47" name="Shape 45"/>
-          <p:cNvSpPr/>
-          <p:nvPr/>
-        </p:nvSpPr>
-        <p:spPr>
-          <a:xfrm>
-            <a:off x="7635240" y="960120"/>
-            <a:ext cx="1280160" cy="2240280"/>
-          </a:xfrm>
-          <a:prstGeom prst="rect">
-            <a:avLst/>
-          </a:prstGeom>
-          <a:solidFill>
-            <a:srgbClr val="000000"/>
-          </a:solidFill>
-          <a:ln/>
-        </p:spPr>
-      </p:sp>
-      <p:sp>
-        <p:nvSpPr>
-          <p:cNvPr id="48" name="Shape 46"/>
-          <p:cNvSpPr/>
-          <p:nvPr/>
-        </p:nvSpPr>
-        <p:spPr>
-          <a:xfrm>
-            <a:off x="7909560" y="3291840"/>
-            <a:ext cx="731520" cy="36576"/>
-          </a:xfrm>
-          <a:prstGeom prst="roundRect">
-            <a:avLst>
-              <a:gd name="adj" fmla="val 50000"/>
-            </a:avLst>
-          </a:prstGeom>
-          <a:solidFill>
-            <a:srgbClr val="444444"/>
-          </a:solidFill>
-          <a:ln/>
-        </p:spPr>
-      </p:sp>
-      <p:sp>
-        <p:nvSpPr>
-          <p:cNvPr id="49" name="Shape 47"/>
-          <p:cNvSpPr/>
-          <p:nvPr/>
-        </p:nvSpPr>
-        <p:spPr>
-          <a:xfrm>
-            <a:off x="7635240" y="960120"/>
-            <a:ext cx="1280160" cy="228600"/>
-          </a:xfrm>
-          <a:prstGeom prst="rect">
-            <a:avLst/>
-          </a:prstGeom>
-          <a:solidFill>
-            <a:srgbClr val="C30A14"/>
-          </a:solidFill>
-          <a:ln/>
-        </p:spPr>
-      </p:sp>
-      <p:sp>
-        <p:nvSpPr>
-          <p:cNvPr id="50" name="Text 48"/>
-          <p:cNvSpPr/>
-          <p:nvPr/>
-        </p:nvSpPr>
-        <p:spPr>
-          <a:xfrm>
-            <a:off x="7680960" y="978408"/>
-            <a:ext cx="1188720" cy="182880"/>
-          </a:xfrm>
-          <a:prstGeom prst="rect">
-            <a:avLst/>
-          </a:prstGeom>
-          <a:noFill/>
-          <a:ln/>
-        </p:spPr>
-        <p:txBody>
-          <a:bodyPr wrap="square" lIns="0" tIns="0" rIns="0" bIns="0" rtlCol="0" anchor="ctr"/>
-          <a:lstStyle/>
-          <a:p>
-            <a:pPr indent="0" marL="0">
-              <a:buNone/>
-            </a:pPr>
-            <a:r>
-              <a:rPr lang="en-US" sz="700" b="1" dirty="0">
-                <a:solidFill>
-                  <a:srgbClr val="FFFFFF"/>
-                </a:solidFill>
-                <a:latin typeface="Arial" pitchFamily="34" charset="0"/>
-                <a:ea typeface="Arial" pitchFamily="34" charset="-122"/>
-                <a:cs typeface="Arial" pitchFamily="34" charset="-120"/>
-              </a:rPr>
-              <a:t>Urgenza</a:t>
-            </a:r>
-            <a:endParaRPr lang="en-US" sz="700" dirty="0"/>
-          </a:p>
-        </p:txBody>
-      </p:sp>
-      <p:sp>
-        <p:nvSpPr>
-          <p:cNvPr id="51" name="Text 49"/>
-          <p:cNvSpPr/>
-          <p:nvPr/>
-        </p:nvSpPr>
-        <p:spPr>
-          <a:xfrm>
-            <a:off x="7708392" y="1234440"/>
-            <a:ext cx="1133856" cy="1371600"/>
-          </a:xfrm>
-          <a:prstGeom prst="rect">
-            <a:avLst/>
-          </a:prstGeom>
-          <a:noFill/>
-          <a:ln/>
-        </p:spPr>
-        <p:txBody>
-          <a:bodyPr wrap="square" lIns="0" tIns="0" rIns="0" bIns="0" rtlCol="0" anchor="ctr"/>
-          <a:lstStyle/>
-          <a:p>
-            <a:pPr indent="0" marL="0">
-              <a:lnSpc>
-                <a:spcPct val="130000"/>
-              </a:lnSpc>
-              <a:buNone/>
-            </a:pPr>
-            <a:r>
-              <a:rPr lang="en-US" sz="600" dirty="0">
-                <a:solidFill>
-                  <a:srgbClr val="CCCCCC"/>
-                </a:solidFill>
-                <a:latin typeface="Arial" pitchFamily="34" charset="0"/>
-                <a:ea typeface="Arial" pitchFamily="34" charset="-122"/>
-                <a:cs typeface="Arial" pitchFamily="34" charset="-120"/>
-              </a:rPr>
-              <a:t>URG_042</a:t>
-            </a:r>
-            <a:endParaRPr lang="en-US" sz="600" dirty="0"/>
-          </a:p>
-          <a:p>
-            <a:pPr indent="0" marL="0">
-              <a:lnSpc>
-                <a:spcPct val="130000"/>
-              </a:lnSpc>
-              <a:buNone/>
-            </a:pPr>
-            <a:r>
-              <a:rPr lang="en-US" sz="600" dirty="0">
-                <a:solidFill>
-                  <a:srgbClr val="CCCCCC"/>
-                </a:solidFill>
-                <a:latin typeface="Arial" pitchFamily="34" charset="0"/>
-                <a:ea typeface="Arial" pitchFamily="34" charset="-122"/>
-                <a:cs typeface="Arial" pitchFamily="34" charset="-120"/>
-              </a:rPr>
-              <a:t>Az. Rossi</a:t>
-            </a:r>
-            <a:endParaRPr lang="en-US" sz="600" dirty="0"/>
-          </a:p>
-          <a:p>
-            <a:pPr indent="0" marL="0">
-              <a:lnSpc>
-                <a:spcPct val="130000"/>
-              </a:lnSpc>
-              <a:buNone/>
-            </a:pPr>
-            <a:r>
-              <a:rPr lang="en-US" sz="600" dirty="0">
-                <a:solidFill>
-                  <a:srgbClr val="CCCCCC"/>
-                </a:solidFill>
-                <a:latin typeface="Arial" pitchFamily="34" charset="0"/>
-                <a:ea typeface="Arial" pitchFamily="34" charset="-122"/>
-                <a:cs typeface="Arial" pitchFamily="34" charset="-120"/>
-              </a:rPr>
-              <a:t>Parma</a:t>
-            </a:r>
-            <a:endParaRPr lang="en-US" sz="600" dirty="0"/>
-          </a:p>
-          <a:p>
-            <a:pPr indent="0" marL="0">
-              <a:lnSpc>
-                <a:spcPct val="130000"/>
-              </a:lnSpc>
-              <a:buNone/>
-            </a:pPr>
-            <a:endParaRPr lang="en-US" sz="600" dirty="0"/>
-          </a:p>
-          <a:p>
-            <a:pPr indent="0" marL="0">
-              <a:lnSpc>
-                <a:spcPct val="130000"/>
-              </a:lnSpc>
-              <a:buNone/>
-            </a:pPr>
-            <a:r>
-              <a:rPr lang="en-US" sz="600" dirty="0">
-                <a:solidFill>
-                  <a:srgbClr val="CCCCCC"/>
-                </a:solidFill>
-                <a:latin typeface="Arial" pitchFamily="34" charset="0"/>
-                <a:ea typeface="Arial" pitchFamily="34" charset="-122"/>
-                <a:cs typeface="Arial" pitchFamily="34" charset="-120"/>
-              </a:rPr>
-              <a:t>Robot A5 bloccato</a:t>
-            </a:r>
-            <a:endParaRPr lang="en-US" sz="600" dirty="0"/>
-          </a:p>
-          <a:p>
-            <a:pPr indent="0" marL="0">
-              <a:lnSpc>
-                <a:spcPct val="130000"/>
-              </a:lnSpc>
-              <a:buNone/>
-            </a:pPr>
-            <a:r>
-              <a:rPr lang="en-US" sz="600" dirty="0">
-                <a:solidFill>
-                  <a:srgbClr val="CCCCCC"/>
-                </a:solidFill>
-                <a:latin typeface="Arial" pitchFamily="34" charset="0"/>
-                <a:ea typeface="Arial" pitchFamily="34" charset="-122"/>
-                <a:cs typeface="Arial" pitchFamily="34" charset="-120"/>
-              </a:rPr>
-              <a:t>Priorita: ALTA</a:t>
-            </a:r>
-            <a:endParaRPr lang="en-US" sz="600" dirty="0"/>
-          </a:p>
-        </p:txBody>
-      </p:sp>
-      <p:sp>
-        <p:nvSpPr>
-          <p:cNvPr id="52" name="Shape 50"/>
-          <p:cNvSpPr/>
-          <p:nvPr/>
-        </p:nvSpPr>
-        <p:spPr>
-          <a:xfrm>
-            <a:off x="7708392" y="2651760"/>
-            <a:ext cx="1133856" cy="201168"/>
-          </a:xfrm>
-          <a:prstGeom prst="rect">
-            <a:avLst/>
-          </a:prstGeom>
-          <a:solidFill>
-            <a:srgbClr val="34D058"/>
-          </a:solidFill>
-          <a:ln/>
-        </p:spPr>
-      </p:sp>
-      <p:sp>
-        <p:nvSpPr>
-          <p:cNvPr id="53" name="Text 51"/>
-          <p:cNvSpPr/>
-          <p:nvPr/>
-        </p:nvSpPr>
-        <p:spPr>
-          <a:xfrm>
-            <a:off x="7708392" y="2651760"/>
-            <a:ext cx="1133856" cy="201168"/>
-          </a:xfrm>
-          <a:prstGeom prst="rect">
-            <a:avLst/>
-          </a:prstGeom>
-          <a:noFill/>
-          <a:ln/>
-        </p:spPr>
-        <p:txBody>
-          <a:bodyPr wrap="square" lIns="0" tIns="0" rIns="0" bIns="0" rtlCol="0" anchor="ctr"/>
-          <a:lstStyle/>
-          <a:p>
-            <a:pPr algn="ctr" indent="0" marL="0">
-              <a:buNone/>
-            </a:pPr>
-            <a:r>
-              <a:rPr lang="en-US" sz="700" b="1" dirty="0">
-                <a:solidFill>
-                  <a:srgbClr val="FFFFFF"/>
-                </a:solidFill>
-                <a:latin typeface="Arial" pitchFamily="34" charset="0"/>
-                <a:ea typeface="Arial" pitchFamily="34" charset="-122"/>
-                <a:cs typeface="Arial" pitchFamily="34" charset="-120"/>
-              </a:rPr>
-              <a:t>VADO</a:t>
-            </a:r>
-            <a:endParaRPr lang="en-US" sz="700" dirty="0"/>
-          </a:p>
-        </p:txBody>
-      </p:sp>
-      <p:sp>
-        <p:nvSpPr>
-          <p:cNvPr id="54" name="Shape 52"/>
-          <p:cNvSpPr/>
-          <p:nvPr/>
-        </p:nvSpPr>
-        <p:spPr>
-          <a:xfrm>
-            <a:off x="7708392" y="2880360"/>
-            <a:ext cx="1133856" cy="201168"/>
-          </a:xfrm>
-          <a:prstGeom prst="rect">
-            <a:avLst/>
-          </a:prstGeom>
-          <a:solidFill>
-            <a:srgbClr val="17C0EB"/>
-          </a:solidFill>
-          <a:ln/>
-        </p:spPr>
-      </p:sp>
-      <p:sp>
-        <p:nvSpPr>
-          <p:cNvPr id="55" name="Text 53"/>
-          <p:cNvSpPr/>
-          <p:nvPr/>
-        </p:nvSpPr>
-        <p:spPr>
-          <a:xfrm>
-            <a:off x="7708392" y="2880360"/>
-            <a:ext cx="1133856" cy="201168"/>
-          </a:xfrm>
-          <a:prstGeom prst="rect">
-            <a:avLst/>
-          </a:prstGeom>
-          <a:noFill/>
-          <a:ln/>
-        </p:spPr>
-        <p:txBody>
-          <a:bodyPr wrap="square" lIns="0" tIns="0" rIns="0" bIns="0" rtlCol="0" anchor="ctr"/>
-          <a:lstStyle/>
-          <a:p>
-            <a:pPr algn="ctr" indent="0" marL="0">
-              <a:buNone/>
-            </a:pPr>
-            <a:r>
-              <a:rPr lang="en-US" sz="700" b="1" dirty="0">
-                <a:solidFill>
-                  <a:srgbClr val="FFFFFF"/>
-                </a:solidFill>
-                <a:latin typeface="Arial" pitchFamily="34" charset="0"/>
-                <a:ea typeface="Arial" pitchFamily="34" charset="-122"/>
-                <a:cs typeface="Arial" pitchFamily="34" charset="-120"/>
-              </a:rPr>
-              <a:t>IN CORSO</a:t>
-            </a:r>
-            <a:endParaRPr lang="en-US" sz="700" dirty="0"/>
-          </a:p>
-        </p:txBody>
-      </p:sp>
+            <a:ext cx="1645920" cy="3557016"/>
+          </a:xfrm>
+          <a:prstGeom prst="rect">
+            <a:avLst/>
+          </a:prstGeom>
+        </p:spPr>
+      </p:pic>
+      <p:pic>
+        <p:nvPicPr>
+          <p:cNvPr id="20" name="Image 1" descr="/sessions/brave-peaceful-lovelace/mockups/urgenza_detail.png">    </p:cNvPr>
+          <p:cNvPicPr>
+            <a:picLocks noChangeAspect="1"/>
+          </p:cNvPicPr>
+          <p:nvPr/>
+        </p:nvPicPr>
+        <p:blipFill>
+          <a:blip r:embed="rId2"/>
+          <a:stretch>
+            <a:fillRect/>
+          </a:stretch>
+        </p:blipFill>
+        <p:spPr>
+          <a:xfrm>
+            <a:off x="6858000" y="274320"/>
+            <a:ext cx="1645920" cy="3557016"/>
+          </a:xfrm>
+          <a:prstGeom prst="rect">
+            <a:avLst/>
+          </a:prstGeom>
+        </p:spPr>
+      </p:pic>
     </p:spTree>
   </p:cSld>
   <p:clrMapOvr>
@@ -12827,22 +7688,709 @@
           </a:p>
         </p:txBody>
       </p:sp>
-      <p:sp>
-        <p:nvSpPr>
-          <p:cNvPr id="4" name="Shape 2"/>
-          <p:cNvSpPr/>
-          <p:nvPr/>
-        </p:nvSpPr>
+      <p:pic>
+        <p:nvPicPr>
+          <p:cNvPr id="4" name="Image 0" descr="/sessions/brave-peaceful-lovelace/mockups/telegram_chat.png">    </p:cNvPr>
+          <p:cNvPicPr>
+            <a:picLocks noChangeAspect="1"/>
+          </p:cNvPicPr>
+          <p:nvPr/>
+        </p:nvPicPr>
+        <p:blipFill>
+          <a:blip r:embed="rId1"/>
+          <a:stretch>
+            <a:fillRect/>
+          </a:stretch>
+        </p:blipFill>
         <p:spPr>
           <a:xfrm>
             <a:off x="457200" y="1554480"/>
-            <a:ext cx="4114800" cy="3291840"/>
+            <a:ext cx="1828800" cy="3200400"/>
+          </a:xfrm>
+          <a:prstGeom prst="rect">
+            <a:avLst/>
+          </a:prstGeom>
+        </p:spPr>
+      </p:pic>
+      <p:sp>
+        <p:nvSpPr>
+          <p:cNvPr id="5" name="Text 2"/>
+          <p:cNvSpPr/>
+          <p:nvPr/>
+        </p:nvSpPr>
+        <p:spPr>
+          <a:xfrm>
+            <a:off x="2560320" y="1554480"/>
+            <a:ext cx="3657600" cy="365760"/>
+          </a:xfrm>
+          <a:prstGeom prst="rect">
+            <a:avLst/>
+          </a:prstGeom>
+          <a:noFill/>
+          <a:ln/>
+        </p:spPr>
+        <p:txBody>
+          <a:bodyPr wrap="square" lIns="0" tIns="0" rIns="0" bIns="0" rtlCol="0" anchor="ctr"/>
+          <a:lstStyle/>
+          <a:p>
+            <a:pPr indent="0" marL="0">
+              <a:buNone/>
+            </a:pPr>
+            <a:r>
+              <a:rPr lang="en-US" sz="1600" b="1" dirty="0">
+                <a:solidFill>
+                  <a:srgbClr val="FFFFFF"/>
+                </a:solidFill>
+                <a:latin typeface="Arial" pitchFamily="34" charset="0"/>
+                <a:ea typeface="Arial" pitchFamily="34" charset="-122"/>
+                <a:cs typeface="Arial" pitchFamily="34" charset="-120"/>
+              </a:rPr>
+              <a:t>Comandi</a:t>
+            </a:r>
+            <a:endParaRPr lang="en-US" sz="1600" dirty="0"/>
+          </a:p>
+        </p:txBody>
+      </p:sp>
+      <p:sp>
+        <p:nvSpPr>
+          <p:cNvPr id="6" name="Text 3"/>
+          <p:cNvSpPr/>
+          <p:nvPr/>
+        </p:nvSpPr>
+        <p:spPr>
+          <a:xfrm>
+            <a:off x="2560320" y="1965960"/>
+            <a:ext cx="1371600" cy="256032"/>
+          </a:xfrm>
+          <a:prstGeom prst="rect">
+            <a:avLst/>
+          </a:prstGeom>
+          <a:noFill/>
+          <a:ln/>
+        </p:spPr>
+        <p:txBody>
+          <a:bodyPr wrap="square" lIns="0" tIns="0" rIns="0" bIns="0" rtlCol="0" anchor="ctr"/>
+          <a:lstStyle/>
+          <a:p>
+            <a:pPr indent="0" marL="0">
+              <a:buNone/>
+            </a:pPr>
+            <a:r>
+              <a:rPr lang="en-US" sz="1000" b="1" dirty="0">
+                <a:solidFill>
+                  <a:srgbClr val="C30A14"/>
+                </a:solidFill>
+                <a:latin typeface="Courier New" pitchFamily="34" charset="0"/>
+                <a:ea typeface="Courier New" pitchFamily="34" charset="-122"/>
+                <a:cs typeface="Courier New" pitchFamily="34" charset="-120"/>
+              </a:rPr>
+              <a:t>/vado</a:t>
+            </a:r>
+            <a:endParaRPr lang="en-US" sz="1000" dirty="0"/>
+          </a:p>
+        </p:txBody>
+      </p:sp>
+      <p:sp>
+        <p:nvSpPr>
+          <p:cNvPr id="7" name="Text 4"/>
+          <p:cNvSpPr/>
+          <p:nvPr/>
+        </p:nvSpPr>
+        <p:spPr>
+          <a:xfrm>
+            <a:off x="4114800" y="1965960"/>
+            <a:ext cx="2286000" cy="256032"/>
+          </a:xfrm>
+          <a:prstGeom prst="rect">
+            <a:avLst/>
+          </a:prstGeom>
+          <a:noFill/>
+          <a:ln/>
+        </p:spPr>
+        <p:txBody>
+          <a:bodyPr wrap="square" lIns="0" tIns="0" rIns="0" bIns="0" rtlCol="0" anchor="ctr"/>
+          <a:lstStyle/>
+          <a:p>
+            <a:pPr indent="0" marL="0">
+              <a:buNone/>
+            </a:pPr>
+            <a:r>
+              <a:rPr lang="en-US" sz="1000" dirty="0">
+                <a:solidFill>
+                  <a:srgbClr val="CCCCCC"/>
+                </a:solidFill>
+                <a:latin typeface="Arial" pitchFamily="34" charset="0"/>
+                <a:ea typeface="Arial" pitchFamily="34" charset="-122"/>
+                <a:cs typeface="Arial" pitchFamily="34" charset="-120"/>
+              </a:rPr>
+              <a:t>Prendi urgenza</a:t>
+            </a:r>
+            <a:endParaRPr lang="en-US" sz="1000" dirty="0"/>
+          </a:p>
+        </p:txBody>
+      </p:sp>
+      <p:sp>
+        <p:nvSpPr>
+          <p:cNvPr id="8" name="Text 5"/>
+          <p:cNvSpPr/>
+          <p:nvPr/>
+        </p:nvSpPr>
+        <p:spPr>
+          <a:xfrm>
+            <a:off x="2560320" y="2240280"/>
+            <a:ext cx="1371600" cy="256032"/>
+          </a:xfrm>
+          <a:prstGeom prst="rect">
+            <a:avLst/>
+          </a:prstGeom>
+          <a:noFill/>
+          <a:ln/>
+        </p:spPr>
+        <p:txBody>
+          <a:bodyPr wrap="square" lIns="0" tIns="0" rIns="0" bIns="0" rtlCol="0" anchor="ctr"/>
+          <a:lstStyle/>
+          <a:p>
+            <a:pPr indent="0" marL="0">
+              <a:buNone/>
+            </a:pPr>
+            <a:r>
+              <a:rPr lang="en-US" sz="1000" b="1" dirty="0">
+                <a:solidFill>
+                  <a:srgbClr val="F7B731"/>
+                </a:solidFill>
+                <a:latin typeface="Courier New" pitchFamily="34" charset="0"/>
+                <a:ea typeface="Courier New" pitchFamily="34" charset="-122"/>
+                <a:cs typeface="Courier New" pitchFamily="34" charset="-120"/>
+              </a:rPr>
+              <a:t>/incorso</a:t>
+            </a:r>
+            <a:endParaRPr lang="en-US" sz="1000" dirty="0"/>
+          </a:p>
+        </p:txBody>
+      </p:sp>
+      <p:sp>
+        <p:nvSpPr>
+          <p:cNvPr id="9" name="Text 6"/>
+          <p:cNvSpPr/>
+          <p:nvPr/>
+        </p:nvSpPr>
+        <p:spPr>
+          <a:xfrm>
+            <a:off x="4114800" y="2240280"/>
+            <a:ext cx="2286000" cy="256032"/>
+          </a:xfrm>
+          <a:prstGeom prst="rect">
+            <a:avLst/>
+          </a:prstGeom>
+          <a:noFill/>
+          <a:ln/>
+        </p:spPr>
+        <p:txBody>
+          <a:bodyPr wrap="square" lIns="0" tIns="0" rIns="0" bIns="0" rtlCol="0" anchor="ctr"/>
+          <a:lstStyle/>
+          <a:p>
+            <a:pPr indent="0" marL="0">
+              <a:buNone/>
+            </a:pPr>
+            <a:r>
+              <a:rPr lang="en-US" sz="1000" dirty="0">
+                <a:solidFill>
+                  <a:srgbClr val="CCCCCC"/>
+                </a:solidFill>
+                <a:latin typeface="Arial" pitchFamily="34" charset="0"/>
+                <a:ea typeface="Arial" pitchFamily="34" charset="-122"/>
+                <a:cs typeface="Arial" pitchFamily="34" charset="-120"/>
+              </a:rPr>
+              <a:t>Inizia lavoro</a:t>
+            </a:r>
+            <a:endParaRPr lang="en-US" sz="1000" dirty="0"/>
+          </a:p>
+        </p:txBody>
+      </p:sp>
+      <p:sp>
+        <p:nvSpPr>
+          <p:cNvPr id="10" name="Text 7"/>
+          <p:cNvSpPr/>
+          <p:nvPr/>
+        </p:nvSpPr>
+        <p:spPr>
+          <a:xfrm>
+            <a:off x="2560320" y="2514600"/>
+            <a:ext cx="1371600" cy="256032"/>
+          </a:xfrm>
+          <a:prstGeom prst="rect">
+            <a:avLst/>
+          </a:prstGeom>
+          <a:noFill/>
+          <a:ln/>
+        </p:spPr>
+        <p:txBody>
+          <a:bodyPr wrap="square" lIns="0" tIns="0" rIns="0" bIns="0" rtlCol="0" anchor="ctr"/>
+          <a:lstStyle/>
+          <a:p>
+            <a:pPr indent="0" marL="0">
+              <a:buNone/>
+            </a:pPr>
+            <a:r>
+              <a:rPr lang="en-US" sz="1000" b="1" dirty="0">
+                <a:solidFill>
+                  <a:srgbClr val="34D058"/>
+                </a:solidFill>
+                <a:latin typeface="Courier New" pitchFamily="34" charset="0"/>
+                <a:ea typeface="Courier New" pitchFamily="34" charset="-122"/>
+                <a:cs typeface="Courier New" pitchFamily="34" charset="-120"/>
+              </a:rPr>
+              <a:t>/risolto</a:t>
+            </a:r>
+            <a:endParaRPr lang="en-US" sz="1000" dirty="0"/>
+          </a:p>
+        </p:txBody>
+      </p:sp>
+      <p:sp>
+        <p:nvSpPr>
+          <p:cNvPr id="11" name="Text 8"/>
+          <p:cNvSpPr/>
+          <p:nvPr/>
+        </p:nvSpPr>
+        <p:spPr>
+          <a:xfrm>
+            <a:off x="4114800" y="2514600"/>
+            <a:ext cx="2286000" cy="256032"/>
+          </a:xfrm>
+          <a:prstGeom prst="rect">
+            <a:avLst/>
+          </a:prstGeom>
+          <a:noFill/>
+          <a:ln/>
+        </p:spPr>
+        <p:txBody>
+          <a:bodyPr wrap="square" lIns="0" tIns="0" rIns="0" bIns="0" rtlCol="0" anchor="ctr"/>
+          <a:lstStyle/>
+          <a:p>
+            <a:pPr indent="0" marL="0">
+              <a:buNone/>
+            </a:pPr>
+            <a:r>
+              <a:rPr lang="en-US" sz="1000" dirty="0">
+                <a:solidFill>
+                  <a:srgbClr val="CCCCCC"/>
+                </a:solidFill>
+                <a:latin typeface="Arial" pitchFamily="34" charset="0"/>
+                <a:ea typeface="Arial" pitchFamily="34" charset="-122"/>
+                <a:cs typeface="Arial" pitchFamily="34" charset="-120"/>
+              </a:rPr>
+              <a:t>Chiudi con note</a:t>
+            </a:r>
+            <a:endParaRPr lang="en-US" sz="1000" dirty="0"/>
+          </a:p>
+        </p:txBody>
+      </p:sp>
+      <p:sp>
+        <p:nvSpPr>
+          <p:cNvPr id="12" name="Text 9"/>
+          <p:cNvSpPr/>
+          <p:nvPr/>
+        </p:nvSpPr>
+        <p:spPr>
+          <a:xfrm>
+            <a:off x="2560320" y="2788920"/>
+            <a:ext cx="1371600" cy="256032"/>
+          </a:xfrm>
+          <a:prstGeom prst="rect">
+            <a:avLst/>
+          </a:prstGeom>
+          <a:noFill/>
+          <a:ln/>
+        </p:spPr>
+        <p:txBody>
+          <a:bodyPr wrap="square" lIns="0" tIns="0" rIns="0" bIns="0" rtlCol="0" anchor="ctr"/>
+          <a:lstStyle/>
+          <a:p>
+            <a:pPr indent="0" marL="0">
+              <a:buNone/>
+            </a:pPr>
+            <a:r>
+              <a:rPr lang="en-US" sz="1000" b="1" dirty="0">
+                <a:solidFill>
+                  <a:srgbClr val="3B7EF7"/>
+                </a:solidFill>
+                <a:latin typeface="Courier New" pitchFamily="34" charset="0"/>
+                <a:ea typeface="Courier New" pitchFamily="34" charset="-122"/>
+                <a:cs typeface="Courier New" pitchFamily="34" charset="-120"/>
+              </a:rPr>
+              <a:t>/stato</a:t>
+            </a:r>
+            <a:endParaRPr lang="en-US" sz="1000" dirty="0"/>
+          </a:p>
+        </p:txBody>
+      </p:sp>
+      <p:sp>
+        <p:nvSpPr>
+          <p:cNvPr id="13" name="Text 10"/>
+          <p:cNvSpPr/>
+          <p:nvPr/>
+        </p:nvSpPr>
+        <p:spPr>
+          <a:xfrm>
+            <a:off x="4114800" y="2788920"/>
+            <a:ext cx="2286000" cy="256032"/>
+          </a:xfrm>
+          <a:prstGeom prst="rect">
+            <a:avLst/>
+          </a:prstGeom>
+          <a:noFill/>
+          <a:ln/>
+        </p:spPr>
+        <p:txBody>
+          <a:bodyPr wrap="square" lIns="0" tIns="0" rIns="0" bIns="0" rtlCol="0" anchor="ctr"/>
+          <a:lstStyle/>
+          <a:p>
+            <a:pPr indent="0" marL="0">
+              <a:buNone/>
+            </a:pPr>
+            <a:r>
+              <a:rPr lang="en-US" sz="1000" dirty="0">
+                <a:solidFill>
+                  <a:srgbClr val="CCCCCC"/>
+                </a:solidFill>
+                <a:latin typeface="Arial" pitchFamily="34" charset="0"/>
+                <a:ea typeface="Arial" pitchFamily="34" charset="-122"/>
+                <a:cs typeface="Arial" pitchFamily="34" charset="-120"/>
+              </a:rPr>
+              <a:t>Stato urgenze</a:t>
+            </a:r>
+            <a:endParaRPr lang="en-US" sz="1000" dirty="0"/>
+          </a:p>
+        </p:txBody>
+      </p:sp>
+      <p:sp>
+        <p:nvSpPr>
+          <p:cNvPr id="14" name="Text 11"/>
+          <p:cNvSpPr/>
+          <p:nvPr/>
+        </p:nvSpPr>
+        <p:spPr>
+          <a:xfrm>
+            <a:off x="2560320" y="3063240"/>
+            <a:ext cx="1371600" cy="256032"/>
+          </a:xfrm>
+          <a:prstGeom prst="rect">
+            <a:avLst/>
+          </a:prstGeom>
+          <a:noFill/>
+          <a:ln/>
+        </p:spPr>
+        <p:txBody>
+          <a:bodyPr wrap="square" lIns="0" tIns="0" rIns="0" bIns="0" rtlCol="0" anchor="ctr"/>
+          <a:lstStyle/>
+          <a:p>
+            <a:pPr indent="0" marL="0">
+              <a:buNone/>
+            </a:pPr>
+            <a:r>
+              <a:rPr lang="en-US" sz="1000" b="1" dirty="0">
+                <a:solidFill>
+                  <a:srgbClr val="17C0EB"/>
+                </a:solidFill>
+                <a:latin typeface="Courier New" pitchFamily="34" charset="0"/>
+                <a:ea typeface="Courier New" pitchFamily="34" charset="-122"/>
+                <a:cs typeface="Courier New" pitchFamily="34" charset="-120"/>
+              </a:rPr>
+              <a:t>/oggi</a:t>
+            </a:r>
+            <a:endParaRPr lang="en-US" sz="1000" dirty="0"/>
+          </a:p>
+        </p:txBody>
+      </p:sp>
+      <p:sp>
+        <p:nvSpPr>
+          <p:cNvPr id="15" name="Text 12"/>
+          <p:cNvSpPr/>
+          <p:nvPr/>
+        </p:nvSpPr>
+        <p:spPr>
+          <a:xfrm>
+            <a:off x="4114800" y="3063240"/>
+            <a:ext cx="2286000" cy="256032"/>
+          </a:xfrm>
+          <a:prstGeom prst="rect">
+            <a:avLst/>
+          </a:prstGeom>
+          <a:noFill/>
+          <a:ln/>
+        </p:spPr>
+        <p:txBody>
+          <a:bodyPr wrap="square" lIns="0" tIns="0" rIns="0" bIns="0" rtlCol="0" anchor="ctr"/>
+          <a:lstStyle/>
+          <a:p>
+            <a:pPr indent="0" marL="0">
+              <a:buNone/>
+            </a:pPr>
+            <a:r>
+              <a:rPr lang="en-US" sz="1000" dirty="0">
+                <a:solidFill>
+                  <a:srgbClr val="CCCCCC"/>
+                </a:solidFill>
+                <a:latin typeface="Arial" pitchFamily="34" charset="0"/>
+                <a:ea typeface="Arial" pitchFamily="34" charset="-122"/>
+                <a:cs typeface="Arial" pitchFamily="34" charset="-120"/>
+              </a:rPr>
+              <a:t>Piano di oggi</a:t>
+            </a:r>
+            <a:endParaRPr lang="en-US" sz="1000" dirty="0"/>
+          </a:p>
+        </p:txBody>
+      </p:sp>
+      <p:sp>
+        <p:nvSpPr>
+          <p:cNvPr id="16" name="Text 13"/>
+          <p:cNvSpPr/>
+          <p:nvPr/>
+        </p:nvSpPr>
+        <p:spPr>
+          <a:xfrm>
+            <a:off x="2560320" y="3337560"/>
+            <a:ext cx="1371600" cy="256032"/>
+          </a:xfrm>
+          <a:prstGeom prst="rect">
+            <a:avLst/>
+          </a:prstGeom>
+          <a:noFill/>
+          <a:ln/>
+        </p:spPr>
+        <p:txBody>
+          <a:bodyPr wrap="square" lIns="0" tIns="0" rIns="0" bIns="0" rtlCol="0" anchor="ctr"/>
+          <a:lstStyle/>
+          <a:p>
+            <a:pPr indent="0" marL="0">
+              <a:buNone/>
+            </a:pPr>
+            <a:r>
+              <a:rPr lang="en-US" sz="1000" b="1" dirty="0">
+                <a:solidFill>
+                  <a:srgbClr val="8854D0"/>
+                </a:solidFill>
+                <a:latin typeface="Courier New" pitchFamily="34" charset="0"/>
+                <a:ea typeface="Courier New" pitchFamily="34" charset="-122"/>
+                <a:cs typeface="Courier New" pitchFamily="34" charset="-120"/>
+              </a:rPr>
+              <a:t>/settimana</a:t>
+            </a:r>
+            <a:endParaRPr lang="en-US" sz="1000" dirty="0"/>
+          </a:p>
+        </p:txBody>
+      </p:sp>
+      <p:sp>
+        <p:nvSpPr>
+          <p:cNvPr id="17" name="Text 14"/>
+          <p:cNvSpPr/>
+          <p:nvPr/>
+        </p:nvSpPr>
+        <p:spPr>
+          <a:xfrm>
+            <a:off x="4114800" y="3337560"/>
+            <a:ext cx="2286000" cy="256032"/>
+          </a:xfrm>
+          <a:prstGeom prst="rect">
+            <a:avLst/>
+          </a:prstGeom>
+          <a:noFill/>
+          <a:ln/>
+        </p:spPr>
+        <p:txBody>
+          <a:bodyPr wrap="square" lIns="0" tIns="0" rIns="0" bIns="0" rtlCol="0" anchor="ctr"/>
+          <a:lstStyle/>
+          <a:p>
+            <a:pPr indent="0" marL="0">
+              <a:buNone/>
+            </a:pPr>
+            <a:r>
+              <a:rPr lang="en-US" sz="1000" dirty="0">
+                <a:solidFill>
+                  <a:srgbClr val="CCCCCC"/>
+                </a:solidFill>
+                <a:latin typeface="Arial" pitchFamily="34" charset="0"/>
+                <a:ea typeface="Arial" pitchFamily="34" charset="-122"/>
+                <a:cs typeface="Arial" pitchFamily="34" charset="-120"/>
+              </a:rPr>
+              <a:t>Piano settimana</a:t>
+            </a:r>
+            <a:endParaRPr lang="en-US" sz="1000" dirty="0"/>
+          </a:p>
+        </p:txBody>
+      </p:sp>
+      <p:sp>
+        <p:nvSpPr>
+          <p:cNvPr id="18" name="Text 15"/>
+          <p:cNvSpPr/>
+          <p:nvPr/>
+        </p:nvSpPr>
+        <p:spPr>
+          <a:xfrm>
+            <a:off x="2560320" y="3611880"/>
+            <a:ext cx="1371600" cy="256032"/>
+          </a:xfrm>
+          <a:prstGeom prst="rect">
+            <a:avLst/>
+          </a:prstGeom>
+          <a:noFill/>
+          <a:ln/>
+        </p:spPr>
+        <p:txBody>
+          <a:bodyPr wrap="square" lIns="0" tIns="0" rIns="0" bIns="0" rtlCol="0" anchor="ctr"/>
+          <a:lstStyle/>
+          <a:p>
+            <a:pPr indent="0" marL="0">
+              <a:buNone/>
+            </a:pPr>
+            <a:r>
+              <a:rPr lang="en-US" sz="1000" b="1" dirty="0">
+                <a:solidFill>
+                  <a:srgbClr val="F7B731"/>
+                </a:solidFill>
+                <a:latin typeface="Courier New" pitchFamily="34" charset="0"/>
+                <a:ea typeface="Courier New" pitchFamily="34" charset="-122"/>
+                <a:cs typeface="Courier New" pitchFamily="34" charset="-120"/>
+              </a:rPr>
+              <a:t>/ordine</a:t>
+            </a:r>
+            <a:endParaRPr lang="en-US" sz="1000" dirty="0"/>
+          </a:p>
+        </p:txBody>
+      </p:sp>
+      <p:sp>
+        <p:nvSpPr>
+          <p:cNvPr id="19" name="Text 16"/>
+          <p:cNvSpPr/>
+          <p:nvPr/>
+        </p:nvSpPr>
+        <p:spPr>
+          <a:xfrm>
+            <a:off x="4114800" y="3611880"/>
+            <a:ext cx="2286000" cy="256032"/>
+          </a:xfrm>
+          <a:prstGeom prst="rect">
+            <a:avLst/>
+          </a:prstGeom>
+          <a:noFill/>
+          <a:ln/>
+        </p:spPr>
+        <p:txBody>
+          <a:bodyPr wrap="square" lIns="0" tIns="0" rIns="0" bIns="0" rtlCol="0" anchor="ctr"/>
+          <a:lstStyle/>
+          <a:p>
+            <a:pPr indent="0" marL="0">
+              <a:buNone/>
+            </a:pPr>
+            <a:r>
+              <a:rPr lang="en-US" sz="1000" dirty="0">
+                <a:solidFill>
+                  <a:srgbClr val="CCCCCC"/>
+                </a:solidFill>
+                <a:latin typeface="Arial" pitchFamily="34" charset="0"/>
+                <a:ea typeface="Arial" pitchFamily="34" charset="-122"/>
+                <a:cs typeface="Arial" pitchFamily="34" charset="-120"/>
+              </a:rPr>
+              <a:t>Ordina ricambio</a:t>
+            </a:r>
+            <a:endParaRPr lang="en-US" sz="1000" dirty="0"/>
+          </a:p>
+        </p:txBody>
+      </p:sp>
+      <p:sp>
+        <p:nvSpPr>
+          <p:cNvPr id="20" name="Text 17"/>
+          <p:cNvSpPr/>
+          <p:nvPr/>
+        </p:nvSpPr>
+        <p:spPr>
+          <a:xfrm>
+            <a:off x="2560320" y="3886200"/>
+            <a:ext cx="1371600" cy="256032"/>
+          </a:xfrm>
+          <a:prstGeom prst="rect">
+            <a:avLst/>
+          </a:prstGeom>
+          <a:noFill/>
+          <a:ln/>
+        </p:spPr>
+        <p:txBody>
+          <a:bodyPr wrap="square" lIns="0" tIns="0" rIns="0" bIns="0" rtlCol="0" anchor="ctr"/>
+          <a:lstStyle/>
+          <a:p>
+            <a:pPr indent="0" marL="0">
+              <a:buNone/>
+            </a:pPr>
+            <a:r>
+              <a:rPr lang="en-US" sz="1000" b="1" dirty="0">
+                <a:solidFill>
+                  <a:srgbClr val="34D058"/>
+                </a:solidFill>
+                <a:latin typeface="Courier New" pitchFamily="34" charset="0"/>
+                <a:ea typeface="Courier New" pitchFamily="34" charset="-122"/>
+                <a:cs typeface="Courier New" pitchFamily="34" charset="-120"/>
+              </a:rPr>
+              <a:t>Foto/testo</a:t>
+            </a:r>
+            <a:endParaRPr lang="en-US" sz="1000" dirty="0"/>
+          </a:p>
+        </p:txBody>
+      </p:sp>
+      <p:sp>
+        <p:nvSpPr>
+          <p:cNvPr id="21" name="Text 18"/>
+          <p:cNvSpPr/>
+          <p:nvPr/>
+        </p:nvSpPr>
+        <p:spPr>
+          <a:xfrm>
+            <a:off x="4114800" y="3886200"/>
+            <a:ext cx="2286000" cy="256032"/>
+          </a:xfrm>
+          <a:prstGeom prst="rect">
+            <a:avLst/>
+          </a:prstGeom>
+          <a:noFill/>
+          <a:ln/>
+        </p:spPr>
+        <p:txBody>
+          <a:bodyPr wrap="square" lIns="0" tIns="0" rIns="0" bIns="0" rtlCol="0" anchor="ctr"/>
+          <a:lstStyle/>
+          <a:p>
+            <a:pPr indent="0" marL="0">
+              <a:buNone/>
+            </a:pPr>
+            <a:r>
+              <a:rPr lang="en-US" sz="1000" dirty="0">
+                <a:solidFill>
+                  <a:srgbClr val="CCCCCC"/>
+                </a:solidFill>
+                <a:latin typeface="Arial" pitchFamily="34" charset="0"/>
+                <a:ea typeface="Arial" pitchFamily="34" charset="-122"/>
+                <a:cs typeface="Arial" pitchFamily="34" charset="-120"/>
+              </a:rPr>
+              <a:t>AI analizza</a:t>
+            </a:r>
+            <a:endParaRPr lang="en-US" sz="1000" dirty="0"/>
+          </a:p>
+        </p:txBody>
+      </p:sp>
+      <p:sp>
+        <p:nvSpPr>
+          <p:cNvPr id="22" name="Shape 19"/>
+          <p:cNvSpPr/>
+          <p:nvPr/>
+        </p:nvSpPr>
+        <p:spPr>
+          <a:xfrm>
+            <a:off x="2560320" y="4251960"/>
+            <a:ext cx="3840480" cy="548640"/>
           </a:xfrm>
           <a:prstGeom prst="rect">
             <a:avLst/>
           </a:prstGeom>
           <a:solidFill>
-            <a:srgbClr val="0E1621"/>
+            <a:srgbClr val="222222"/>
           </a:solidFill>
           <a:ln/>
           <a:effectLst>
@@ -12856,1110 +8404,13 @@
       </p:sp>
       <p:sp>
         <p:nvSpPr>
-          <p:cNvPr id="5" name="Shape 3"/>
-          <p:cNvSpPr/>
-          <p:nvPr/>
-        </p:nvSpPr>
-        <p:spPr>
-          <a:xfrm>
-            <a:off x="457200" y="1554480"/>
-            <a:ext cx="4114800" cy="320040"/>
-          </a:xfrm>
-          <a:prstGeom prst="rect">
-            <a:avLst/>
-          </a:prstGeom>
-          <a:solidFill>
-            <a:srgbClr val="1C2B3A"/>
-          </a:solidFill>
-          <a:ln/>
-        </p:spPr>
-      </p:sp>
-      <p:sp>
-        <p:nvSpPr>
-          <p:cNvPr id="6" name="Text 4"/>
-          <p:cNvSpPr/>
-          <p:nvPr/>
-        </p:nvSpPr>
-        <p:spPr>
-          <a:xfrm>
-            <a:off x="822960" y="1581912"/>
-            <a:ext cx="2743200" cy="274320"/>
-          </a:xfrm>
-          <a:prstGeom prst="rect">
-            <a:avLst/>
-          </a:prstGeom>
-          <a:noFill/>
-          <a:ln/>
-        </p:spPr>
-        <p:txBody>
-          <a:bodyPr wrap="square" lIns="0" tIns="0" rIns="0" bIns="0" rtlCol="0" anchor="ctr"/>
-          <a:lstStyle/>
-          <a:p>
-            <a:pPr indent="0" marL="0">
-              <a:buNone/>
-            </a:pPr>
-            <a:r>
-              <a:rPr lang="en-US" sz="1000" b="1" dirty="0">
-                <a:solidFill>
-                  <a:srgbClr val="FFFFFF"/>
-                </a:solidFill>
-                <a:latin typeface="Arial" pitchFamily="34" charset="0"/>
-                <a:ea typeface="Arial" pitchFamily="34" charset="-122"/>
-                <a:cs typeface="Arial" pitchFamily="34" charset="-120"/>
-              </a:rPr>
-              <a:t>Syntoniqa Bot</a:t>
-            </a:r>
-            <a:endParaRPr lang="en-US" sz="1000" dirty="0"/>
-          </a:p>
-        </p:txBody>
-      </p:sp>
-      <p:sp>
-        <p:nvSpPr>
-          <p:cNvPr id="7" name="Shape 5"/>
-          <p:cNvSpPr/>
-          <p:nvPr/>
-        </p:nvSpPr>
-        <p:spPr>
-          <a:xfrm>
-            <a:off x="2468880" y="2011680"/>
-            <a:ext cx="1920240" cy="256032"/>
-          </a:xfrm>
-          <a:prstGeom prst="rect">
-            <a:avLst/>
-          </a:prstGeom>
-          <a:solidFill>
-            <a:srgbClr val="2B5278"/>
-          </a:solidFill>
-          <a:ln/>
-        </p:spPr>
-      </p:sp>
-      <p:sp>
-        <p:nvSpPr>
-          <p:cNvPr id="8" name="Text 6"/>
-          <p:cNvSpPr/>
-          <p:nvPr/>
-        </p:nvSpPr>
-        <p:spPr>
-          <a:xfrm>
-            <a:off x="2542032" y="2029968"/>
-            <a:ext cx="1773936" cy="219456"/>
-          </a:xfrm>
-          <a:prstGeom prst="rect">
-            <a:avLst/>
-          </a:prstGeom>
-          <a:noFill/>
-          <a:ln/>
-        </p:spPr>
-        <p:txBody>
-          <a:bodyPr wrap="square" lIns="0" tIns="0" rIns="0" bIns="0" rtlCol="0" anchor="ctr"/>
-          <a:lstStyle/>
-          <a:p>
-            <a:pPr indent="0" marL="0">
-              <a:lnSpc>
-                <a:spcPct val="120000"/>
-              </a:lnSpc>
-              <a:buNone/>
-            </a:pPr>
-            <a:r>
-              <a:rPr lang="en-US" sz="750" dirty="0">
-                <a:solidFill>
-                  <a:srgbClr val="FFFFFF"/>
-                </a:solidFill>
-                <a:latin typeface="Arial" pitchFamily="34" charset="0"/>
-                <a:ea typeface="Arial" pitchFamily="34" charset="-122"/>
-                <a:cs typeface="Arial" pitchFamily="34" charset="-120"/>
-              </a:rPr>
-              <a:t>/vado</a:t>
-            </a:r>
-            <a:endParaRPr lang="en-US" sz="750" dirty="0"/>
-          </a:p>
-        </p:txBody>
-      </p:sp>
-      <p:sp>
-        <p:nvSpPr>
-          <p:cNvPr id="9" name="Shape 7"/>
-          <p:cNvSpPr/>
-          <p:nvPr/>
-        </p:nvSpPr>
-        <p:spPr>
-          <a:xfrm>
-            <a:off x="548640" y="2377440"/>
-            <a:ext cx="3200400" cy="694944"/>
-          </a:xfrm>
-          <a:prstGeom prst="rect">
-            <a:avLst/>
-          </a:prstGeom>
-          <a:solidFill>
-            <a:srgbClr val="1C2B3A"/>
-          </a:solidFill>
-          <a:ln/>
-        </p:spPr>
-      </p:sp>
-      <p:sp>
-        <p:nvSpPr>
-          <p:cNvPr id="10" name="Text 8"/>
-          <p:cNvSpPr/>
-          <p:nvPr/>
-        </p:nvSpPr>
-        <p:spPr>
-          <a:xfrm>
-            <a:off x="621792" y="2395728"/>
-            <a:ext cx="3054096" cy="658368"/>
-          </a:xfrm>
-          <a:prstGeom prst="rect">
-            <a:avLst/>
-          </a:prstGeom>
-          <a:noFill/>
-          <a:ln/>
-        </p:spPr>
-        <p:txBody>
-          <a:bodyPr wrap="square" lIns="0" tIns="0" rIns="0" bIns="0" rtlCol="0" anchor="ctr"/>
-          <a:lstStyle/>
-          <a:p>
-            <a:pPr indent="0" marL="0">
-              <a:lnSpc>
-                <a:spcPct val="120000"/>
-              </a:lnSpc>
-              <a:buNone/>
-            </a:pPr>
-            <a:r>
-              <a:rPr lang="en-US" sz="750" dirty="0">
-                <a:solidFill>
-                  <a:srgbClr val="FFFFFF"/>
-                </a:solidFill>
-                <a:latin typeface="Arial" pitchFamily="34" charset="0"/>
-                <a:ea typeface="Arial" pitchFamily="34" charset="-122"/>
-                <a:cs typeface="Arial" pitchFamily="34" charset="-120"/>
-              </a:rPr>
-              <a:t>Urgenze aperte:</a:t>
-            </a:r>
-            <a:endParaRPr lang="en-US" sz="750" dirty="0"/>
-          </a:p>
-          <a:p>
-            <a:pPr indent="0" marL="0">
-              <a:lnSpc>
-                <a:spcPct val="120000"/>
-              </a:lnSpc>
-              <a:buNone/>
-            </a:pPr>
-            <a:r>
-              <a:rPr lang="en-US" sz="750" dirty="0">
-                <a:solidFill>
-                  <a:srgbClr val="FFFFFF"/>
-                </a:solidFill>
-                <a:latin typeface="Arial" pitchFamily="34" charset="0"/>
-                <a:ea typeface="Arial" pitchFamily="34" charset="-122"/>
-                <a:cs typeface="Arial" pitchFamily="34" charset="-120"/>
-              </a:rPr>
-              <a:t>1. URG_042 - Az. Rossi - Robot A5 bloccato</a:t>
-            </a:r>
-            <a:endParaRPr lang="en-US" sz="750" dirty="0"/>
-          </a:p>
-          <a:p>
-            <a:pPr indent="0" marL="0">
-              <a:lnSpc>
-                <a:spcPct val="120000"/>
-              </a:lnSpc>
-              <a:buNone/>
-            </a:pPr>
-            <a:r>
-              <a:rPr lang="en-US" sz="750" dirty="0">
-                <a:solidFill>
-                  <a:srgbClr val="FFFFFF"/>
-                </a:solidFill>
-                <a:latin typeface="Arial" pitchFamily="34" charset="0"/>
-                <a:ea typeface="Arial" pitchFamily="34" charset="-122"/>
-                <a:cs typeface="Arial" pitchFamily="34" charset="-120"/>
-              </a:rPr>
-              <a:t>2. URG_041 - Coop Verdi - Sensore guasto</a:t>
-            </a:r>
-            <a:endParaRPr lang="en-US" sz="750" dirty="0"/>
-          </a:p>
-          <a:p>
-            <a:pPr indent="0" marL="0">
-              <a:lnSpc>
-                <a:spcPct val="120000"/>
-              </a:lnSpc>
-              <a:buNone/>
-            </a:pPr>
-            <a:r>
-              <a:rPr lang="en-US" sz="750" dirty="0">
-                <a:solidFill>
-                  <a:srgbClr val="FFFFFF"/>
-                </a:solidFill>
-                <a:latin typeface="Arial" pitchFamily="34" charset="0"/>
-                <a:ea typeface="Arial" pitchFamily="34" charset="-122"/>
-                <a:cs typeface="Arial" pitchFamily="34" charset="-120"/>
-              </a:rPr>
-              <a:t>3. URG_040 - Latteria Bianchi - PM Q1</a:t>
-            </a:r>
-            <a:endParaRPr lang="en-US" sz="750" dirty="0"/>
-          </a:p>
-        </p:txBody>
-      </p:sp>
-      <p:sp>
-        <p:nvSpPr>
-          <p:cNvPr id="11" name="Shape 9"/>
-          <p:cNvSpPr/>
-          <p:nvPr/>
-        </p:nvSpPr>
-        <p:spPr>
-          <a:xfrm>
-            <a:off x="2468880" y="3383280"/>
-            <a:ext cx="1920240" cy="256032"/>
-          </a:xfrm>
-          <a:prstGeom prst="rect">
-            <a:avLst/>
-          </a:prstGeom>
-          <a:solidFill>
-            <a:srgbClr val="2B5278"/>
-          </a:solidFill>
-          <a:ln/>
-        </p:spPr>
-      </p:sp>
-      <p:sp>
-        <p:nvSpPr>
-          <p:cNvPr id="12" name="Text 10"/>
-          <p:cNvSpPr/>
-          <p:nvPr/>
-        </p:nvSpPr>
-        <p:spPr>
-          <a:xfrm>
-            <a:off x="2542032" y="3401568"/>
-            <a:ext cx="1773936" cy="219456"/>
-          </a:xfrm>
-          <a:prstGeom prst="rect">
-            <a:avLst/>
-          </a:prstGeom>
-          <a:noFill/>
-          <a:ln/>
-        </p:spPr>
-        <p:txBody>
-          <a:bodyPr wrap="square" lIns="0" tIns="0" rIns="0" bIns="0" rtlCol="0" anchor="ctr"/>
-          <a:lstStyle/>
-          <a:p>
-            <a:pPr indent="0" marL="0">
-              <a:lnSpc>
-                <a:spcPct val="120000"/>
-              </a:lnSpc>
-              <a:buNone/>
-            </a:pPr>
-            <a:r>
-              <a:rPr lang="en-US" sz="750" dirty="0">
-                <a:solidFill>
-                  <a:srgbClr val="FFFFFF"/>
-                </a:solidFill>
-                <a:latin typeface="Arial" pitchFamily="34" charset="0"/>
-                <a:ea typeface="Arial" pitchFamily="34" charset="-122"/>
-                <a:cs typeface="Arial" pitchFamily="34" charset="-120"/>
-              </a:rPr>
-              <a:t>/vado 1</a:t>
-            </a:r>
-            <a:endParaRPr lang="en-US" sz="750" dirty="0"/>
-          </a:p>
-        </p:txBody>
-      </p:sp>
-      <p:sp>
-        <p:nvSpPr>
-          <p:cNvPr id="13" name="Shape 11"/>
-          <p:cNvSpPr/>
-          <p:nvPr/>
-        </p:nvSpPr>
-        <p:spPr>
-          <a:xfrm>
-            <a:off x="548640" y="3703320"/>
-            <a:ext cx="3200400" cy="548640"/>
-          </a:xfrm>
-          <a:prstGeom prst="rect">
-            <a:avLst/>
-          </a:prstGeom>
-          <a:solidFill>
-            <a:srgbClr val="1C2B3A"/>
-          </a:solidFill>
-          <a:ln/>
-        </p:spPr>
-      </p:sp>
-      <p:sp>
-        <p:nvSpPr>
-          <p:cNvPr id="14" name="Text 12"/>
-          <p:cNvSpPr/>
-          <p:nvPr/>
-        </p:nvSpPr>
-        <p:spPr>
-          <a:xfrm>
-            <a:off x="621792" y="3721608"/>
-            <a:ext cx="3054096" cy="512064"/>
-          </a:xfrm>
-          <a:prstGeom prst="rect">
-            <a:avLst/>
-          </a:prstGeom>
-          <a:noFill/>
-          <a:ln/>
-        </p:spPr>
-        <p:txBody>
-          <a:bodyPr wrap="square" lIns="0" tIns="0" rIns="0" bIns="0" rtlCol="0" anchor="ctr"/>
-          <a:lstStyle/>
-          <a:p>
-            <a:pPr indent="0" marL="0">
-              <a:lnSpc>
-                <a:spcPct val="120000"/>
-              </a:lnSpc>
-              <a:buNone/>
-            </a:pPr>
-            <a:r>
-              <a:rPr lang="en-US" sz="750" dirty="0">
-                <a:solidFill>
-                  <a:srgbClr val="FFFFFF"/>
-                </a:solidFill>
-                <a:latin typeface="Arial" pitchFamily="34" charset="0"/>
-                <a:ea typeface="Arial" pitchFamily="34" charset="-122"/>
-                <a:cs typeface="Arial" pitchFamily="34" charset="-120"/>
-              </a:rPr>
-              <a:t>Hai preso in carico URG_042.</a:t>
-            </a:r>
-            <a:endParaRPr lang="en-US" sz="750" dirty="0"/>
-          </a:p>
-          <a:p>
-            <a:pPr indent="0" marL="0">
-              <a:lnSpc>
-                <a:spcPct val="120000"/>
-              </a:lnSpc>
-              <a:buNone/>
-            </a:pPr>
-            <a:r>
-              <a:rPr lang="en-US" sz="750" dirty="0">
-                <a:solidFill>
-                  <a:srgbClr val="FFFFFF"/>
-                </a:solidFill>
-                <a:latin typeface="Arial" pitchFamily="34" charset="0"/>
-                <a:ea typeface="Arial" pitchFamily="34" charset="-122"/>
-                <a:cs typeface="Arial" pitchFamily="34" charset="-120"/>
-              </a:rPr>
-              <a:t>Cliente: Az. Rossi, Parma</a:t>
-            </a:r>
-            <a:endParaRPr lang="en-US" sz="750" dirty="0"/>
-          </a:p>
-          <a:p>
-            <a:pPr indent="0" marL="0">
-              <a:lnSpc>
-                <a:spcPct val="120000"/>
-              </a:lnSpc>
-              <a:buNone/>
-            </a:pPr>
-            <a:r>
-              <a:rPr lang="en-US" sz="750" dirty="0">
-                <a:solidFill>
-                  <a:srgbClr val="FFFFFF"/>
-                </a:solidFill>
-                <a:latin typeface="Arial" pitchFamily="34" charset="0"/>
-                <a:ea typeface="Arial" pitchFamily="34" charset="-122"/>
-                <a:cs typeface="Arial" pitchFamily="34" charset="-120"/>
-              </a:rPr>
-              <a:t>Naviga: maps.google.com/...</a:t>
-            </a:r>
-            <a:endParaRPr lang="en-US" sz="750" dirty="0"/>
-          </a:p>
-        </p:txBody>
-      </p:sp>
-      <p:sp>
-        <p:nvSpPr>
-          <p:cNvPr id="15" name="Text 13"/>
-          <p:cNvSpPr/>
-          <p:nvPr/>
-        </p:nvSpPr>
-        <p:spPr>
-          <a:xfrm>
-            <a:off x="5029200" y="1554480"/>
-            <a:ext cx="3657600" cy="365760"/>
-          </a:xfrm>
-          <a:prstGeom prst="rect">
-            <a:avLst/>
-          </a:prstGeom>
-          <a:noFill/>
-          <a:ln/>
-        </p:spPr>
-        <p:txBody>
-          <a:bodyPr wrap="square" lIns="0" tIns="0" rIns="0" bIns="0" rtlCol="0" anchor="ctr"/>
-          <a:lstStyle/>
-          <a:p>
-            <a:pPr indent="0" marL="0">
-              <a:buNone/>
-            </a:pPr>
-            <a:r>
-              <a:rPr lang="en-US" sz="1600" b="1" dirty="0">
-                <a:solidFill>
-                  <a:srgbClr val="FFFFFF"/>
-                </a:solidFill>
-                <a:latin typeface="Arial" pitchFamily="34" charset="0"/>
-                <a:ea typeface="Arial" pitchFamily="34" charset="-122"/>
-                <a:cs typeface="Arial" pitchFamily="34" charset="-120"/>
-              </a:rPr>
-              <a:t>Comandi</a:t>
-            </a:r>
-            <a:endParaRPr lang="en-US" sz="1600" dirty="0"/>
-          </a:p>
-        </p:txBody>
-      </p:sp>
-      <p:sp>
-        <p:nvSpPr>
-          <p:cNvPr id="16" name="Text 14"/>
-          <p:cNvSpPr/>
-          <p:nvPr/>
-        </p:nvSpPr>
-        <p:spPr>
-          <a:xfrm>
-            <a:off x="5029200" y="1965960"/>
-            <a:ext cx="1371600" cy="256032"/>
-          </a:xfrm>
-          <a:prstGeom prst="rect">
-            <a:avLst/>
-          </a:prstGeom>
-          <a:noFill/>
-          <a:ln/>
-        </p:spPr>
-        <p:txBody>
-          <a:bodyPr wrap="square" lIns="0" tIns="0" rIns="0" bIns="0" rtlCol="0" anchor="ctr"/>
-          <a:lstStyle/>
-          <a:p>
-            <a:pPr indent="0" marL="0">
-              <a:buNone/>
-            </a:pPr>
-            <a:r>
-              <a:rPr lang="en-US" sz="1000" b="1" dirty="0">
-                <a:solidFill>
-                  <a:srgbClr val="C30A14"/>
-                </a:solidFill>
-                <a:latin typeface="Courier New" pitchFamily="34" charset="0"/>
-                <a:ea typeface="Courier New" pitchFamily="34" charset="-122"/>
-                <a:cs typeface="Courier New" pitchFamily="34" charset="-120"/>
-              </a:rPr>
-              <a:t>/vado</a:t>
-            </a:r>
-            <a:endParaRPr lang="en-US" sz="1000" dirty="0"/>
-          </a:p>
-        </p:txBody>
-      </p:sp>
-      <p:sp>
-        <p:nvSpPr>
-          <p:cNvPr id="17" name="Text 15"/>
-          <p:cNvSpPr/>
-          <p:nvPr/>
-        </p:nvSpPr>
-        <p:spPr>
-          <a:xfrm>
-            <a:off x="6583680" y="1965960"/>
-            <a:ext cx="2286000" cy="256032"/>
-          </a:xfrm>
-          <a:prstGeom prst="rect">
-            <a:avLst/>
-          </a:prstGeom>
-          <a:noFill/>
-          <a:ln/>
-        </p:spPr>
-        <p:txBody>
-          <a:bodyPr wrap="square" lIns="0" tIns="0" rIns="0" bIns="0" rtlCol="0" anchor="ctr"/>
-          <a:lstStyle/>
-          <a:p>
-            <a:pPr indent="0" marL="0">
-              <a:buNone/>
-            </a:pPr>
-            <a:r>
-              <a:rPr lang="en-US" sz="1000" dirty="0">
-                <a:solidFill>
-                  <a:srgbClr val="CCCCCC"/>
-                </a:solidFill>
-                <a:latin typeface="Arial" pitchFamily="34" charset="0"/>
-                <a:ea typeface="Arial" pitchFamily="34" charset="-122"/>
-                <a:cs typeface="Arial" pitchFamily="34" charset="-120"/>
-              </a:rPr>
-              <a:t>Prendi urgenza</a:t>
-            </a:r>
-            <a:endParaRPr lang="en-US" sz="1000" dirty="0"/>
-          </a:p>
-        </p:txBody>
-      </p:sp>
-      <p:sp>
-        <p:nvSpPr>
-          <p:cNvPr id="18" name="Text 16"/>
-          <p:cNvSpPr/>
-          <p:nvPr/>
-        </p:nvSpPr>
-        <p:spPr>
-          <a:xfrm>
-            <a:off x="5029200" y="2240280"/>
-            <a:ext cx="1371600" cy="256032"/>
-          </a:xfrm>
-          <a:prstGeom prst="rect">
-            <a:avLst/>
-          </a:prstGeom>
-          <a:noFill/>
-          <a:ln/>
-        </p:spPr>
-        <p:txBody>
-          <a:bodyPr wrap="square" lIns="0" tIns="0" rIns="0" bIns="0" rtlCol="0" anchor="ctr"/>
-          <a:lstStyle/>
-          <a:p>
-            <a:pPr indent="0" marL="0">
-              <a:buNone/>
-            </a:pPr>
-            <a:r>
-              <a:rPr lang="en-US" sz="1000" b="1" dirty="0">
-                <a:solidFill>
-                  <a:srgbClr val="F7B731"/>
-                </a:solidFill>
-                <a:latin typeface="Courier New" pitchFamily="34" charset="0"/>
-                <a:ea typeface="Courier New" pitchFamily="34" charset="-122"/>
-                <a:cs typeface="Courier New" pitchFamily="34" charset="-120"/>
-              </a:rPr>
-              <a:t>/incorso</a:t>
-            </a:r>
-            <a:endParaRPr lang="en-US" sz="1000" dirty="0"/>
-          </a:p>
-        </p:txBody>
-      </p:sp>
-      <p:sp>
-        <p:nvSpPr>
-          <p:cNvPr id="19" name="Text 17"/>
-          <p:cNvSpPr/>
-          <p:nvPr/>
-        </p:nvSpPr>
-        <p:spPr>
-          <a:xfrm>
-            <a:off x="6583680" y="2240280"/>
-            <a:ext cx="2286000" cy="256032"/>
-          </a:xfrm>
-          <a:prstGeom prst="rect">
-            <a:avLst/>
-          </a:prstGeom>
-          <a:noFill/>
-          <a:ln/>
-        </p:spPr>
-        <p:txBody>
-          <a:bodyPr wrap="square" lIns="0" tIns="0" rIns="0" bIns="0" rtlCol="0" anchor="ctr"/>
-          <a:lstStyle/>
-          <a:p>
-            <a:pPr indent="0" marL="0">
-              <a:buNone/>
-            </a:pPr>
-            <a:r>
-              <a:rPr lang="en-US" sz="1000" dirty="0">
-                <a:solidFill>
-                  <a:srgbClr val="CCCCCC"/>
-                </a:solidFill>
-                <a:latin typeface="Arial" pitchFamily="34" charset="0"/>
-                <a:ea typeface="Arial" pitchFamily="34" charset="-122"/>
-                <a:cs typeface="Arial" pitchFamily="34" charset="-120"/>
-              </a:rPr>
-              <a:t>Inizia lavoro</a:t>
-            </a:r>
-            <a:endParaRPr lang="en-US" sz="1000" dirty="0"/>
-          </a:p>
-        </p:txBody>
-      </p:sp>
-      <p:sp>
-        <p:nvSpPr>
-          <p:cNvPr id="20" name="Text 18"/>
-          <p:cNvSpPr/>
-          <p:nvPr/>
-        </p:nvSpPr>
-        <p:spPr>
-          <a:xfrm>
-            <a:off x="5029200" y="2514600"/>
-            <a:ext cx="1371600" cy="256032"/>
-          </a:xfrm>
-          <a:prstGeom prst="rect">
-            <a:avLst/>
-          </a:prstGeom>
-          <a:noFill/>
-          <a:ln/>
-        </p:spPr>
-        <p:txBody>
-          <a:bodyPr wrap="square" lIns="0" tIns="0" rIns="0" bIns="0" rtlCol="0" anchor="ctr"/>
-          <a:lstStyle/>
-          <a:p>
-            <a:pPr indent="0" marL="0">
-              <a:buNone/>
-            </a:pPr>
-            <a:r>
-              <a:rPr lang="en-US" sz="1000" b="1" dirty="0">
-                <a:solidFill>
-                  <a:srgbClr val="34D058"/>
-                </a:solidFill>
-                <a:latin typeface="Courier New" pitchFamily="34" charset="0"/>
-                <a:ea typeface="Courier New" pitchFamily="34" charset="-122"/>
-                <a:cs typeface="Courier New" pitchFamily="34" charset="-120"/>
-              </a:rPr>
-              <a:t>/risolto</a:t>
-            </a:r>
-            <a:endParaRPr lang="en-US" sz="1000" dirty="0"/>
-          </a:p>
-        </p:txBody>
-      </p:sp>
-      <p:sp>
-        <p:nvSpPr>
-          <p:cNvPr id="21" name="Text 19"/>
-          <p:cNvSpPr/>
-          <p:nvPr/>
-        </p:nvSpPr>
-        <p:spPr>
-          <a:xfrm>
-            <a:off x="6583680" y="2514600"/>
-            <a:ext cx="2286000" cy="256032"/>
-          </a:xfrm>
-          <a:prstGeom prst="rect">
-            <a:avLst/>
-          </a:prstGeom>
-          <a:noFill/>
-          <a:ln/>
-        </p:spPr>
-        <p:txBody>
-          <a:bodyPr wrap="square" lIns="0" tIns="0" rIns="0" bIns="0" rtlCol="0" anchor="ctr"/>
-          <a:lstStyle/>
-          <a:p>
-            <a:pPr indent="0" marL="0">
-              <a:buNone/>
-            </a:pPr>
-            <a:r>
-              <a:rPr lang="en-US" sz="1000" dirty="0">
-                <a:solidFill>
-                  <a:srgbClr val="CCCCCC"/>
-                </a:solidFill>
-                <a:latin typeface="Arial" pitchFamily="34" charset="0"/>
-                <a:ea typeface="Arial" pitchFamily="34" charset="-122"/>
-                <a:cs typeface="Arial" pitchFamily="34" charset="-120"/>
-              </a:rPr>
-              <a:t>Chiudi con note</a:t>
-            </a:r>
-            <a:endParaRPr lang="en-US" sz="1000" dirty="0"/>
-          </a:p>
-        </p:txBody>
-      </p:sp>
-      <p:sp>
-        <p:nvSpPr>
-          <p:cNvPr id="22" name="Text 20"/>
-          <p:cNvSpPr/>
-          <p:nvPr/>
-        </p:nvSpPr>
-        <p:spPr>
-          <a:xfrm>
-            <a:off x="5029200" y="2788920"/>
-            <a:ext cx="1371600" cy="256032"/>
-          </a:xfrm>
-          <a:prstGeom prst="rect">
-            <a:avLst/>
-          </a:prstGeom>
-          <a:noFill/>
-          <a:ln/>
-        </p:spPr>
-        <p:txBody>
-          <a:bodyPr wrap="square" lIns="0" tIns="0" rIns="0" bIns="0" rtlCol="0" anchor="ctr"/>
-          <a:lstStyle/>
-          <a:p>
-            <a:pPr indent="0" marL="0">
-              <a:buNone/>
-            </a:pPr>
-            <a:r>
-              <a:rPr lang="en-US" sz="1000" b="1" dirty="0">
-                <a:solidFill>
-                  <a:srgbClr val="3B7EF7"/>
-                </a:solidFill>
-                <a:latin typeface="Courier New" pitchFamily="34" charset="0"/>
-                <a:ea typeface="Courier New" pitchFamily="34" charset="-122"/>
-                <a:cs typeface="Courier New" pitchFamily="34" charset="-120"/>
-              </a:rPr>
-              <a:t>/stato</a:t>
-            </a:r>
-            <a:endParaRPr lang="en-US" sz="1000" dirty="0"/>
-          </a:p>
-        </p:txBody>
-      </p:sp>
-      <p:sp>
-        <p:nvSpPr>
-          <p:cNvPr id="23" name="Text 21"/>
-          <p:cNvSpPr/>
-          <p:nvPr/>
-        </p:nvSpPr>
-        <p:spPr>
-          <a:xfrm>
-            <a:off x="6583680" y="2788920"/>
-            <a:ext cx="2286000" cy="256032"/>
-          </a:xfrm>
-          <a:prstGeom prst="rect">
-            <a:avLst/>
-          </a:prstGeom>
-          <a:noFill/>
-          <a:ln/>
-        </p:spPr>
-        <p:txBody>
-          <a:bodyPr wrap="square" lIns="0" tIns="0" rIns="0" bIns="0" rtlCol="0" anchor="ctr"/>
-          <a:lstStyle/>
-          <a:p>
-            <a:pPr indent="0" marL="0">
-              <a:buNone/>
-            </a:pPr>
-            <a:r>
-              <a:rPr lang="en-US" sz="1000" dirty="0">
-                <a:solidFill>
-                  <a:srgbClr val="CCCCCC"/>
-                </a:solidFill>
-                <a:latin typeface="Arial" pitchFamily="34" charset="0"/>
-                <a:ea typeface="Arial" pitchFamily="34" charset="-122"/>
-                <a:cs typeface="Arial" pitchFamily="34" charset="-120"/>
-              </a:rPr>
-              <a:t>Stato urgenze</a:t>
-            </a:r>
-            <a:endParaRPr lang="en-US" sz="1000" dirty="0"/>
-          </a:p>
-        </p:txBody>
-      </p:sp>
-      <p:sp>
-        <p:nvSpPr>
-          <p:cNvPr id="24" name="Text 22"/>
-          <p:cNvSpPr/>
-          <p:nvPr/>
-        </p:nvSpPr>
-        <p:spPr>
-          <a:xfrm>
-            <a:off x="5029200" y="3063240"/>
-            <a:ext cx="1371600" cy="256032"/>
-          </a:xfrm>
-          <a:prstGeom prst="rect">
-            <a:avLst/>
-          </a:prstGeom>
-          <a:noFill/>
-          <a:ln/>
-        </p:spPr>
-        <p:txBody>
-          <a:bodyPr wrap="square" lIns="0" tIns="0" rIns="0" bIns="0" rtlCol="0" anchor="ctr"/>
-          <a:lstStyle/>
-          <a:p>
-            <a:pPr indent="0" marL="0">
-              <a:buNone/>
-            </a:pPr>
-            <a:r>
-              <a:rPr lang="en-US" sz="1000" b="1" dirty="0">
-                <a:solidFill>
-                  <a:srgbClr val="17C0EB"/>
-                </a:solidFill>
-                <a:latin typeface="Courier New" pitchFamily="34" charset="0"/>
-                <a:ea typeface="Courier New" pitchFamily="34" charset="-122"/>
-                <a:cs typeface="Courier New" pitchFamily="34" charset="-120"/>
-              </a:rPr>
-              <a:t>/oggi</a:t>
-            </a:r>
-            <a:endParaRPr lang="en-US" sz="1000" dirty="0"/>
-          </a:p>
-        </p:txBody>
-      </p:sp>
-      <p:sp>
-        <p:nvSpPr>
-          <p:cNvPr id="25" name="Text 23"/>
-          <p:cNvSpPr/>
-          <p:nvPr/>
-        </p:nvSpPr>
-        <p:spPr>
-          <a:xfrm>
-            <a:off x="6583680" y="3063240"/>
-            <a:ext cx="2286000" cy="256032"/>
-          </a:xfrm>
-          <a:prstGeom prst="rect">
-            <a:avLst/>
-          </a:prstGeom>
-          <a:noFill/>
-          <a:ln/>
-        </p:spPr>
-        <p:txBody>
-          <a:bodyPr wrap="square" lIns="0" tIns="0" rIns="0" bIns="0" rtlCol="0" anchor="ctr"/>
-          <a:lstStyle/>
-          <a:p>
-            <a:pPr indent="0" marL="0">
-              <a:buNone/>
-            </a:pPr>
-            <a:r>
-              <a:rPr lang="en-US" sz="1000" dirty="0">
-                <a:solidFill>
-                  <a:srgbClr val="CCCCCC"/>
-                </a:solidFill>
-                <a:latin typeface="Arial" pitchFamily="34" charset="0"/>
-                <a:ea typeface="Arial" pitchFamily="34" charset="-122"/>
-                <a:cs typeface="Arial" pitchFamily="34" charset="-120"/>
-              </a:rPr>
-              <a:t>Piano di oggi</a:t>
-            </a:r>
-            <a:endParaRPr lang="en-US" sz="1000" dirty="0"/>
-          </a:p>
-        </p:txBody>
-      </p:sp>
-      <p:sp>
-        <p:nvSpPr>
-          <p:cNvPr id="26" name="Text 24"/>
-          <p:cNvSpPr/>
-          <p:nvPr/>
-        </p:nvSpPr>
-        <p:spPr>
-          <a:xfrm>
-            <a:off x="5029200" y="3337560"/>
-            <a:ext cx="1371600" cy="256032"/>
-          </a:xfrm>
-          <a:prstGeom prst="rect">
-            <a:avLst/>
-          </a:prstGeom>
-          <a:noFill/>
-          <a:ln/>
-        </p:spPr>
-        <p:txBody>
-          <a:bodyPr wrap="square" lIns="0" tIns="0" rIns="0" bIns="0" rtlCol="0" anchor="ctr"/>
-          <a:lstStyle/>
-          <a:p>
-            <a:pPr indent="0" marL="0">
-              <a:buNone/>
-            </a:pPr>
-            <a:r>
-              <a:rPr lang="en-US" sz="1000" b="1" dirty="0">
-                <a:solidFill>
-                  <a:srgbClr val="8854D0"/>
-                </a:solidFill>
-                <a:latin typeface="Courier New" pitchFamily="34" charset="0"/>
-                <a:ea typeface="Courier New" pitchFamily="34" charset="-122"/>
-                <a:cs typeface="Courier New" pitchFamily="34" charset="-120"/>
-              </a:rPr>
-              <a:t>/settimana</a:t>
-            </a:r>
-            <a:endParaRPr lang="en-US" sz="1000" dirty="0"/>
-          </a:p>
-        </p:txBody>
-      </p:sp>
-      <p:sp>
-        <p:nvSpPr>
-          <p:cNvPr id="27" name="Text 25"/>
-          <p:cNvSpPr/>
-          <p:nvPr/>
-        </p:nvSpPr>
-        <p:spPr>
-          <a:xfrm>
-            <a:off x="6583680" y="3337560"/>
-            <a:ext cx="2286000" cy="256032"/>
-          </a:xfrm>
-          <a:prstGeom prst="rect">
-            <a:avLst/>
-          </a:prstGeom>
-          <a:noFill/>
-          <a:ln/>
-        </p:spPr>
-        <p:txBody>
-          <a:bodyPr wrap="square" lIns="0" tIns="0" rIns="0" bIns="0" rtlCol="0" anchor="ctr"/>
-          <a:lstStyle/>
-          <a:p>
-            <a:pPr indent="0" marL="0">
-              <a:buNone/>
-            </a:pPr>
-            <a:r>
-              <a:rPr lang="en-US" sz="1000" dirty="0">
-                <a:solidFill>
-                  <a:srgbClr val="CCCCCC"/>
-                </a:solidFill>
-                <a:latin typeface="Arial" pitchFamily="34" charset="0"/>
-                <a:ea typeface="Arial" pitchFamily="34" charset="-122"/>
-                <a:cs typeface="Arial" pitchFamily="34" charset="-120"/>
-              </a:rPr>
-              <a:t>Piano settimana</a:t>
-            </a:r>
-            <a:endParaRPr lang="en-US" sz="1000" dirty="0"/>
-          </a:p>
-        </p:txBody>
-      </p:sp>
-      <p:sp>
-        <p:nvSpPr>
-          <p:cNvPr id="28" name="Text 26"/>
-          <p:cNvSpPr/>
-          <p:nvPr/>
-        </p:nvSpPr>
-        <p:spPr>
-          <a:xfrm>
-            <a:off x="5029200" y="3611880"/>
-            <a:ext cx="1371600" cy="256032"/>
-          </a:xfrm>
-          <a:prstGeom prst="rect">
-            <a:avLst/>
-          </a:prstGeom>
-          <a:noFill/>
-          <a:ln/>
-        </p:spPr>
-        <p:txBody>
-          <a:bodyPr wrap="square" lIns="0" tIns="0" rIns="0" bIns="0" rtlCol="0" anchor="ctr"/>
-          <a:lstStyle/>
-          <a:p>
-            <a:pPr indent="0" marL="0">
-              <a:buNone/>
-            </a:pPr>
-            <a:r>
-              <a:rPr lang="en-US" sz="1000" b="1" dirty="0">
-                <a:solidFill>
-                  <a:srgbClr val="F7B731"/>
-                </a:solidFill>
-                <a:latin typeface="Courier New" pitchFamily="34" charset="0"/>
-                <a:ea typeface="Courier New" pitchFamily="34" charset="-122"/>
-                <a:cs typeface="Courier New" pitchFamily="34" charset="-120"/>
-              </a:rPr>
-              <a:t>/ordine</a:t>
-            </a:r>
-            <a:endParaRPr lang="en-US" sz="1000" dirty="0"/>
-          </a:p>
-        </p:txBody>
-      </p:sp>
-      <p:sp>
-        <p:nvSpPr>
-          <p:cNvPr id="29" name="Text 27"/>
-          <p:cNvSpPr/>
-          <p:nvPr/>
-        </p:nvSpPr>
-        <p:spPr>
-          <a:xfrm>
-            <a:off x="6583680" y="3611880"/>
-            <a:ext cx="2286000" cy="256032"/>
-          </a:xfrm>
-          <a:prstGeom prst="rect">
-            <a:avLst/>
-          </a:prstGeom>
-          <a:noFill/>
-          <a:ln/>
-        </p:spPr>
-        <p:txBody>
-          <a:bodyPr wrap="square" lIns="0" tIns="0" rIns="0" bIns="0" rtlCol="0" anchor="ctr"/>
-          <a:lstStyle/>
-          <a:p>
-            <a:pPr indent="0" marL="0">
-              <a:buNone/>
-            </a:pPr>
-            <a:r>
-              <a:rPr lang="en-US" sz="1000" dirty="0">
-                <a:solidFill>
-                  <a:srgbClr val="CCCCCC"/>
-                </a:solidFill>
-                <a:latin typeface="Arial" pitchFamily="34" charset="0"/>
-                <a:ea typeface="Arial" pitchFamily="34" charset="-122"/>
-                <a:cs typeface="Arial" pitchFamily="34" charset="-120"/>
-              </a:rPr>
-              <a:t>Ordina ricambio</a:t>
-            </a:r>
-            <a:endParaRPr lang="en-US" sz="1000" dirty="0"/>
-          </a:p>
-        </p:txBody>
-      </p:sp>
-      <p:sp>
-        <p:nvSpPr>
-          <p:cNvPr id="30" name="Text 28"/>
-          <p:cNvSpPr/>
-          <p:nvPr/>
-        </p:nvSpPr>
-        <p:spPr>
-          <a:xfrm>
-            <a:off x="5029200" y="3886200"/>
-            <a:ext cx="1371600" cy="256032"/>
-          </a:xfrm>
-          <a:prstGeom prst="rect">
-            <a:avLst/>
-          </a:prstGeom>
-          <a:noFill/>
-          <a:ln/>
-        </p:spPr>
-        <p:txBody>
-          <a:bodyPr wrap="square" lIns="0" tIns="0" rIns="0" bIns="0" rtlCol="0" anchor="ctr"/>
-          <a:lstStyle/>
-          <a:p>
-            <a:pPr indent="0" marL="0">
-              <a:buNone/>
-            </a:pPr>
-            <a:r>
-              <a:rPr lang="en-US" sz="1000" b="1" dirty="0">
-                <a:solidFill>
-                  <a:srgbClr val="34D058"/>
-                </a:solidFill>
-                <a:latin typeface="Courier New" pitchFamily="34" charset="0"/>
-                <a:ea typeface="Courier New" pitchFamily="34" charset="-122"/>
-                <a:cs typeface="Courier New" pitchFamily="34" charset="-120"/>
-              </a:rPr>
-              <a:t>Foto/testo</a:t>
-            </a:r>
-            <a:endParaRPr lang="en-US" sz="1000" dirty="0"/>
-          </a:p>
-        </p:txBody>
-      </p:sp>
-      <p:sp>
-        <p:nvSpPr>
-          <p:cNvPr id="31" name="Text 29"/>
-          <p:cNvSpPr/>
-          <p:nvPr/>
-        </p:nvSpPr>
-        <p:spPr>
-          <a:xfrm>
-            <a:off x="6583680" y="3886200"/>
-            <a:ext cx="2286000" cy="256032"/>
-          </a:xfrm>
-          <a:prstGeom prst="rect">
-            <a:avLst/>
-          </a:prstGeom>
-          <a:noFill/>
-          <a:ln/>
-        </p:spPr>
-        <p:txBody>
-          <a:bodyPr wrap="square" lIns="0" tIns="0" rIns="0" bIns="0" rtlCol="0" anchor="ctr"/>
-          <a:lstStyle/>
-          <a:p>
-            <a:pPr indent="0" marL="0">
-              <a:buNone/>
-            </a:pPr>
-            <a:r>
-              <a:rPr lang="en-US" sz="1000" dirty="0">
-                <a:solidFill>
-                  <a:srgbClr val="CCCCCC"/>
-                </a:solidFill>
-                <a:latin typeface="Arial" pitchFamily="34" charset="0"/>
-                <a:ea typeface="Arial" pitchFamily="34" charset="-122"/>
-                <a:cs typeface="Arial" pitchFamily="34" charset="-120"/>
-              </a:rPr>
-              <a:t>AI analizza</a:t>
-            </a:r>
-            <a:endParaRPr lang="en-US" sz="1000" dirty="0"/>
-          </a:p>
-        </p:txBody>
-      </p:sp>
-      <p:sp>
-        <p:nvSpPr>
-          <p:cNvPr id="32" name="Shape 30"/>
-          <p:cNvSpPr/>
-          <p:nvPr/>
-        </p:nvSpPr>
-        <p:spPr>
-          <a:xfrm>
-            <a:off x="5029200" y="4251960"/>
-            <a:ext cx="3840480" cy="548640"/>
-          </a:xfrm>
-          <a:prstGeom prst="rect">
-            <a:avLst/>
-          </a:prstGeom>
-          <a:solidFill>
-            <a:srgbClr val="222222"/>
-          </a:solidFill>
-          <a:ln/>
-          <a:effectLst>
-            <a:outerShdw sx="100000" sy="100000" kx="0" ky="0" algn="bl" rotWithShape="0" blurRad="76200" dist="25400" dir="8100000">
-              <a:srgbClr val="000000">
-                <a:alpha val="40000"/>
-              </a:srgbClr>
-            </a:outerShdw>
-          </a:effectLst>
-        </p:spPr>
-      </p:sp>
-      <p:sp>
-        <p:nvSpPr>
-          <p:cNvPr id="33" name="Shape 31"/>
-          <p:cNvSpPr/>
-          <p:nvPr/>
-        </p:nvSpPr>
-        <p:spPr>
-          <a:xfrm>
-            <a:off x="5029200" y="4251960"/>
+          <p:cNvPr id="23" name="Shape 20"/>
+          <p:cNvSpPr/>
+          <p:nvPr/>
+        </p:nvSpPr>
+        <p:spPr>
+          <a:xfrm>
+            <a:off x="2560320" y="4251960"/>
             <a:ext cx="3840480" cy="27432"/>
           </a:xfrm>
           <a:prstGeom prst="rect">
@@ -13973,13 +8424,13 @@
       </p:sp>
       <p:sp>
         <p:nvSpPr>
-          <p:cNvPr id="34" name="Text 32"/>
-          <p:cNvSpPr/>
-          <p:nvPr/>
-        </p:nvSpPr>
-        <p:spPr>
-          <a:xfrm>
-            <a:off x="5120640" y="4297680"/>
+          <p:cNvPr id="24" name="Text 21"/>
+          <p:cNvSpPr/>
+          <p:nvPr/>
+        </p:nvSpPr>
+        <p:spPr>
+          <a:xfrm>
+            <a:off x="2651760" y="4297680"/>
             <a:ext cx="3657600" cy="457200"/>
           </a:xfrm>
           <a:prstGeom prst="rect">
@@ -14004,7 +8455,7 @@
                 <a:ea typeface="Arial" pitchFamily="34" charset="-122"/>
                 <a:cs typeface="Arial" pitchFamily="34" charset="-120"/>
               </a:rPr>
-              <a:t>AI Vision: invia foto guasto, l'AI identifica il problema e crea urgenza automaticamente</a:t>
+              <a:t>AI Engine: invia foto guasto, l'AI identifica il problema e crea urgenza automaticamente</a:t>
             </a:r>
             <a:endParaRPr lang="en-US" sz="900" dirty="0"/>
           </a:p>
